--- a/04_Outputs/Reports/UCI_Retail_Executive_Presentation.pptx
+++ b/04_Outputs/Reports/UCI_Retail_Executive_Presentation.pptx
@@ -312,7 +312,7 @@
           <a:p>
             <a:fld id="{5BCAD085-E8A6-8845-BD4E-CB4CCA059FC4}" type="datetimeFigureOut">
               <a:rPr lang="en-US" smtClean="0"/>
-              <a:t>9/13/2026</a:t>
+              <a:t>9/17/2026</a:t>
             </a:fld>
             <a:endParaRPr lang="en-US"/>
           </a:p>
@@ -480,7 +480,7 @@
           <a:p>
             <a:fld id="{5BCAD085-E8A6-8845-BD4E-CB4CCA059FC4}" type="datetimeFigureOut">
               <a:rPr lang="en-US" smtClean="0"/>
-              <a:t>9/13/2026</a:t>
+              <a:t>9/17/2026</a:t>
             </a:fld>
             <a:endParaRPr lang="en-US"/>
           </a:p>
@@ -658,7 +658,7 @@
           <a:p>
             <a:fld id="{5BCAD085-E8A6-8845-BD4E-CB4CCA059FC4}" type="datetimeFigureOut">
               <a:rPr lang="en-US" smtClean="0"/>
-              <a:t>9/13/2026</a:t>
+              <a:t>9/17/2026</a:t>
             </a:fld>
             <a:endParaRPr lang="en-US"/>
           </a:p>
@@ -826,7 +826,7 @@
           <a:p>
             <a:fld id="{5BCAD085-E8A6-8845-BD4E-CB4CCA059FC4}" type="datetimeFigureOut">
               <a:rPr lang="en-US" smtClean="0"/>
-              <a:t>9/13/2026</a:t>
+              <a:t>9/17/2026</a:t>
             </a:fld>
             <a:endParaRPr lang="en-US"/>
           </a:p>
@@ -1071,7 +1071,7 @@
           <a:p>
             <a:fld id="{5BCAD085-E8A6-8845-BD4E-CB4CCA059FC4}" type="datetimeFigureOut">
               <a:rPr lang="en-US" smtClean="0"/>
-              <a:t>9/13/2026</a:t>
+              <a:t>9/17/2026</a:t>
             </a:fld>
             <a:endParaRPr lang="en-US"/>
           </a:p>
@@ -1356,7 +1356,7 @@
           <a:p>
             <a:fld id="{5BCAD085-E8A6-8845-BD4E-CB4CCA059FC4}" type="datetimeFigureOut">
               <a:rPr lang="en-US" smtClean="0"/>
-              <a:t>9/13/2026</a:t>
+              <a:t>9/17/2026</a:t>
             </a:fld>
             <a:endParaRPr lang="en-US"/>
           </a:p>
@@ -1775,7 +1775,7 @@
           <a:p>
             <a:fld id="{5BCAD085-E8A6-8845-BD4E-CB4CCA059FC4}" type="datetimeFigureOut">
               <a:rPr lang="en-US" smtClean="0"/>
-              <a:t>9/13/2026</a:t>
+              <a:t>9/17/2026</a:t>
             </a:fld>
             <a:endParaRPr lang="en-US"/>
           </a:p>
@@ -1892,7 +1892,7 @@
           <a:p>
             <a:fld id="{5BCAD085-E8A6-8845-BD4E-CB4CCA059FC4}" type="datetimeFigureOut">
               <a:rPr lang="en-US" smtClean="0"/>
-              <a:t>9/13/2026</a:t>
+              <a:t>9/17/2026</a:t>
             </a:fld>
             <a:endParaRPr lang="en-US"/>
           </a:p>
@@ -1987,7 +1987,7 @@
           <a:p>
             <a:fld id="{5BCAD085-E8A6-8845-BD4E-CB4CCA059FC4}" type="datetimeFigureOut">
               <a:rPr lang="en-US" smtClean="0"/>
-              <a:t>9/13/2026</a:t>
+              <a:t>9/17/2026</a:t>
             </a:fld>
             <a:endParaRPr lang="en-US"/>
           </a:p>
@@ -2262,7 +2262,7 @@
           <a:p>
             <a:fld id="{5BCAD085-E8A6-8845-BD4E-CB4CCA059FC4}" type="datetimeFigureOut">
               <a:rPr lang="en-US" smtClean="0"/>
-              <a:t>9/13/2026</a:t>
+              <a:t>9/17/2026</a:t>
             </a:fld>
             <a:endParaRPr lang="en-US"/>
           </a:p>
@@ -2514,7 +2514,7 @@
           <a:p>
             <a:fld id="{5BCAD085-E8A6-8845-BD4E-CB4CCA059FC4}" type="datetimeFigureOut">
               <a:rPr lang="en-US" smtClean="0"/>
-              <a:t>9/13/2026</a:t>
+              <a:t>9/17/2026</a:t>
             </a:fld>
             <a:endParaRPr lang="en-US"/>
           </a:p>
@@ -2725,7 +2725,7 @@
           <a:p>
             <a:fld id="{5BCAD085-E8A6-8845-BD4E-CB4CCA059FC4}" type="datetimeFigureOut">
               <a:rPr lang="en-US" smtClean="0"/>
-              <a:t>9/13/2026</a:t>
+              <a:t>9/17/2026</a:t>
             </a:fld>
             <a:endParaRPr lang="en-US"/>
           </a:p>
@@ -3116,22 +3116,22 @@
         </p:nvSpPr>
         <p:spPr>
           <a:xfrm>
-            <a:off x="914400" y="1371600"/>
-            <a:ext cx="10058400" cy="1828800"/>
-          </a:xfrm>
-          <a:prstGeom prst="rect">
-            <a:avLst/>
-          </a:prstGeom>
-          <a:noFill/>
-        </p:spPr>
-        <p:txBody>
-          <a:bodyPr wrap="square">
+            <a:off x="914400" y="1234440"/>
+            <a:ext cx="10058400" cy="822960"/>
+          </a:xfrm>
+          <a:prstGeom prst="rect">
+            <a:avLst/>
+          </a:prstGeom>
+          <a:noFill/>
+        </p:spPr>
+        <p:txBody>
+          <a:bodyPr wrap="square" anchor="t">
             <a:spAutoFit/>
           </a:bodyPr>
           <a:lstStyle/>
           <a:p>
             <a:pPr algn="l">
-              <a:defRPr sz="5400" b="1">
+              <a:defRPr sz="4800" b="1" i="0">
                 <a:solidFill>
                   <a:srgbClr val="FFFFFF"/>
                 </a:solidFill>
@@ -3141,9 +3141,32 @@
               <a:t>UCI Online Retail</a:t>
             </a:r>
           </a:p>
+        </p:txBody>
+      </p:sp>
+      <p:sp>
+        <p:nvSpPr>
+          <p:cNvPr id="3" name="TextBox 2"/>
+          <p:cNvSpPr txBox="1"/>
+          <p:nvPr/>
+        </p:nvSpPr>
+        <p:spPr>
+          <a:xfrm>
+            <a:off x="914400" y="2057400"/>
+            <a:ext cx="10058400" cy="594360"/>
+          </a:xfrm>
+          <a:prstGeom prst="rect">
+            <a:avLst/>
+          </a:prstGeom>
+          <a:noFill/>
+        </p:spPr>
+        <p:txBody>
+          <a:bodyPr wrap="square" anchor="t">
+            <a:spAutoFit/>
+          </a:bodyPr>
+          <a:lstStyle/>
           <a:p>
             <a:pPr algn="l">
-              <a:defRPr sz="3200">
+              <a:defRPr sz="2700" b="0" i="0">
                 <a:solidFill>
                   <a:srgbClr val="BBDEFB"/>
                 </a:solidFill>
@@ -3151,55 +3174,6 @@
             </a:pPr>
             <a:r>
               <a:t>Business Data Analysis — Executive Insights</a:t>
-            </a:r>
-          </a:p>
-        </p:txBody>
-      </p:sp>
-      <p:sp>
-        <p:nvSpPr>
-          <p:cNvPr id="3" name="TextBox 2"/>
-          <p:cNvSpPr txBox="1"/>
-          <p:nvPr/>
-        </p:nvSpPr>
-        <p:spPr>
-          <a:xfrm>
-            <a:off x="914400" y="4114800"/>
-            <a:ext cx="3935693" cy="707886"/>
-          </a:xfrm>
-          <a:prstGeom prst="rect">
-            <a:avLst/>
-          </a:prstGeom>
-          <a:noFill/>
-        </p:spPr>
-        <p:txBody>
-          <a:bodyPr wrap="none">
-            <a:spAutoFit/>
-          </a:bodyPr>
-          <a:lstStyle/>
-          <a:p>
-            <a:pPr>
-              <a:defRPr sz="2200">
-                <a:solidFill>
-                  <a:srgbClr val="FFFFFF"/>
-                </a:solidFill>
-              </a:defRPr>
-            </a:pPr>
-            <a:r>
-              <a:rPr b="1" dirty="0"/>
-              <a:t>Prepared by: Abdeljalil El Khyati</a:t>
-            </a:r>
-          </a:p>
-          <a:p>
-            <a:pPr>
-              <a:defRPr sz="1800">
-                <a:solidFill>
-                  <a:srgbClr val="BBDEFB"/>
-                </a:solidFill>
-              </a:defRPr>
-            </a:pPr>
-            <a:r>
-              <a:rPr b="1" dirty="0"/>
-              <a:t>Lead Data Analyst | September 2026</a:t>
             </a:r>
           </a:p>
         </p:txBody>
@@ -3212,8 +3186,8 @@
         </p:nvSpPr>
         <p:spPr>
           <a:xfrm>
-            <a:off x="914400" y="3840480"/>
-            <a:ext cx="2743200" cy="50800"/>
+            <a:off x="914400" y="2971800"/>
+            <a:ext cx="2560320" cy="63500"/>
           </a:xfrm>
           <a:prstGeom prst="rect">
             <a:avLst/>
@@ -3245,6 +3219,111 @@
           <a:p>
             <a:pPr algn="ctr"/>
             <a:endParaRPr/>
+          </a:p>
+        </p:txBody>
+      </p:sp>
+      <p:sp>
+        <p:nvSpPr>
+          <p:cNvPr id="5" name="TextBox 4"/>
+          <p:cNvSpPr txBox="1"/>
+          <p:nvPr/>
+        </p:nvSpPr>
+        <p:spPr>
+          <a:xfrm>
+            <a:off x="914400" y="3794760"/>
+            <a:ext cx="7315200" cy="457200"/>
+          </a:xfrm>
+          <a:prstGeom prst="rect">
+            <a:avLst/>
+          </a:prstGeom>
+          <a:noFill/>
+        </p:spPr>
+        <p:txBody>
+          <a:bodyPr wrap="square" anchor="t">
+            <a:spAutoFit/>
+          </a:bodyPr>
+          <a:lstStyle/>
+          <a:p>
+            <a:pPr algn="l">
+              <a:defRPr sz="1900" b="0" i="0">
+                <a:solidFill>
+                  <a:srgbClr val="FFFFFF"/>
+                </a:solidFill>
+              </a:defRPr>
+            </a:pPr>
+            <a:r>
+              <a:t>Prepared by: Abdeljalil El Khyati</a:t>
+            </a:r>
+          </a:p>
+        </p:txBody>
+      </p:sp>
+      <p:sp>
+        <p:nvSpPr>
+          <p:cNvPr id="6" name="TextBox 5"/>
+          <p:cNvSpPr txBox="1"/>
+          <p:nvPr/>
+        </p:nvSpPr>
+        <p:spPr>
+          <a:xfrm>
+            <a:off x="914400" y="4315968"/>
+            <a:ext cx="7315200" cy="411480"/>
+          </a:xfrm>
+          <a:prstGeom prst="rect">
+            <a:avLst/>
+          </a:prstGeom>
+          <a:noFill/>
+        </p:spPr>
+        <p:txBody>
+          <a:bodyPr wrap="square" anchor="t">
+            <a:spAutoFit/>
+          </a:bodyPr>
+          <a:lstStyle/>
+          <a:p>
+            <a:pPr algn="l">
+              <a:defRPr sz="1500" b="0" i="0">
+                <a:solidFill>
+                  <a:srgbClr val="BBDEFB"/>
+                </a:solidFill>
+              </a:defRPr>
+            </a:pPr>
+            <a:r>
+              <a:t>Lead Data Analyst | September 2026</a:t>
+            </a:r>
+          </a:p>
+        </p:txBody>
+      </p:sp>
+      <p:sp>
+        <p:nvSpPr>
+          <p:cNvPr id="7" name="TextBox 6"/>
+          <p:cNvSpPr txBox="1"/>
+          <p:nvPr/>
+        </p:nvSpPr>
+        <p:spPr>
+          <a:xfrm>
+            <a:off x="914400" y="5577840"/>
+            <a:ext cx="7772400" cy="320040"/>
+          </a:xfrm>
+          <a:prstGeom prst="rect">
+            <a:avLst/>
+          </a:prstGeom>
+          <a:noFill/>
+        </p:spPr>
+        <p:txBody>
+          <a:bodyPr wrap="square" anchor="t">
+            <a:spAutoFit/>
+          </a:bodyPr>
+          <a:lstStyle/>
+          <a:p>
+            <a:pPr algn="l">
+              <a:defRPr sz="1100" b="0" i="1">
+                <a:solidFill>
+                  <a:srgbClr val="90CAF9"/>
+                </a:solidFill>
+              </a:defRPr>
+            </a:pPr>
+            <a:r>
+              <a:t>UCI Online Retail Dataset — ID 352</a:t>
+            </a:r>
           </a:p>
         </p:txBody>
       </p:sp>
@@ -3259,6 +3338,14 @@
 <file path=ppt/slides/slide10.xml><?xml version="1.0" encoding="utf-8"?>
 <p:sld xmlns:a="http://schemas.openxmlformats.org/drawingml/2006/main" xmlns:r="http://schemas.openxmlformats.org/officeDocument/2006/relationships" xmlns:p="http://schemas.openxmlformats.org/presentationml/2006/main">
   <p:cSld>
+    <p:bg>
+      <p:bgPr>
+        <a:solidFill>
+          <a:srgbClr val="FFFFFF"/>
+        </a:solidFill>
+        <a:effectLst/>
+      </p:bgPr>
+    </p:bg>
     <p:spTree>
       <p:nvGrpSpPr>
         <p:cNvPr id="1" name=""/>
@@ -3282,7 +3369,7 @@
         <p:spPr>
           <a:xfrm>
             <a:off x="0" y="0"/>
-            <a:ext cx="12191695" cy="1097280"/>
+            <a:ext cx="12191695" cy="987552"/>
           </a:xfrm>
           <a:prstGeom prst="rect">
             <a:avLst/>
@@ -3325,8 +3412,8 @@
         </p:nvSpPr>
         <p:spPr>
           <a:xfrm>
-            <a:off x="548640" y="137160"/>
-            <a:ext cx="10972800" cy="822960"/>
+            <a:off x="502920" y="109728"/>
+            <a:ext cx="11064240" cy="594360"/>
           </a:xfrm>
           <a:prstGeom prst="rect">
             <a:avLst/>
@@ -3340,7 +3427,7 @@
           <a:lstStyle/>
           <a:p>
             <a:pPr>
-              <a:defRPr sz="3200" b="1">
+              <a:defRPr sz="2700" b="1">
                 <a:solidFill>
                   <a:srgbClr val="FFFFFF"/>
                 </a:solidFill>
@@ -3360,8 +3447,8 @@
         </p:nvSpPr>
         <p:spPr>
           <a:xfrm>
-            <a:off x="548640" y="1143000"/>
-            <a:ext cx="10972800" cy="457200"/>
+            <a:off x="530352" y="1069848"/>
+            <a:ext cx="10972800" cy="411480"/>
           </a:xfrm>
           <a:prstGeom prst="rect">
             <a:avLst/>
@@ -3375,113 +3462,61 @@
           <a:lstStyle/>
           <a:p>
             <a:pPr>
-              <a:defRPr sz="1600" i="1">
+              <a:defRPr sz="1300">
                 <a:solidFill>
                   <a:srgbClr val="2E75B6"/>
                 </a:solidFill>
               </a:defRPr>
             </a:pPr>
             <a:r>
-              <a:t>5 Strategic Areas for Future Investigation</a:t>
-            </a:r>
-          </a:p>
-        </p:txBody>
-      </p:sp>
-      <p:sp>
-        <p:nvSpPr>
-          <p:cNvPr id="5" name="TextBox 4"/>
-          <p:cNvSpPr txBox="1"/>
-          <p:nvPr/>
-        </p:nvSpPr>
-        <p:spPr>
-          <a:xfrm>
-            <a:off x="548640" y="1737360"/>
-            <a:ext cx="10972800" cy="4572000"/>
-          </a:xfrm>
-          <a:prstGeom prst="rect">
-            <a:avLst/>
-          </a:prstGeom>
-          <a:noFill/>
-        </p:spPr>
-        <p:txBody>
-          <a:bodyPr wrap="square">
-            <a:spAutoFit/>
-          </a:bodyPr>
-          <a:lstStyle/>
-          <a:p>
-            <a:pPr>
-              <a:spcAft>
-                <a:spcPts val="1200"/>
-              </a:spcAft>
-              <a:defRPr sz="2000">
-                <a:solidFill>
-                  <a:srgbClr val="333333"/>
-                </a:solidFill>
-              </a:defRPr>
-            </a:pPr>
-            <a:r>
-              <a:t>1️⃣ Customer Lifetime Value (CLV): How much is a Champion worth over their entire relationship with the company?</a:t>
-            </a:r>
-          </a:p>
-          <a:p>
-            <a:pPr>
-              <a:spcAft>
-                <a:spcPts val="1200"/>
-              </a:spcAft>
-              <a:defRPr sz="2000">
-                <a:solidFill>
-                  <a:srgbClr val="333333"/>
-                </a:solidFill>
-              </a:defRPr>
-            </a:pPr>
-            <a:r>
-              <a:t>2️⃣ Cohort Retention Analysis: Are we successfully retaining customers acquired in different months, or is churn accelerating?</a:t>
-            </a:r>
-          </a:p>
-          <a:p>
-            <a:pPr>
-              <a:spcAft>
-                <a:spcPts val="1200"/>
-              </a:spcAft>
-              <a:defRPr sz="2000">
-                <a:solidFill>
-                  <a:srgbClr val="333333"/>
-                </a:solidFill>
-              </a:defRPr>
-            </a:pPr>
-            <a:r>
-              <a:t>3️⃣ Market Basket Analysis: Which products are frequently purchased together? (Cross-selling opportunities).</a:t>
-            </a:r>
-          </a:p>
-          <a:p>
-            <a:pPr>
-              <a:spcAft>
-                <a:spcPts val="1200"/>
-              </a:spcAft>
-              <a:defRPr sz="2000">
-                <a:solidFill>
-                  <a:srgbClr val="333333"/>
-                </a:solidFill>
-              </a:defRPr>
-            </a:pPr>
-            <a:r>
-              <a:t>4️⃣ Pricing Elasticity: Can we increase prices on high-demand B2B products without losing volume?</a:t>
-            </a:r>
-          </a:p>
-          <a:p>
-            <a:pPr>
-              <a:spcAft>
-                <a:spcPts val="1200"/>
-              </a:spcAft>
-              <a:defRPr sz="2000">
-                <a:solidFill>
-                  <a:srgbClr val="333333"/>
-                </a:solidFill>
-              </a:defRPr>
-            </a:pPr>
-            <a:r>
-              <a:t>5️⃣ Channel Attribution: Where do 'Unknown' customers come from, and can we convert them more efficiently?</a:t>
-            </a:r>
+              <a:t>The current analysis identifies where deeper analysis should begin</a:t>
+            </a:r>
+          </a:p>
+        </p:txBody>
+      </p:sp>
+      <p:sp>
+        <p:nvSpPr>
+          <p:cNvPr id="5" name="Rounded Rectangle 4"/>
+          <p:cNvSpPr/>
+          <p:nvPr/>
+        </p:nvSpPr>
+        <p:spPr>
+          <a:xfrm>
+            <a:off x="548640" y="1417320"/>
+            <a:ext cx="5440680" cy="1545336"/>
+          </a:xfrm>
+          <a:prstGeom prst="roundRect">
+            <a:avLst/>
+          </a:prstGeom>
+          <a:solidFill>
+            <a:srgbClr val="E8F1FA"/>
+          </a:solidFill>
+          <a:ln w="13970">
+            <a:solidFill>
+              <a:srgbClr val="2E75B6"/>
+            </a:solidFill>
+          </a:ln>
+        </p:spPr>
+        <p:style>
+          <a:lnRef idx="1">
+            <a:schemeClr val="accent1"/>
+          </a:lnRef>
+          <a:fillRef idx="3">
+            <a:schemeClr val="accent1"/>
+          </a:fillRef>
+          <a:effectRef idx="2">
+            <a:schemeClr val="accent1"/>
+          </a:effectRef>
+          <a:fontRef idx="minor">
+            <a:schemeClr val="lt1"/>
+          </a:fontRef>
+        </p:style>
+        <p:txBody>
+          <a:bodyPr rtlCol="0" anchor="ctr"/>
+          <a:lstStyle/>
+          <a:p>
+            <a:pPr algn="ctr"/>
+            <a:endParaRPr/>
           </a:p>
         </p:txBody>
       </p:sp>
@@ -3493,8 +3528,728 @@
         </p:nvSpPr>
         <p:spPr>
           <a:xfrm>
-            <a:off x="548640" y="6400800"/>
-            <a:ext cx="10972800" cy="365760"/>
+            <a:off x="713232" y="1600200"/>
+            <a:ext cx="502920" cy="411480"/>
+          </a:xfrm>
+          <a:prstGeom prst="rect">
+            <a:avLst/>
+          </a:prstGeom>
+          <a:noFill/>
+        </p:spPr>
+        <p:txBody>
+          <a:bodyPr wrap="square" anchor="t">
+            <a:spAutoFit/>
+          </a:bodyPr>
+          <a:lstStyle/>
+          <a:p>
+            <a:pPr algn="ctr">
+              <a:defRPr sz="1700" b="1" i="0">
+                <a:solidFill>
+                  <a:srgbClr val="2E75B6"/>
+                </a:solidFill>
+              </a:defRPr>
+            </a:pPr>
+            <a:r>
+              <a:t>01</a:t>
+            </a:r>
+          </a:p>
+        </p:txBody>
+      </p:sp>
+      <p:sp>
+        <p:nvSpPr>
+          <p:cNvPr id="7" name="TextBox 6"/>
+          <p:cNvSpPr txBox="1"/>
+          <p:nvPr/>
+        </p:nvSpPr>
+        <p:spPr>
+          <a:xfrm>
+            <a:off x="1298448" y="1581912"/>
+            <a:ext cx="4297680" cy="320040"/>
+          </a:xfrm>
+          <a:prstGeom prst="rect">
+            <a:avLst/>
+          </a:prstGeom>
+          <a:noFill/>
+        </p:spPr>
+        <p:txBody>
+          <a:bodyPr wrap="square" anchor="t">
+            <a:spAutoFit/>
+          </a:bodyPr>
+          <a:lstStyle/>
+          <a:p>
+            <a:pPr algn="l">
+              <a:defRPr sz="1500" b="1" i="0">
+                <a:solidFill>
+                  <a:srgbClr val="2D3238"/>
+                </a:solidFill>
+              </a:defRPr>
+            </a:pPr>
+            <a:r>
+              <a:t>Retention testing</a:t>
+            </a:r>
+          </a:p>
+        </p:txBody>
+      </p:sp>
+      <p:sp>
+        <p:nvSpPr>
+          <p:cNvPr id="8" name="TextBox 7"/>
+          <p:cNvSpPr txBox="1"/>
+          <p:nvPr/>
+        </p:nvSpPr>
+        <p:spPr>
+          <a:xfrm>
+            <a:off x="1298448" y="1984248"/>
+            <a:ext cx="4343400" cy="777240"/>
+          </a:xfrm>
+          <a:prstGeom prst="rect">
+            <a:avLst/>
+          </a:prstGeom>
+          <a:noFill/>
+        </p:spPr>
+        <p:txBody>
+          <a:bodyPr wrap="square" anchor="t">
+            <a:spAutoFit/>
+          </a:bodyPr>
+          <a:lstStyle/>
+          <a:p>
+            <a:pPr algn="l">
+              <a:defRPr sz="1150" b="0" i="0">
+                <a:solidFill>
+                  <a:srgbClr val="6E7681"/>
+                </a:solidFill>
+              </a:defRPr>
+            </a:pPr>
+            <a:r>
+              <a:t>Measure campaign lift among Potential Loyalists / At Risk customers.</a:t>
+            </a:r>
+          </a:p>
+        </p:txBody>
+      </p:sp>
+      <p:sp>
+        <p:nvSpPr>
+          <p:cNvPr id="9" name="Rounded Rectangle 8"/>
+          <p:cNvSpPr/>
+          <p:nvPr/>
+        </p:nvSpPr>
+        <p:spPr>
+          <a:xfrm>
+            <a:off x="6199632" y="1417320"/>
+            <a:ext cx="5440680" cy="1545336"/>
+          </a:xfrm>
+          <a:prstGeom prst="roundRect">
+            <a:avLst/>
+          </a:prstGeom>
+          <a:solidFill>
+            <a:srgbClr val="EAF6EF"/>
+          </a:solidFill>
+          <a:ln w="13970">
+            <a:solidFill>
+              <a:srgbClr val="2E8B57"/>
+            </a:solidFill>
+          </a:ln>
+        </p:spPr>
+        <p:style>
+          <a:lnRef idx="1">
+            <a:schemeClr val="accent1"/>
+          </a:lnRef>
+          <a:fillRef idx="3">
+            <a:schemeClr val="accent1"/>
+          </a:fillRef>
+          <a:effectRef idx="2">
+            <a:schemeClr val="accent1"/>
+          </a:effectRef>
+          <a:fontRef idx="minor">
+            <a:schemeClr val="lt1"/>
+          </a:fontRef>
+        </p:style>
+        <p:txBody>
+          <a:bodyPr rtlCol="0" anchor="ctr"/>
+          <a:lstStyle/>
+          <a:p>
+            <a:pPr algn="ctr"/>
+            <a:endParaRPr/>
+          </a:p>
+        </p:txBody>
+      </p:sp>
+      <p:sp>
+        <p:nvSpPr>
+          <p:cNvPr id="10" name="TextBox 9"/>
+          <p:cNvSpPr txBox="1"/>
+          <p:nvPr/>
+        </p:nvSpPr>
+        <p:spPr>
+          <a:xfrm>
+            <a:off x="6364224" y="1600200"/>
+            <a:ext cx="502920" cy="411480"/>
+          </a:xfrm>
+          <a:prstGeom prst="rect">
+            <a:avLst/>
+          </a:prstGeom>
+          <a:noFill/>
+        </p:spPr>
+        <p:txBody>
+          <a:bodyPr wrap="square" anchor="t">
+            <a:spAutoFit/>
+          </a:bodyPr>
+          <a:lstStyle/>
+          <a:p>
+            <a:pPr algn="ctr">
+              <a:defRPr sz="1700" b="1" i="0">
+                <a:solidFill>
+                  <a:srgbClr val="2E8B57"/>
+                </a:solidFill>
+              </a:defRPr>
+            </a:pPr>
+            <a:r>
+              <a:t>02</a:t>
+            </a:r>
+          </a:p>
+        </p:txBody>
+      </p:sp>
+      <p:sp>
+        <p:nvSpPr>
+          <p:cNvPr id="11" name="TextBox 10"/>
+          <p:cNvSpPr txBox="1"/>
+          <p:nvPr/>
+        </p:nvSpPr>
+        <p:spPr>
+          <a:xfrm>
+            <a:off x="6949440" y="1581912"/>
+            <a:ext cx="4297680" cy="320040"/>
+          </a:xfrm>
+          <a:prstGeom prst="rect">
+            <a:avLst/>
+          </a:prstGeom>
+          <a:noFill/>
+        </p:spPr>
+        <p:txBody>
+          <a:bodyPr wrap="square" anchor="t">
+            <a:spAutoFit/>
+          </a:bodyPr>
+          <a:lstStyle/>
+          <a:p>
+            <a:pPr algn="l">
+              <a:defRPr sz="1500" b="1" i="0">
+                <a:solidFill>
+                  <a:srgbClr val="2D3238"/>
+                </a:solidFill>
+              </a:defRPr>
+            </a:pPr>
+            <a:r>
+              <a:t>Customer lifetime value</a:t>
+            </a:r>
+          </a:p>
+        </p:txBody>
+      </p:sp>
+      <p:sp>
+        <p:nvSpPr>
+          <p:cNvPr id="12" name="TextBox 11"/>
+          <p:cNvSpPr txBox="1"/>
+          <p:nvPr/>
+        </p:nvSpPr>
+        <p:spPr>
+          <a:xfrm>
+            <a:off x="6949440" y="1984248"/>
+            <a:ext cx="4343400" cy="777240"/>
+          </a:xfrm>
+          <a:prstGeom prst="rect">
+            <a:avLst/>
+          </a:prstGeom>
+          <a:noFill/>
+        </p:spPr>
+        <p:txBody>
+          <a:bodyPr wrap="square" anchor="t">
+            <a:spAutoFit/>
+          </a:bodyPr>
+          <a:lstStyle/>
+          <a:p>
+            <a:pPr algn="l">
+              <a:defRPr sz="1150" b="0" i="0">
+                <a:solidFill>
+                  <a:srgbClr val="6E7681"/>
+                </a:solidFill>
+              </a:defRPr>
+            </a:pPr>
+            <a:r>
+              <a:t>Estimate the long-term value of Champions and Loyal Customers.</a:t>
+            </a:r>
+          </a:p>
+        </p:txBody>
+      </p:sp>
+      <p:sp>
+        <p:nvSpPr>
+          <p:cNvPr id="13" name="Rounded Rectangle 12"/>
+          <p:cNvSpPr/>
+          <p:nvPr/>
+        </p:nvSpPr>
+        <p:spPr>
+          <a:xfrm>
+            <a:off x="548640" y="3493008"/>
+            <a:ext cx="5440680" cy="1453896"/>
+          </a:xfrm>
+          <a:prstGeom prst="roundRect">
+            <a:avLst/>
+          </a:prstGeom>
+          <a:solidFill>
+            <a:srgbClr val="FCF2E6"/>
+          </a:solidFill>
+          <a:ln w="13970">
+            <a:solidFill>
+              <a:srgbClr val="E67E22"/>
+            </a:solidFill>
+          </a:ln>
+        </p:spPr>
+        <p:style>
+          <a:lnRef idx="1">
+            <a:schemeClr val="accent1"/>
+          </a:lnRef>
+          <a:fillRef idx="3">
+            <a:schemeClr val="accent1"/>
+          </a:fillRef>
+          <a:effectRef idx="2">
+            <a:schemeClr val="accent1"/>
+          </a:effectRef>
+          <a:fontRef idx="minor">
+            <a:schemeClr val="lt1"/>
+          </a:fontRef>
+        </p:style>
+        <p:txBody>
+          <a:bodyPr rtlCol="0" anchor="ctr"/>
+          <a:lstStyle/>
+          <a:p>
+            <a:pPr algn="ctr"/>
+            <a:endParaRPr/>
+          </a:p>
+        </p:txBody>
+      </p:sp>
+      <p:sp>
+        <p:nvSpPr>
+          <p:cNvPr id="14" name="TextBox 13"/>
+          <p:cNvSpPr txBox="1"/>
+          <p:nvPr/>
+        </p:nvSpPr>
+        <p:spPr>
+          <a:xfrm>
+            <a:off x="713232" y="3675887"/>
+            <a:ext cx="502920" cy="411480"/>
+          </a:xfrm>
+          <a:prstGeom prst="rect">
+            <a:avLst/>
+          </a:prstGeom>
+          <a:noFill/>
+        </p:spPr>
+        <p:txBody>
+          <a:bodyPr wrap="square" anchor="t">
+            <a:spAutoFit/>
+          </a:bodyPr>
+          <a:lstStyle/>
+          <a:p>
+            <a:pPr algn="ctr">
+              <a:defRPr sz="1700" b="1" i="0">
+                <a:solidFill>
+                  <a:srgbClr val="E67E22"/>
+                </a:solidFill>
+              </a:defRPr>
+            </a:pPr>
+            <a:r>
+              <a:t>03</a:t>
+            </a:r>
+          </a:p>
+        </p:txBody>
+      </p:sp>
+      <p:sp>
+        <p:nvSpPr>
+          <p:cNvPr id="15" name="TextBox 14"/>
+          <p:cNvSpPr txBox="1"/>
+          <p:nvPr/>
+        </p:nvSpPr>
+        <p:spPr>
+          <a:xfrm>
+            <a:off x="1298448" y="3657600"/>
+            <a:ext cx="4297680" cy="320040"/>
+          </a:xfrm>
+          <a:prstGeom prst="rect">
+            <a:avLst/>
+          </a:prstGeom>
+          <a:noFill/>
+        </p:spPr>
+        <p:txBody>
+          <a:bodyPr wrap="square" anchor="t">
+            <a:spAutoFit/>
+          </a:bodyPr>
+          <a:lstStyle/>
+          <a:p>
+            <a:pPr algn="l">
+              <a:defRPr sz="1500" b="1" i="0">
+                <a:solidFill>
+                  <a:srgbClr val="2D3238"/>
+                </a:solidFill>
+              </a:defRPr>
+            </a:pPr>
+            <a:r>
+              <a:t>Cohort retention</a:t>
+            </a:r>
+          </a:p>
+        </p:txBody>
+      </p:sp>
+      <p:sp>
+        <p:nvSpPr>
+          <p:cNvPr id="16" name="TextBox 15"/>
+          <p:cNvSpPr txBox="1"/>
+          <p:nvPr/>
+        </p:nvSpPr>
+        <p:spPr>
+          <a:xfrm>
+            <a:off x="1298448" y="4059935"/>
+            <a:ext cx="4343400" cy="777240"/>
+          </a:xfrm>
+          <a:prstGeom prst="rect">
+            <a:avLst/>
+          </a:prstGeom>
+          <a:noFill/>
+        </p:spPr>
+        <p:txBody>
+          <a:bodyPr wrap="square" anchor="t">
+            <a:spAutoFit/>
+          </a:bodyPr>
+          <a:lstStyle/>
+          <a:p>
+            <a:pPr algn="l">
+              <a:defRPr sz="1150" b="0" i="0">
+                <a:solidFill>
+                  <a:srgbClr val="6E7681"/>
+                </a:solidFill>
+              </a:defRPr>
+            </a:pPr>
+            <a:r>
+              <a:t>Measure customer retention by acquisition period and identify changing patterns.</a:t>
+            </a:r>
+          </a:p>
+        </p:txBody>
+      </p:sp>
+      <p:sp>
+        <p:nvSpPr>
+          <p:cNvPr id="17" name="Rounded Rectangle 16"/>
+          <p:cNvSpPr/>
+          <p:nvPr/>
+        </p:nvSpPr>
+        <p:spPr>
+          <a:xfrm>
+            <a:off x="6199632" y="3493008"/>
+            <a:ext cx="5440680" cy="1453896"/>
+          </a:xfrm>
+          <a:prstGeom prst="roundRect">
+            <a:avLst/>
+          </a:prstGeom>
+          <a:solidFill>
+            <a:srgbClr val="FAEDEB"/>
+          </a:solidFill>
+          <a:ln w="13970">
+            <a:solidFill>
+              <a:srgbClr val="C0392B"/>
+            </a:solidFill>
+          </a:ln>
+        </p:spPr>
+        <p:style>
+          <a:lnRef idx="1">
+            <a:schemeClr val="accent1"/>
+          </a:lnRef>
+          <a:fillRef idx="3">
+            <a:schemeClr val="accent1"/>
+          </a:fillRef>
+          <a:effectRef idx="2">
+            <a:schemeClr val="accent1"/>
+          </a:effectRef>
+          <a:fontRef idx="minor">
+            <a:schemeClr val="lt1"/>
+          </a:fontRef>
+        </p:style>
+        <p:txBody>
+          <a:bodyPr rtlCol="0" anchor="ctr"/>
+          <a:lstStyle/>
+          <a:p>
+            <a:pPr algn="ctr"/>
+            <a:endParaRPr/>
+          </a:p>
+        </p:txBody>
+      </p:sp>
+      <p:sp>
+        <p:nvSpPr>
+          <p:cNvPr id="18" name="TextBox 17"/>
+          <p:cNvSpPr txBox="1"/>
+          <p:nvPr/>
+        </p:nvSpPr>
+        <p:spPr>
+          <a:xfrm>
+            <a:off x="6364224" y="3675887"/>
+            <a:ext cx="502920" cy="411480"/>
+          </a:xfrm>
+          <a:prstGeom prst="rect">
+            <a:avLst/>
+          </a:prstGeom>
+          <a:noFill/>
+        </p:spPr>
+        <p:txBody>
+          <a:bodyPr wrap="square" anchor="t">
+            <a:spAutoFit/>
+          </a:bodyPr>
+          <a:lstStyle/>
+          <a:p>
+            <a:pPr algn="ctr">
+              <a:defRPr sz="1700" b="1" i="0">
+                <a:solidFill>
+                  <a:srgbClr val="C0392B"/>
+                </a:solidFill>
+              </a:defRPr>
+            </a:pPr>
+            <a:r>
+              <a:t>04</a:t>
+            </a:r>
+          </a:p>
+        </p:txBody>
+      </p:sp>
+      <p:sp>
+        <p:nvSpPr>
+          <p:cNvPr id="19" name="TextBox 18"/>
+          <p:cNvSpPr txBox="1"/>
+          <p:nvPr/>
+        </p:nvSpPr>
+        <p:spPr>
+          <a:xfrm>
+            <a:off x="6949440" y="3657600"/>
+            <a:ext cx="4297680" cy="320040"/>
+          </a:xfrm>
+          <a:prstGeom prst="rect">
+            <a:avLst/>
+          </a:prstGeom>
+          <a:noFill/>
+        </p:spPr>
+        <p:txBody>
+          <a:bodyPr wrap="square" anchor="t">
+            <a:spAutoFit/>
+          </a:bodyPr>
+          <a:lstStyle/>
+          <a:p>
+            <a:pPr algn="l">
+              <a:defRPr sz="1500" b="1" i="0">
+                <a:solidFill>
+                  <a:srgbClr val="2D3238"/>
+                </a:solidFill>
+              </a:defRPr>
+            </a:pPr>
+            <a:r>
+              <a:t>Market basket analysis</a:t>
+            </a:r>
+          </a:p>
+        </p:txBody>
+      </p:sp>
+      <p:sp>
+        <p:nvSpPr>
+          <p:cNvPr id="20" name="TextBox 19"/>
+          <p:cNvSpPr txBox="1"/>
+          <p:nvPr/>
+        </p:nvSpPr>
+        <p:spPr>
+          <a:xfrm>
+            <a:off x="6949440" y="4059935"/>
+            <a:ext cx="4343400" cy="777240"/>
+          </a:xfrm>
+          <a:prstGeom prst="rect">
+            <a:avLst/>
+          </a:prstGeom>
+          <a:noFill/>
+        </p:spPr>
+        <p:txBody>
+          <a:bodyPr wrap="square" anchor="t">
+            <a:spAutoFit/>
+          </a:bodyPr>
+          <a:lstStyle/>
+          <a:p>
+            <a:pPr algn="l">
+              <a:defRPr sz="1150" b="0" i="0">
+                <a:solidFill>
+                  <a:srgbClr val="6E7681"/>
+                </a:solidFill>
+              </a:defRPr>
+            </a:pPr>
+            <a:r>
+              <a:t>Identify products frequently purchased together for cross-selling analysis.</a:t>
+            </a:r>
+          </a:p>
+        </p:txBody>
+      </p:sp>
+      <p:sp>
+        <p:nvSpPr>
+          <p:cNvPr id="21" name="Rounded Rectangle 20"/>
+          <p:cNvSpPr/>
+          <p:nvPr/>
+        </p:nvSpPr>
+        <p:spPr>
+          <a:xfrm>
+            <a:off x="3375507" y="5257800"/>
+            <a:ext cx="5440680" cy="1188720"/>
+          </a:xfrm>
+          <a:prstGeom prst="roundRect">
+            <a:avLst/>
+          </a:prstGeom>
+          <a:solidFill>
+            <a:srgbClr val="E8F1FA"/>
+          </a:solidFill>
+          <a:ln w="13970">
+            <a:solidFill>
+              <a:srgbClr val="2E75B6"/>
+            </a:solidFill>
+          </a:ln>
+        </p:spPr>
+        <p:style>
+          <a:lnRef idx="1">
+            <a:schemeClr val="accent1"/>
+          </a:lnRef>
+          <a:fillRef idx="3">
+            <a:schemeClr val="accent1"/>
+          </a:fillRef>
+          <a:effectRef idx="2">
+            <a:schemeClr val="accent1"/>
+          </a:effectRef>
+          <a:fontRef idx="minor">
+            <a:schemeClr val="lt1"/>
+          </a:fontRef>
+        </p:style>
+        <p:txBody>
+          <a:bodyPr rtlCol="0" anchor="ctr"/>
+          <a:lstStyle/>
+          <a:p>
+            <a:pPr algn="ctr"/>
+            <a:endParaRPr/>
+          </a:p>
+        </p:txBody>
+      </p:sp>
+      <p:sp>
+        <p:nvSpPr>
+          <p:cNvPr id="22" name="TextBox 21"/>
+          <p:cNvSpPr txBox="1"/>
+          <p:nvPr/>
+        </p:nvSpPr>
+        <p:spPr>
+          <a:xfrm>
+            <a:off x="3529584" y="5417820"/>
+            <a:ext cx="502920" cy="411480"/>
+          </a:xfrm>
+          <a:prstGeom prst="rect">
+            <a:avLst/>
+          </a:prstGeom>
+          <a:noFill/>
+        </p:spPr>
+        <p:txBody>
+          <a:bodyPr wrap="square" anchor="t">
+            <a:spAutoFit/>
+          </a:bodyPr>
+          <a:lstStyle/>
+          <a:p>
+            <a:pPr algn="ctr">
+              <a:defRPr sz="1700" b="1" i="0">
+                <a:solidFill>
+                  <a:srgbClr val="2E75B6"/>
+                </a:solidFill>
+              </a:defRPr>
+            </a:pPr>
+            <a:r>
+              <a:rPr dirty="0"/>
+              <a:t>05</a:t>
+            </a:r>
+          </a:p>
+        </p:txBody>
+      </p:sp>
+      <p:sp>
+        <p:nvSpPr>
+          <p:cNvPr id="23" name="TextBox 22"/>
+          <p:cNvSpPr txBox="1"/>
+          <p:nvPr/>
+        </p:nvSpPr>
+        <p:spPr>
+          <a:xfrm>
+            <a:off x="4114800" y="5440680"/>
+            <a:ext cx="4297680" cy="320040"/>
+          </a:xfrm>
+          <a:prstGeom prst="rect">
+            <a:avLst/>
+          </a:prstGeom>
+          <a:noFill/>
+        </p:spPr>
+        <p:txBody>
+          <a:bodyPr wrap="square" anchor="t">
+            <a:spAutoFit/>
+          </a:bodyPr>
+          <a:lstStyle/>
+          <a:p>
+            <a:pPr algn="l">
+              <a:defRPr sz="1500" b="1" i="0">
+                <a:solidFill>
+                  <a:srgbClr val="2D3238"/>
+                </a:solidFill>
+              </a:defRPr>
+            </a:pPr>
+            <a:r>
+              <a:rPr dirty="0"/>
+              <a:t>Unknown customer analysis</a:t>
+            </a:r>
+          </a:p>
+        </p:txBody>
+      </p:sp>
+      <p:sp>
+        <p:nvSpPr>
+          <p:cNvPr id="24" name="TextBox 23"/>
+          <p:cNvSpPr txBox="1"/>
+          <p:nvPr/>
+        </p:nvSpPr>
+        <p:spPr>
+          <a:xfrm>
+            <a:off x="4114800" y="5797296"/>
+            <a:ext cx="4343400" cy="274320"/>
+          </a:xfrm>
+          <a:prstGeom prst="rect">
+            <a:avLst/>
+          </a:prstGeom>
+          <a:noFill/>
+        </p:spPr>
+        <p:txBody>
+          <a:bodyPr wrap="square" anchor="t">
+            <a:spAutoFit/>
+          </a:bodyPr>
+          <a:lstStyle/>
+          <a:p>
+            <a:pPr algn="l">
+              <a:defRPr sz="1150" b="0" i="0">
+                <a:solidFill>
+                  <a:srgbClr val="6E7681"/>
+                </a:solidFill>
+              </a:defRPr>
+            </a:pPr>
+            <a:r>
+              <a:rPr dirty="0"/>
+              <a:t>Investigate the origin and conversion potential of transactions without </a:t>
+            </a:r>
+            <a:r>
+              <a:rPr dirty="0" err="1"/>
+              <a:t>CustomerID</a:t>
+            </a:r>
+            <a:r>
+              <a:rPr dirty="0"/>
+              <a:t>.</a:t>
+            </a:r>
+          </a:p>
+        </p:txBody>
+      </p:sp>
+      <p:sp>
+        <p:nvSpPr>
+          <p:cNvPr id="25" name="TextBox 24"/>
+          <p:cNvSpPr txBox="1"/>
+          <p:nvPr/>
+        </p:nvSpPr>
+        <p:spPr>
+          <a:xfrm>
+            <a:off x="502920" y="6446520"/>
+            <a:ext cx="11155680" cy="228600"/>
           </a:xfrm>
           <a:prstGeom prst="rect">
             <a:avLst/>
@@ -3508,9 +4263,9 @@
           <a:lstStyle/>
           <a:p>
             <a:pPr algn="ctr">
-              <a:defRPr sz="1000">
-                <a:solidFill>
-                  <a:srgbClr val="666666"/>
+              <a:defRPr sz="850">
+                <a:solidFill>
+                  <a:srgbClr val="6E7681"/>
                 </a:solidFill>
               </a:defRPr>
             </a:pPr>
@@ -3561,22 +4316,22 @@
         </p:nvSpPr>
         <p:spPr>
           <a:xfrm>
-            <a:off x="914400" y="1371600"/>
-            <a:ext cx="10058400" cy="1828800"/>
-          </a:xfrm>
-          <a:prstGeom prst="rect">
-            <a:avLst/>
-          </a:prstGeom>
-          <a:noFill/>
-        </p:spPr>
-        <p:txBody>
-          <a:bodyPr wrap="none">
+            <a:off x="914400" y="1325880"/>
+            <a:ext cx="7315200" cy="777240"/>
+          </a:xfrm>
+          <a:prstGeom prst="rect">
+            <a:avLst/>
+          </a:prstGeom>
+          <a:noFill/>
+        </p:spPr>
+        <p:txBody>
+          <a:bodyPr wrap="square" anchor="t">
             <a:spAutoFit/>
           </a:bodyPr>
           <a:lstStyle/>
           <a:p>
             <a:pPr algn="l">
-              <a:defRPr sz="6400" b="1">
+              <a:defRPr sz="5600" b="1" i="0">
                 <a:solidFill>
                   <a:srgbClr val="FFFFFF"/>
                 </a:solidFill>
@@ -3586,9 +4341,32 @@
               <a:t>Thank You</a:t>
             </a:r>
           </a:p>
+        </p:txBody>
+      </p:sp>
+      <p:sp>
+        <p:nvSpPr>
+          <p:cNvPr id="3" name="TextBox 2"/>
+          <p:cNvSpPr txBox="1"/>
+          <p:nvPr/>
+        </p:nvSpPr>
+        <p:spPr>
+          <a:xfrm>
+            <a:off x="914400" y="2194560"/>
+            <a:ext cx="7315200" cy="502920"/>
+          </a:xfrm>
+          <a:prstGeom prst="rect">
+            <a:avLst/>
+          </a:prstGeom>
+          <a:noFill/>
+        </p:spPr>
+        <p:txBody>
+          <a:bodyPr wrap="square" anchor="t">
+            <a:spAutoFit/>
+          </a:bodyPr>
+          <a:lstStyle/>
           <a:p>
             <a:pPr algn="l">
-              <a:defRPr sz="3600">
+              <a:defRPr sz="3000" b="0" i="0">
                 <a:solidFill>
                   <a:srgbClr val="BBDEFB"/>
                 </a:solidFill>
@@ -3602,14 +4380,14 @@
       </p:sp>
       <p:sp>
         <p:nvSpPr>
-          <p:cNvPr id="3" name="Rectangle 2"/>
+          <p:cNvPr id="4" name="Rectangle 3"/>
           <p:cNvSpPr/>
           <p:nvPr/>
         </p:nvSpPr>
         <p:spPr>
           <a:xfrm>
-            <a:off x="914400" y="3474720"/>
-            <a:ext cx="2743200" cy="50800"/>
+            <a:off x="914400" y="3063240"/>
+            <a:ext cx="2560320" cy="63500"/>
           </a:xfrm>
           <a:prstGeom prst="rect">
             <a:avLst/>
@@ -3646,28 +4424,28 @@
       </p:sp>
       <p:sp>
         <p:nvSpPr>
-          <p:cNvPr id="4" name="TextBox 3"/>
-          <p:cNvSpPr txBox="1"/>
-          <p:nvPr/>
-        </p:nvSpPr>
-        <p:spPr>
-          <a:xfrm>
-            <a:off x="914400" y="4114800"/>
-            <a:ext cx="10058400" cy="1828800"/>
-          </a:xfrm>
-          <a:prstGeom prst="rect">
-            <a:avLst/>
-          </a:prstGeom>
-          <a:noFill/>
-        </p:spPr>
-        <p:txBody>
-          <a:bodyPr wrap="none">
-            <a:spAutoFit/>
-          </a:bodyPr>
-          <a:lstStyle/>
-          <a:p>
-            <a:pPr>
-              <a:defRPr sz="2400">
+          <p:cNvPr id="5" name="TextBox 4"/>
+          <p:cNvSpPr txBox="1"/>
+          <p:nvPr/>
+        </p:nvSpPr>
+        <p:spPr>
+          <a:xfrm>
+            <a:off x="914400" y="3749039"/>
+            <a:ext cx="7315200" cy="411480"/>
+          </a:xfrm>
+          <a:prstGeom prst="rect">
+            <a:avLst/>
+          </a:prstGeom>
+          <a:noFill/>
+        </p:spPr>
+        <p:txBody>
+          <a:bodyPr wrap="square" anchor="t">
+            <a:spAutoFit/>
+          </a:bodyPr>
+          <a:lstStyle/>
+          <a:p>
+            <a:pPr algn="l">
+              <a:defRPr sz="2300" b="1" i="0">
                 <a:solidFill>
                   <a:srgbClr val="FFFFFF"/>
                 </a:solidFill>
@@ -3677,9 +4455,32 @@
               <a:t>Abdeljalil El Khyati</a:t>
             </a:r>
           </a:p>
-          <a:p>
-            <a:pPr>
-              <a:defRPr sz="1800">
+        </p:txBody>
+      </p:sp>
+      <p:sp>
+        <p:nvSpPr>
+          <p:cNvPr id="6" name="TextBox 5"/>
+          <p:cNvSpPr txBox="1"/>
+          <p:nvPr/>
+        </p:nvSpPr>
+        <p:spPr>
+          <a:xfrm>
+            <a:off x="914400" y="4297680"/>
+            <a:ext cx="7315200" cy="365760"/>
+          </a:xfrm>
+          <a:prstGeom prst="rect">
+            <a:avLst/>
+          </a:prstGeom>
+          <a:noFill/>
+        </p:spPr>
+        <p:txBody>
+          <a:bodyPr wrap="square" anchor="t">
+            <a:spAutoFit/>
+          </a:bodyPr>
+          <a:lstStyle/>
+          <a:p>
+            <a:pPr algn="l">
+              <a:defRPr sz="1600" b="0" i="0">
                 <a:solidFill>
                   <a:srgbClr val="BBDEFB"/>
                 </a:solidFill>
@@ -3689,51 +4490,90 @@
               <a:t>Lead Data Analyst</a:t>
             </a:r>
           </a:p>
-          <a:p>
-            <a:pPr>
-              <a:defRPr sz="1800">
-                <a:solidFill>
-                  <a:srgbClr val="BBDEFB"/>
-                </a:solidFill>
-              </a:defRPr>
-            </a:pPr>
-            <a:r>
-              <a:t>September 2026</a:t>
-            </a:r>
-          </a:p>
-        </p:txBody>
-      </p:sp>
-      <p:sp>
-        <p:nvSpPr>
-          <p:cNvPr id="5" name="TextBox 4"/>
-          <p:cNvSpPr txBox="1"/>
-          <p:nvPr/>
-        </p:nvSpPr>
-        <p:spPr>
-          <a:xfrm>
-            <a:off x="914400" y="5669280"/>
-            <a:ext cx="10058400" cy="731520"/>
-          </a:xfrm>
-          <a:prstGeom prst="rect">
-            <a:avLst/>
-          </a:prstGeom>
-          <a:noFill/>
-        </p:spPr>
-        <p:txBody>
-          <a:bodyPr wrap="none">
-            <a:spAutoFit/>
-          </a:bodyPr>
-          <a:lstStyle/>
-          <a:p>
-            <a:pPr>
-              <a:defRPr sz="1200" i="1">
+        </p:txBody>
+      </p:sp>
+      <p:sp>
+        <p:nvSpPr>
+          <p:cNvPr id="7" name="TextBox 6"/>
+          <p:cNvSpPr txBox="1"/>
+          <p:nvPr/>
+        </p:nvSpPr>
+        <p:spPr>
+          <a:xfrm>
+            <a:off x="914400" y="4800600"/>
+            <a:ext cx="7315200" cy="320040"/>
+          </a:xfrm>
+          <a:prstGeom prst="rect">
+            <a:avLst/>
+          </a:prstGeom>
+          <a:noFill/>
+        </p:spPr>
+        <p:txBody>
+          <a:bodyPr wrap="square" anchor="t">
+            <a:spAutoFit/>
+          </a:bodyPr>
+          <a:lstStyle/>
+          <a:p>
+            <a:pPr algn="l">
+              <a:defRPr sz="1300" b="0" i="0">
                 <a:solidFill>
                   <a:srgbClr val="90CAF9"/>
                 </a:solidFill>
               </a:defRPr>
             </a:pPr>
             <a:r>
-              <a:t>Analysis conducted using Python, Pandas, Matplotlib &amp; Seaborn. All findings are evidence-based and derived from the UCI Online Retail dataset (ID: 352).</a:t>
+              <a:t>UCI Online Retail Dataset — ID 352</a:t>
+            </a:r>
+          </a:p>
+        </p:txBody>
+      </p:sp>
+      <p:sp>
+        <p:nvSpPr>
+          <p:cNvPr id="8" name="TextBox 7"/>
+          <p:cNvSpPr txBox="1"/>
+          <p:nvPr/>
+        </p:nvSpPr>
+        <p:spPr>
+          <a:xfrm>
+            <a:off x="914400" y="5623560"/>
+            <a:ext cx="9601200" cy="415498"/>
+          </a:xfrm>
+          <a:prstGeom prst="rect">
+            <a:avLst/>
+          </a:prstGeom>
+          <a:noFill/>
+        </p:spPr>
+        <p:txBody>
+          <a:bodyPr wrap="square" anchor="t">
+            <a:spAutoFit/>
+          </a:bodyPr>
+          <a:lstStyle/>
+          <a:p>
+            <a:pPr algn="l">
+              <a:defRPr sz="1050" b="0" i="1">
+                <a:solidFill>
+                  <a:srgbClr val="90CAF9"/>
+                </a:solidFill>
+              </a:defRPr>
+            </a:pPr>
+            <a:r>
+              <a:rPr dirty="0"/>
+              <a:t>Analysis conducted using Python, Pandas, Matplotlib and Seaborn.</a:t>
+            </a:r>
+            <a:br>
+              <a:rPr dirty="0"/>
+            </a:br>
+            <a:r>
+              <a:rPr dirty="0"/>
+              <a:t>Implementation assistance: Qwen</a:t>
+            </a:r>
+            <a:r>
+              <a:rPr lang="fr-FR" dirty="0"/>
+              <a:t>,ai</a:t>
+            </a:r>
+            <a:r>
+              <a:rPr dirty="0"/>
+              <a:t> / ChatGPT .</a:t>
             </a:r>
           </a:p>
         </p:txBody>
@@ -3749,6 +4589,14 @@
 <file path=ppt/slides/slide2.xml><?xml version="1.0" encoding="utf-8"?>
 <p:sld xmlns:a="http://schemas.openxmlformats.org/drawingml/2006/main" xmlns:r="http://schemas.openxmlformats.org/officeDocument/2006/relationships" xmlns:p="http://schemas.openxmlformats.org/presentationml/2006/main">
   <p:cSld>
+    <p:bg>
+      <p:bgPr>
+        <a:solidFill>
+          <a:srgbClr val="FFFFFF"/>
+        </a:solidFill>
+        <a:effectLst/>
+      </p:bgPr>
+    </p:bg>
     <p:spTree>
       <p:nvGrpSpPr>
         <p:cNvPr id="1" name=""/>
@@ -3772,7 +4620,7 @@
         <p:spPr>
           <a:xfrm>
             <a:off x="0" y="0"/>
-            <a:ext cx="12191695" cy="1097280"/>
+            <a:ext cx="12191695" cy="987552"/>
           </a:xfrm>
           <a:prstGeom prst="rect">
             <a:avLst/>
@@ -3815,8 +4663,8 @@
         </p:nvSpPr>
         <p:spPr>
           <a:xfrm>
-            <a:off x="548640" y="137160"/>
-            <a:ext cx="10972800" cy="822960"/>
+            <a:off x="502920" y="109728"/>
+            <a:ext cx="11064240" cy="594360"/>
           </a:xfrm>
           <a:prstGeom prst="rect">
             <a:avLst/>
@@ -3830,7 +4678,7 @@
           <a:lstStyle/>
           <a:p>
             <a:pPr>
-              <a:defRPr sz="3200" b="1">
+              <a:defRPr sz="2700" b="1">
                 <a:solidFill>
                   <a:srgbClr val="FFFFFF"/>
                 </a:solidFill>
@@ -3850,8 +4698,8 @@
         </p:nvSpPr>
         <p:spPr>
           <a:xfrm>
-            <a:off x="548640" y="1143000"/>
-            <a:ext cx="10972800" cy="457200"/>
+            <a:off x="530352" y="1069848"/>
+            <a:ext cx="10972800" cy="411480"/>
           </a:xfrm>
           <a:prstGeom prst="rect">
             <a:avLst/>
@@ -3865,28 +4713,109 @@
           <a:lstStyle/>
           <a:p>
             <a:pPr>
-              <a:defRPr sz="1600" i="1">
+              <a:defRPr sz="1300">
                 <a:solidFill>
                   <a:srgbClr val="2E75B6"/>
                 </a:solidFill>
               </a:defRPr>
             </a:pPr>
             <a:r>
-              <a:t>The Bottom Line — Key Business Insights</a:t>
-            </a:r>
-          </a:p>
-        </p:txBody>
-      </p:sp>
-      <p:sp>
-        <p:nvSpPr>
-          <p:cNvPr id="5" name="TextBox 4"/>
-          <p:cNvSpPr txBox="1"/>
-          <p:nvPr/>
-        </p:nvSpPr>
-        <p:spPr>
-          <a:xfrm>
-            <a:off x="548640" y="1737360"/>
-            <a:ext cx="10972800" cy="4572000"/>
+              <a:t>Four signals define the business story</a:t>
+            </a:r>
+          </a:p>
+        </p:txBody>
+      </p:sp>
+      <p:sp>
+        <p:nvSpPr>
+          <p:cNvPr id="5" name="Rounded Rectangle 4"/>
+          <p:cNvSpPr/>
+          <p:nvPr/>
+        </p:nvSpPr>
+        <p:spPr>
+          <a:xfrm>
+            <a:off x="548640" y="1508760"/>
+            <a:ext cx="2606040" cy="1234440"/>
+          </a:xfrm>
+          <a:prstGeom prst="roundRect">
+            <a:avLst/>
+          </a:prstGeom>
+          <a:solidFill>
+            <a:srgbClr val="E8F1FA"/>
+          </a:solidFill>
+          <a:ln w="16510">
+            <a:solidFill>
+              <a:srgbClr val="2E75B6"/>
+            </a:solidFill>
+          </a:ln>
+        </p:spPr>
+        <p:style>
+          <a:lnRef idx="1">
+            <a:schemeClr val="accent1"/>
+          </a:lnRef>
+          <a:fillRef idx="3">
+            <a:schemeClr val="accent1"/>
+          </a:fillRef>
+          <a:effectRef idx="2">
+            <a:schemeClr val="accent1"/>
+          </a:effectRef>
+          <a:fontRef idx="minor">
+            <a:schemeClr val="lt1"/>
+          </a:fontRef>
+        </p:style>
+        <p:txBody>
+          <a:bodyPr rtlCol="0" anchor="ctr"/>
+          <a:lstStyle/>
+          <a:p>
+            <a:pPr algn="ctr"/>
+            <a:endParaRPr/>
+          </a:p>
+        </p:txBody>
+      </p:sp>
+      <p:sp>
+        <p:nvSpPr>
+          <p:cNvPr id="6" name="TextBox 5"/>
+          <p:cNvSpPr txBox="1"/>
+          <p:nvPr/>
+        </p:nvSpPr>
+        <p:spPr>
+          <a:xfrm>
+            <a:off x="713232" y="1655063"/>
+            <a:ext cx="2276856" cy="502920"/>
+          </a:xfrm>
+          <a:prstGeom prst="rect">
+            <a:avLst/>
+          </a:prstGeom>
+          <a:noFill/>
+        </p:spPr>
+        <p:txBody>
+          <a:bodyPr wrap="none">
+            <a:spAutoFit/>
+          </a:bodyPr>
+          <a:lstStyle/>
+          <a:p>
+            <a:pPr algn="ctr">
+              <a:defRPr sz="2300" b="1">
+                <a:solidFill>
+                  <a:srgbClr val="2E75B6"/>
+                </a:solidFill>
+              </a:defRPr>
+            </a:pPr>
+            <a:r>
+              <a:t>£10.64M</a:t>
+            </a:r>
+          </a:p>
+        </p:txBody>
+      </p:sp>
+      <p:sp>
+        <p:nvSpPr>
+          <p:cNvPr id="7" name="TextBox 6"/>
+          <p:cNvSpPr txBox="1"/>
+          <p:nvPr/>
+        </p:nvSpPr>
+        <p:spPr>
+          <a:xfrm>
+            <a:off x="694944" y="2221991"/>
+            <a:ext cx="2313432" cy="411480"/>
           </a:xfrm>
           <a:prstGeom prst="rect">
             <a:avLst/>
@@ -3895,96 +4824,580 @@
         </p:spPr>
         <p:txBody>
           <a:bodyPr wrap="square">
+            <a:spAutoFit/>
+          </a:bodyPr>
+          <a:lstStyle/>
+          <a:p>
+            <a:pPr algn="ctr">
+              <a:defRPr sz="1050">
+                <a:solidFill>
+                  <a:srgbClr val="2D3238"/>
+                </a:solidFill>
+              </a:defRPr>
+            </a:pPr>
+            <a:r>
+              <a:t>Valid transaction revenue</a:t>
+            </a:r>
+          </a:p>
+        </p:txBody>
+      </p:sp>
+      <p:sp>
+        <p:nvSpPr>
+          <p:cNvPr id="8" name="Rounded Rectangle 7"/>
+          <p:cNvSpPr/>
+          <p:nvPr/>
+        </p:nvSpPr>
+        <p:spPr>
+          <a:xfrm>
+            <a:off x="3337560" y="1508760"/>
+            <a:ext cx="2606040" cy="1234440"/>
+          </a:xfrm>
+          <a:prstGeom prst="roundRect">
+            <a:avLst/>
+          </a:prstGeom>
+          <a:solidFill>
+            <a:srgbClr val="EAF6EF"/>
+          </a:solidFill>
+          <a:ln w="16510">
+            <a:solidFill>
+              <a:srgbClr val="2E8B57"/>
+            </a:solidFill>
+          </a:ln>
+        </p:spPr>
+        <p:style>
+          <a:lnRef idx="1">
+            <a:schemeClr val="accent1"/>
+          </a:lnRef>
+          <a:fillRef idx="3">
+            <a:schemeClr val="accent1"/>
+          </a:fillRef>
+          <a:effectRef idx="2">
+            <a:schemeClr val="accent1"/>
+          </a:effectRef>
+          <a:fontRef idx="minor">
+            <a:schemeClr val="lt1"/>
+          </a:fontRef>
+        </p:style>
+        <p:txBody>
+          <a:bodyPr rtlCol="0" anchor="ctr"/>
+          <a:lstStyle/>
+          <a:p>
+            <a:pPr algn="ctr"/>
+            <a:endParaRPr/>
+          </a:p>
+        </p:txBody>
+      </p:sp>
+      <p:sp>
+        <p:nvSpPr>
+          <p:cNvPr id="9" name="TextBox 8"/>
+          <p:cNvSpPr txBox="1"/>
+          <p:nvPr/>
+        </p:nvSpPr>
+        <p:spPr>
+          <a:xfrm>
+            <a:off x="3502152" y="1655063"/>
+            <a:ext cx="2276856" cy="502920"/>
+          </a:xfrm>
+          <a:prstGeom prst="rect">
+            <a:avLst/>
+          </a:prstGeom>
+          <a:noFill/>
+        </p:spPr>
+        <p:txBody>
+          <a:bodyPr wrap="none">
+            <a:spAutoFit/>
+          </a:bodyPr>
+          <a:lstStyle/>
+          <a:p>
+            <a:pPr algn="ctr">
+              <a:defRPr sz="2300" b="1">
+                <a:solidFill>
+                  <a:srgbClr val="2E8B57"/>
+                </a:solidFill>
+              </a:defRPr>
+            </a:pPr>
+            <a:r>
+              <a:t>£10.11M</a:t>
+            </a:r>
+          </a:p>
+        </p:txBody>
+      </p:sp>
+      <p:sp>
+        <p:nvSpPr>
+          <p:cNvPr id="10" name="TextBox 9"/>
+          <p:cNvSpPr txBox="1"/>
+          <p:nvPr/>
+        </p:nvSpPr>
+        <p:spPr>
+          <a:xfrm>
+            <a:off x="3483864" y="2221991"/>
+            <a:ext cx="2313432" cy="411480"/>
+          </a:xfrm>
+          <a:prstGeom prst="rect">
+            <a:avLst/>
+          </a:prstGeom>
+          <a:noFill/>
+        </p:spPr>
+        <p:txBody>
+          <a:bodyPr wrap="square">
+            <a:spAutoFit/>
+          </a:bodyPr>
+          <a:lstStyle/>
+          <a:p>
+            <a:pPr algn="ctr">
+              <a:defRPr sz="1050">
+                <a:solidFill>
+                  <a:srgbClr val="2D3238"/>
+                </a:solidFill>
+              </a:defRPr>
+            </a:pPr>
+            <a:r>
+              <a:t>Clean physical-product revenue</a:t>
+            </a:r>
+          </a:p>
+        </p:txBody>
+      </p:sp>
+      <p:sp>
+        <p:nvSpPr>
+          <p:cNvPr id="11" name="Rounded Rectangle 10"/>
+          <p:cNvSpPr/>
+          <p:nvPr/>
+        </p:nvSpPr>
+        <p:spPr>
+          <a:xfrm>
+            <a:off x="6126480" y="1508760"/>
+            <a:ext cx="2606040" cy="1234440"/>
+          </a:xfrm>
+          <a:prstGeom prst="roundRect">
+            <a:avLst/>
+          </a:prstGeom>
+          <a:solidFill>
+            <a:srgbClr val="E8F1FA"/>
+          </a:solidFill>
+          <a:ln w="16510">
+            <a:solidFill>
+              <a:srgbClr val="2E75B6"/>
+            </a:solidFill>
+          </a:ln>
+        </p:spPr>
+        <p:style>
+          <a:lnRef idx="1">
+            <a:schemeClr val="accent1"/>
+          </a:lnRef>
+          <a:fillRef idx="3">
+            <a:schemeClr val="accent1"/>
+          </a:fillRef>
+          <a:effectRef idx="2">
+            <a:schemeClr val="accent1"/>
+          </a:effectRef>
+          <a:fontRef idx="minor">
+            <a:schemeClr val="lt1"/>
+          </a:fontRef>
+        </p:style>
+        <p:txBody>
+          <a:bodyPr rtlCol="0" anchor="ctr"/>
+          <a:lstStyle/>
+          <a:p>
+            <a:pPr algn="ctr"/>
+            <a:endParaRPr/>
+          </a:p>
+        </p:txBody>
+      </p:sp>
+      <p:sp>
+        <p:nvSpPr>
+          <p:cNvPr id="12" name="TextBox 11"/>
+          <p:cNvSpPr txBox="1"/>
+          <p:nvPr/>
+        </p:nvSpPr>
+        <p:spPr>
+          <a:xfrm>
+            <a:off x="6291072" y="1655063"/>
+            <a:ext cx="2276856" cy="502920"/>
+          </a:xfrm>
+          <a:prstGeom prst="rect">
+            <a:avLst/>
+          </a:prstGeom>
+          <a:noFill/>
+        </p:spPr>
+        <p:txBody>
+          <a:bodyPr wrap="none">
+            <a:spAutoFit/>
+          </a:bodyPr>
+          <a:lstStyle/>
+          <a:p>
+            <a:pPr algn="ctr">
+              <a:defRPr sz="2300" b="1">
+                <a:solidFill>
+                  <a:srgbClr val="2E75B6"/>
+                </a:solidFill>
+              </a:defRPr>
+            </a:pPr>
+            <a:r>
+              <a:t>4,338</a:t>
+            </a:r>
+          </a:p>
+        </p:txBody>
+      </p:sp>
+      <p:sp>
+        <p:nvSpPr>
+          <p:cNvPr id="13" name="TextBox 12"/>
+          <p:cNvSpPr txBox="1"/>
+          <p:nvPr/>
+        </p:nvSpPr>
+        <p:spPr>
+          <a:xfrm>
+            <a:off x="6272784" y="2221991"/>
+            <a:ext cx="2313432" cy="411480"/>
+          </a:xfrm>
+          <a:prstGeom prst="rect">
+            <a:avLst/>
+          </a:prstGeom>
+          <a:noFill/>
+        </p:spPr>
+        <p:txBody>
+          <a:bodyPr wrap="square">
+            <a:spAutoFit/>
+          </a:bodyPr>
+          <a:lstStyle/>
+          <a:p>
+            <a:pPr algn="ctr">
+              <a:defRPr sz="1050">
+                <a:solidFill>
+                  <a:srgbClr val="2D3238"/>
+                </a:solidFill>
+              </a:defRPr>
+            </a:pPr>
+            <a:r>
+              <a:t>Known customers</a:t>
+            </a:r>
+          </a:p>
+        </p:txBody>
+      </p:sp>
+      <p:sp>
+        <p:nvSpPr>
+          <p:cNvPr id="14" name="Rounded Rectangle 13"/>
+          <p:cNvSpPr/>
+          <p:nvPr/>
+        </p:nvSpPr>
+        <p:spPr>
+          <a:xfrm>
+            <a:off x="8915400" y="1508760"/>
+            <a:ext cx="2606040" cy="1234440"/>
+          </a:xfrm>
+          <a:prstGeom prst="roundRect">
+            <a:avLst/>
+          </a:prstGeom>
+          <a:solidFill>
+            <a:srgbClr val="FCF2E6"/>
+          </a:solidFill>
+          <a:ln w="16510">
+            <a:solidFill>
+              <a:srgbClr val="E67E22"/>
+            </a:solidFill>
+          </a:ln>
+        </p:spPr>
+        <p:style>
+          <a:lnRef idx="1">
+            <a:schemeClr val="accent1"/>
+          </a:lnRef>
+          <a:fillRef idx="3">
+            <a:schemeClr val="accent1"/>
+          </a:fillRef>
+          <a:effectRef idx="2">
+            <a:schemeClr val="accent1"/>
+          </a:effectRef>
+          <a:fontRef idx="minor">
+            <a:schemeClr val="lt1"/>
+          </a:fontRef>
+        </p:style>
+        <p:txBody>
+          <a:bodyPr rtlCol="0" anchor="ctr"/>
+          <a:lstStyle/>
+          <a:p>
+            <a:pPr algn="ctr"/>
+            <a:endParaRPr/>
+          </a:p>
+        </p:txBody>
+      </p:sp>
+      <p:sp>
+        <p:nvSpPr>
+          <p:cNvPr id="15" name="TextBox 14"/>
+          <p:cNvSpPr txBox="1"/>
+          <p:nvPr/>
+        </p:nvSpPr>
+        <p:spPr>
+          <a:xfrm>
+            <a:off x="9079992" y="1655063"/>
+            <a:ext cx="2276856" cy="502920"/>
+          </a:xfrm>
+          <a:prstGeom prst="rect">
+            <a:avLst/>
+          </a:prstGeom>
+          <a:noFill/>
+        </p:spPr>
+        <p:txBody>
+          <a:bodyPr wrap="none">
+            <a:spAutoFit/>
+          </a:bodyPr>
+          <a:lstStyle/>
+          <a:p>
+            <a:pPr algn="ctr">
+              <a:defRPr sz="2300" b="1">
+                <a:solidFill>
+                  <a:srgbClr val="E67E22"/>
+                </a:solidFill>
+              </a:defRPr>
+            </a:pPr>
+            <a:r>
+              <a:t>£1.50M</a:t>
+            </a:r>
+          </a:p>
+        </p:txBody>
+      </p:sp>
+      <p:sp>
+        <p:nvSpPr>
+          <p:cNvPr id="16" name="TextBox 15"/>
+          <p:cNvSpPr txBox="1"/>
+          <p:nvPr/>
+        </p:nvSpPr>
+        <p:spPr>
+          <a:xfrm>
+            <a:off x="9061704" y="2221991"/>
+            <a:ext cx="2313432" cy="411480"/>
+          </a:xfrm>
+          <a:prstGeom prst="rect">
+            <a:avLst/>
+          </a:prstGeom>
+          <a:noFill/>
+        </p:spPr>
+        <p:txBody>
+          <a:bodyPr wrap="square">
+            <a:spAutoFit/>
+          </a:bodyPr>
+          <a:lstStyle/>
+          <a:p>
+            <a:pPr algn="ctr">
+              <a:defRPr sz="1050">
+                <a:solidFill>
+                  <a:srgbClr val="2D3238"/>
+                </a:solidFill>
+              </a:defRPr>
+            </a:pPr>
+            <a:r>
+              <a:t>November 2011 peak</a:t>
+            </a:r>
+          </a:p>
+        </p:txBody>
+      </p:sp>
+      <p:sp>
+        <p:nvSpPr>
+          <p:cNvPr id="17" name="TextBox 16"/>
+          <p:cNvSpPr txBox="1"/>
+          <p:nvPr/>
+        </p:nvSpPr>
+        <p:spPr>
+          <a:xfrm>
+            <a:off x="640080" y="3063240"/>
+            <a:ext cx="2743200" cy="320040"/>
+          </a:xfrm>
+          <a:prstGeom prst="rect">
+            <a:avLst/>
+          </a:prstGeom>
+          <a:noFill/>
+        </p:spPr>
+        <p:txBody>
+          <a:bodyPr wrap="square" anchor="t">
+            <a:spAutoFit/>
+          </a:bodyPr>
+          <a:lstStyle/>
+          <a:p>
+            <a:pPr algn="l">
+              <a:defRPr sz="1100" b="1" i="0">
+                <a:solidFill>
+                  <a:srgbClr val="2E75B6"/>
+                </a:solidFill>
+              </a:defRPr>
+            </a:pPr>
+            <a:r>
+              <a:t>KEY FINDINGS</a:t>
+            </a:r>
+          </a:p>
+        </p:txBody>
+      </p:sp>
+      <p:sp>
+        <p:nvSpPr>
+          <p:cNvPr id="18" name="TextBox 17"/>
+          <p:cNvSpPr txBox="1"/>
+          <p:nvPr/>
+        </p:nvSpPr>
+        <p:spPr>
+          <a:xfrm>
+            <a:off x="640080" y="3383280"/>
+            <a:ext cx="10881360" cy="2423160"/>
+          </a:xfrm>
+          <a:prstGeom prst="rect">
+            <a:avLst/>
+          </a:prstGeom>
+          <a:noFill/>
+        </p:spPr>
+        <p:txBody>
+          <a:bodyPr wrap="square" anchor="t">
             <a:spAutoFit/>
           </a:bodyPr>
           <a:lstStyle/>
           <a:p>
             <a:pPr>
               <a:spcAft>
-                <a:spcPts val="1200"/>
+                <a:spcPts val="1000"/>
               </a:spcAft>
-              <a:defRPr sz="1800">
-                <a:solidFill>
-                  <a:srgbClr val="333333"/>
-                </a:solidFill>
-              </a:defRPr>
-            </a:pPr>
-            <a:r>
-              <a:t>📊 Scale: 541,909 transactions analyzed (Dec 2010 – Dec 2011), yielding £10.64M in valid revenue across 4,338 known customers.</a:t>
+              <a:defRPr sz="1500">
+                <a:solidFill>
+                  <a:srgbClr val="2D3238"/>
+                </a:solidFill>
+              </a:defRPr>
+            </a:pPr>
+            <a:r>
+              <a:t>Seasonality: November 2011 was the highest observed month at £1.50M.</a:t>
             </a:r>
           </a:p>
           <a:p>
             <a:pPr>
               <a:spcAft>
-                <a:spcPts val="1200"/>
+                <a:spcPts val="1000"/>
               </a:spcAft>
-              <a:defRPr sz="1800">
-                <a:solidFill>
-                  <a:srgbClr val="333333"/>
-                </a:solidFill>
-              </a:defRPr>
-            </a:pPr>
-            <a:r>
-              <a:t>🎯 Seasonality: November 2011 generated £1.5M (2x monthly average) driven by a dual-driver phenomenon: core B2B restocking + Christmas-themed product surge.</a:t>
+              <a:defRPr sz="1500">
+                <a:solidFill>
+                  <a:srgbClr val="2D3238"/>
+                </a:solidFill>
+              </a:defRPr>
+            </a:pPr>
+            <a:r>
+              <a:t>Customer concentration: the top 26% of known customers generated 80% of known-customer revenue; Gini = 0.716.</a:t>
             </a:r>
           </a:p>
           <a:p>
             <a:pPr>
               <a:spcAft>
-                <a:spcPts val="1200"/>
+                <a:spcPts val="1000"/>
               </a:spcAft>
-              <a:defRPr sz="1800">
-                <a:solidFill>
-                  <a:srgbClr val="333333"/>
-                </a:solidFill>
-              </a:defRPr>
-            </a:pPr>
-            <a:r>
-              <a:t> Customer Concentration: Top 26% of customers generate 80% of revenue (Gini = 0.142) — a healthy, broad B2B wholesale base, not whale-dependent.</a:t>
+              <a:defRPr sz="1500">
+                <a:solidFill>
+                  <a:srgbClr val="2D3238"/>
+                </a:solidFill>
+              </a:defRPr>
+            </a:pPr>
+            <a:r>
+              <a:t>Geographic concentration: the United Kingdom represented 84.59% of revenue and 90.0% of Champions.</a:t>
             </a:r>
           </a:p>
           <a:p>
             <a:pPr>
               <a:spcAft>
-                <a:spcPts val="1200"/>
+                <a:spcPts val="1000"/>
               </a:spcAft>
-              <a:defRPr sz="1800">
-                <a:solidFill>
-                  <a:srgbClr val="333333"/>
-                </a:solidFill>
-              </a:defRPr>
-            </a:pPr>
-            <a:r>
-              <a:t>⚠️ Strategic Risk: UK accounts for 84.6% of revenue AND 90% of Champions — a dual concentration crisis requiring international diversification.</a:t>
-            </a:r>
-          </a:p>
-          <a:p>
-            <a:pPr>
-              <a:spcAft>
-                <a:spcPts val="1200"/>
-              </a:spcAft>
-              <a:defRPr sz="1800">
-                <a:solidFill>
-                  <a:srgbClr val="333333"/>
-                </a:solidFill>
-              </a:defRPr>
-            </a:pPr>
-            <a:r>
-              <a:t>💡 Biggest Opportunity: 47.8% of customers are At Risk or Lost — targeted win-back campaigns could unlock ~£690K in annual revenue.</a:t>
-            </a:r>
-          </a:p>
-        </p:txBody>
-      </p:sp>
-      <p:sp>
-        <p:nvSpPr>
-          <p:cNvPr id="6" name="TextBox 5"/>
-          <p:cNvSpPr txBox="1"/>
-          <p:nvPr/>
-        </p:nvSpPr>
-        <p:spPr>
-          <a:xfrm>
-            <a:off x="548640" y="6400800"/>
-            <a:ext cx="10972800" cy="365760"/>
+              <a:defRPr sz="1500">
+                <a:solidFill>
+                  <a:srgbClr val="2D3238"/>
+                </a:solidFill>
+              </a:defRPr>
+            </a:pPr>
+            <a:r>
+              <a:t>Retention signal: 1,188 customers were classified as Potential Loyalists / At Risk; their historical revenue baseline was approximately £689K.</a:t>
+            </a:r>
+          </a:p>
+        </p:txBody>
+      </p:sp>
+      <p:sp>
+        <p:nvSpPr>
+          <p:cNvPr id="19" name="Rounded Rectangle 18"/>
+          <p:cNvSpPr/>
+          <p:nvPr/>
+        </p:nvSpPr>
+        <p:spPr>
+          <a:xfrm>
+            <a:off x="1143000" y="5806440"/>
+            <a:ext cx="9921240" cy="457200"/>
+          </a:xfrm>
+          <a:prstGeom prst="roundRect">
+            <a:avLst/>
+          </a:prstGeom>
+          <a:solidFill>
+            <a:srgbClr val="FCF2E6"/>
+          </a:solidFill>
+          <a:ln w="12700">
+            <a:solidFill>
+              <a:srgbClr val="E67E22"/>
+            </a:solidFill>
+          </a:ln>
+        </p:spPr>
+        <p:style>
+          <a:lnRef idx="1">
+            <a:schemeClr val="accent1"/>
+          </a:lnRef>
+          <a:fillRef idx="3">
+            <a:schemeClr val="accent1"/>
+          </a:fillRef>
+          <a:effectRef idx="2">
+            <a:schemeClr val="accent1"/>
+          </a:effectRef>
+          <a:fontRef idx="minor">
+            <a:schemeClr val="lt1"/>
+          </a:fontRef>
+        </p:style>
+        <p:txBody>
+          <a:bodyPr rtlCol="0" anchor="ctr"/>
+          <a:lstStyle/>
+          <a:p>
+            <a:pPr algn="ctr"/>
+            <a:endParaRPr/>
+          </a:p>
+        </p:txBody>
+      </p:sp>
+      <p:sp>
+        <p:nvSpPr>
+          <p:cNvPr id="20" name="TextBox 19"/>
+          <p:cNvSpPr txBox="1"/>
+          <p:nvPr/>
+        </p:nvSpPr>
+        <p:spPr>
+          <a:xfrm>
+            <a:off x="1307592" y="5916168"/>
+            <a:ext cx="9592056" cy="237744"/>
+          </a:xfrm>
+          <a:prstGeom prst="rect">
+            <a:avLst/>
+          </a:prstGeom>
+          <a:noFill/>
+        </p:spPr>
+        <p:txBody>
+          <a:bodyPr wrap="square" anchor="ctr">
+            <a:spAutoFit/>
+          </a:bodyPr>
+          <a:lstStyle/>
+          <a:p>
+            <a:pPr algn="ctr">
+              <a:defRPr sz="1300" b="1">
+                <a:solidFill>
+                  <a:srgbClr val="2D3238"/>
+                </a:solidFill>
+              </a:defRPr>
+            </a:pPr>
+            <a:r>
+              <a:t>Core message: revenue is substantial, but concentration and customer recency deserve management attention.</a:t>
+            </a:r>
+          </a:p>
+        </p:txBody>
+      </p:sp>
+      <p:sp>
+        <p:nvSpPr>
+          <p:cNvPr id="21" name="TextBox 20"/>
+          <p:cNvSpPr txBox="1"/>
+          <p:nvPr/>
+        </p:nvSpPr>
+        <p:spPr>
+          <a:xfrm>
+            <a:off x="502920" y="6446520"/>
+            <a:ext cx="11155680" cy="228600"/>
           </a:xfrm>
           <a:prstGeom prst="rect">
             <a:avLst/>
@@ -3998,9 +5411,9 @@
           <a:lstStyle/>
           <a:p>
             <a:pPr algn="ctr">
-              <a:defRPr sz="1000">
-                <a:solidFill>
-                  <a:srgbClr val="666666"/>
+              <a:defRPr sz="850">
+                <a:solidFill>
+                  <a:srgbClr val="6E7681"/>
                 </a:solidFill>
               </a:defRPr>
             </a:pPr>
@@ -4021,6 +5434,14 @@
 <file path=ppt/slides/slide3.xml><?xml version="1.0" encoding="utf-8"?>
 <p:sld xmlns:a="http://schemas.openxmlformats.org/drawingml/2006/main" xmlns:r="http://schemas.openxmlformats.org/officeDocument/2006/relationships" xmlns:p="http://schemas.openxmlformats.org/presentationml/2006/main">
   <p:cSld>
+    <p:bg>
+      <p:bgPr>
+        <a:solidFill>
+          <a:srgbClr val="FFFFFF"/>
+        </a:solidFill>
+        <a:effectLst/>
+      </p:bgPr>
+    </p:bg>
     <p:spTree>
       <p:nvGrpSpPr>
         <p:cNvPr id="1" name=""/>
@@ -4044,7 +5465,7 @@
         <p:spPr>
           <a:xfrm>
             <a:off x="0" y="0"/>
-            <a:ext cx="12191695" cy="1097280"/>
+            <a:ext cx="12191695" cy="987552"/>
           </a:xfrm>
           <a:prstGeom prst="rect">
             <a:avLst/>
@@ -4087,8 +5508,8 @@
         </p:nvSpPr>
         <p:spPr>
           <a:xfrm>
-            <a:off x="548640" y="137160"/>
-            <a:ext cx="10972800" cy="822960"/>
+            <a:off x="502920" y="109728"/>
+            <a:ext cx="11064240" cy="594360"/>
           </a:xfrm>
           <a:prstGeom prst="rect">
             <a:avLst/>
@@ -4102,7 +5523,7 @@
           <a:lstStyle/>
           <a:p>
             <a:pPr>
-              <a:defRPr sz="3200" b="1">
+              <a:defRPr sz="2700" b="1">
                 <a:solidFill>
                   <a:srgbClr val="FFFFFF"/>
                 </a:solidFill>
@@ -4122,8 +5543,8 @@
         </p:nvSpPr>
         <p:spPr>
           <a:xfrm>
-            <a:off x="548640" y="1143000"/>
-            <a:ext cx="10972800" cy="457200"/>
+            <a:off x="530352" y="1069848"/>
+            <a:ext cx="10972800" cy="411480"/>
           </a:xfrm>
           <a:prstGeom prst="rect">
             <a:avLst/>
@@ -4137,28 +5558,109 @@
           <a:lstStyle/>
           <a:p>
             <a:pPr>
-              <a:defRPr sz="1600" i="1">
+              <a:defRPr sz="1300">
                 <a:solidFill>
                   <a:srgbClr val="2E75B6"/>
                 </a:solidFill>
               </a:defRPr>
             </a:pPr>
             <a:r>
-              <a:t>Evidence-based choices that ensured analytical rigor</a:t>
-            </a:r>
-          </a:p>
-        </p:txBody>
-      </p:sp>
-      <p:sp>
-        <p:nvSpPr>
-          <p:cNvPr id="5" name="TextBox 4"/>
-          <p:cNvSpPr txBox="1"/>
-          <p:nvPr/>
-        </p:nvSpPr>
-        <p:spPr>
-          <a:xfrm>
-            <a:off x="548640" y="1737360"/>
-            <a:ext cx="10972800" cy="4572000"/>
+              <a:t>The final dataset is traceable from raw transactions to physical-product analysis</a:t>
+            </a:r>
+          </a:p>
+        </p:txBody>
+      </p:sp>
+      <p:sp>
+        <p:nvSpPr>
+          <p:cNvPr id="5" name="Rounded Rectangle 4"/>
+          <p:cNvSpPr/>
+          <p:nvPr/>
+        </p:nvSpPr>
+        <p:spPr>
+          <a:xfrm>
+            <a:off x="548640" y="1417320"/>
+            <a:ext cx="2560320" cy="1234440"/>
+          </a:xfrm>
+          <a:prstGeom prst="roundRect">
+            <a:avLst/>
+          </a:prstGeom>
+          <a:solidFill>
+            <a:srgbClr val="E8F1FA"/>
+          </a:solidFill>
+          <a:ln w="16510">
+            <a:solidFill>
+              <a:srgbClr val="2E75B6"/>
+            </a:solidFill>
+          </a:ln>
+        </p:spPr>
+        <p:style>
+          <a:lnRef idx="1">
+            <a:schemeClr val="accent1"/>
+          </a:lnRef>
+          <a:fillRef idx="3">
+            <a:schemeClr val="accent1"/>
+          </a:fillRef>
+          <a:effectRef idx="2">
+            <a:schemeClr val="accent1"/>
+          </a:effectRef>
+          <a:fontRef idx="minor">
+            <a:schemeClr val="lt1"/>
+          </a:fontRef>
+        </p:style>
+        <p:txBody>
+          <a:bodyPr rtlCol="0" anchor="ctr"/>
+          <a:lstStyle/>
+          <a:p>
+            <a:pPr algn="ctr"/>
+            <a:endParaRPr/>
+          </a:p>
+        </p:txBody>
+      </p:sp>
+      <p:sp>
+        <p:nvSpPr>
+          <p:cNvPr id="6" name="TextBox 5"/>
+          <p:cNvSpPr txBox="1"/>
+          <p:nvPr/>
+        </p:nvSpPr>
+        <p:spPr>
+          <a:xfrm>
+            <a:off x="713232" y="1563624"/>
+            <a:ext cx="2231136" cy="502920"/>
+          </a:xfrm>
+          <a:prstGeom prst="rect">
+            <a:avLst/>
+          </a:prstGeom>
+          <a:noFill/>
+        </p:spPr>
+        <p:txBody>
+          <a:bodyPr wrap="none">
+            <a:spAutoFit/>
+          </a:bodyPr>
+          <a:lstStyle/>
+          <a:p>
+            <a:pPr algn="ctr">
+              <a:defRPr sz="2300" b="1">
+                <a:solidFill>
+                  <a:srgbClr val="2E75B6"/>
+                </a:solidFill>
+              </a:defRPr>
+            </a:pPr>
+            <a:r>
+              <a:t>541,909</a:t>
+            </a:r>
+          </a:p>
+        </p:txBody>
+      </p:sp>
+      <p:sp>
+        <p:nvSpPr>
+          <p:cNvPr id="7" name="TextBox 6"/>
+          <p:cNvSpPr txBox="1"/>
+          <p:nvPr/>
+        </p:nvSpPr>
+        <p:spPr>
+          <a:xfrm>
+            <a:off x="694944" y="2130552"/>
+            <a:ext cx="2267712" cy="411480"/>
           </a:xfrm>
           <a:prstGeom prst="rect">
             <a:avLst/>
@@ -4167,96 +5669,676 @@
         </p:spPr>
         <p:txBody>
           <a:bodyPr wrap="square">
+            <a:spAutoFit/>
+          </a:bodyPr>
+          <a:lstStyle/>
+          <a:p>
+            <a:pPr algn="ctr">
+              <a:defRPr sz="1050">
+                <a:solidFill>
+                  <a:srgbClr val="2D3238"/>
+                </a:solidFill>
+              </a:defRPr>
+            </a:pPr>
+            <a:r>
+              <a:t>Raw transactions</a:t>
+            </a:r>
+          </a:p>
+        </p:txBody>
+      </p:sp>
+      <p:sp>
+        <p:nvSpPr>
+          <p:cNvPr id="8" name="Rounded Rectangle 7"/>
+          <p:cNvSpPr/>
+          <p:nvPr/>
+        </p:nvSpPr>
+        <p:spPr>
+          <a:xfrm>
+            <a:off x="3291840" y="1417320"/>
+            <a:ext cx="2560320" cy="1234440"/>
+          </a:xfrm>
+          <a:prstGeom prst="roundRect">
+            <a:avLst/>
+          </a:prstGeom>
+          <a:solidFill>
+            <a:srgbClr val="E8F1FA"/>
+          </a:solidFill>
+          <a:ln w="16510">
+            <a:solidFill>
+              <a:srgbClr val="2E75B6"/>
+            </a:solidFill>
+          </a:ln>
+        </p:spPr>
+        <p:style>
+          <a:lnRef idx="1">
+            <a:schemeClr val="accent1"/>
+          </a:lnRef>
+          <a:fillRef idx="3">
+            <a:schemeClr val="accent1"/>
+          </a:fillRef>
+          <a:effectRef idx="2">
+            <a:schemeClr val="accent1"/>
+          </a:effectRef>
+          <a:fontRef idx="minor">
+            <a:schemeClr val="lt1"/>
+          </a:fontRef>
+        </p:style>
+        <p:txBody>
+          <a:bodyPr rtlCol="0" anchor="ctr"/>
+          <a:lstStyle/>
+          <a:p>
+            <a:pPr algn="ctr"/>
+            <a:endParaRPr/>
+          </a:p>
+        </p:txBody>
+      </p:sp>
+      <p:sp>
+        <p:nvSpPr>
+          <p:cNvPr id="9" name="TextBox 8"/>
+          <p:cNvSpPr txBox="1"/>
+          <p:nvPr/>
+        </p:nvSpPr>
+        <p:spPr>
+          <a:xfrm>
+            <a:off x="3456432" y="1563624"/>
+            <a:ext cx="2231136" cy="502920"/>
+          </a:xfrm>
+          <a:prstGeom prst="rect">
+            <a:avLst/>
+          </a:prstGeom>
+          <a:noFill/>
+        </p:spPr>
+        <p:txBody>
+          <a:bodyPr wrap="none">
+            <a:spAutoFit/>
+          </a:bodyPr>
+          <a:lstStyle/>
+          <a:p>
+            <a:pPr algn="ctr">
+              <a:defRPr sz="2300" b="1">
+                <a:solidFill>
+                  <a:srgbClr val="2E75B6"/>
+                </a:solidFill>
+              </a:defRPr>
+            </a:pPr>
+            <a:r>
+              <a:t>524,878</a:t>
+            </a:r>
+          </a:p>
+        </p:txBody>
+      </p:sp>
+      <p:sp>
+        <p:nvSpPr>
+          <p:cNvPr id="10" name="TextBox 9"/>
+          <p:cNvSpPr txBox="1"/>
+          <p:nvPr/>
+        </p:nvSpPr>
+        <p:spPr>
+          <a:xfrm>
+            <a:off x="3438144" y="2130552"/>
+            <a:ext cx="2267712" cy="411480"/>
+          </a:xfrm>
+          <a:prstGeom prst="rect">
+            <a:avLst/>
+          </a:prstGeom>
+          <a:noFill/>
+        </p:spPr>
+        <p:txBody>
+          <a:bodyPr wrap="square">
+            <a:spAutoFit/>
+          </a:bodyPr>
+          <a:lstStyle/>
+          <a:p>
+            <a:pPr algn="ctr">
+              <a:defRPr sz="1050">
+                <a:solidFill>
+                  <a:srgbClr val="2D3238"/>
+                </a:solidFill>
+              </a:defRPr>
+            </a:pPr>
+            <a:r>
+              <a:t>Valid sales rows</a:t>
+            </a:r>
+          </a:p>
+        </p:txBody>
+      </p:sp>
+      <p:sp>
+        <p:nvSpPr>
+          <p:cNvPr id="11" name="Rounded Rectangle 10"/>
+          <p:cNvSpPr/>
+          <p:nvPr/>
+        </p:nvSpPr>
+        <p:spPr>
+          <a:xfrm>
+            <a:off x="6035040" y="1417320"/>
+            <a:ext cx="2560320" cy="1234440"/>
+          </a:xfrm>
+          <a:prstGeom prst="roundRect">
+            <a:avLst/>
+          </a:prstGeom>
+          <a:solidFill>
+            <a:srgbClr val="EAF6EF"/>
+          </a:solidFill>
+          <a:ln w="16510">
+            <a:solidFill>
+              <a:srgbClr val="2E8B57"/>
+            </a:solidFill>
+          </a:ln>
+        </p:spPr>
+        <p:style>
+          <a:lnRef idx="1">
+            <a:schemeClr val="accent1"/>
+          </a:lnRef>
+          <a:fillRef idx="3">
+            <a:schemeClr val="accent1"/>
+          </a:fillRef>
+          <a:effectRef idx="2">
+            <a:schemeClr val="accent1"/>
+          </a:effectRef>
+          <a:fontRef idx="minor">
+            <a:schemeClr val="lt1"/>
+          </a:fontRef>
+        </p:style>
+        <p:txBody>
+          <a:bodyPr rtlCol="0" anchor="ctr"/>
+          <a:lstStyle/>
+          <a:p>
+            <a:pPr algn="ctr"/>
+            <a:endParaRPr/>
+          </a:p>
+        </p:txBody>
+      </p:sp>
+      <p:sp>
+        <p:nvSpPr>
+          <p:cNvPr id="12" name="TextBox 11"/>
+          <p:cNvSpPr txBox="1"/>
+          <p:nvPr/>
+        </p:nvSpPr>
+        <p:spPr>
+          <a:xfrm>
+            <a:off x="6199631" y="1563624"/>
+            <a:ext cx="2231136" cy="502920"/>
+          </a:xfrm>
+          <a:prstGeom prst="rect">
+            <a:avLst/>
+          </a:prstGeom>
+          <a:noFill/>
+        </p:spPr>
+        <p:txBody>
+          <a:bodyPr wrap="none">
+            <a:spAutoFit/>
+          </a:bodyPr>
+          <a:lstStyle/>
+          <a:p>
+            <a:pPr algn="ctr">
+              <a:defRPr sz="2300" b="1">
+                <a:solidFill>
+                  <a:srgbClr val="2E8B57"/>
+                </a:solidFill>
+              </a:defRPr>
+            </a:pPr>
+            <a:r>
+              <a:t>522,728</a:t>
+            </a:r>
+          </a:p>
+        </p:txBody>
+      </p:sp>
+      <p:sp>
+        <p:nvSpPr>
+          <p:cNvPr id="13" name="TextBox 12"/>
+          <p:cNvSpPr txBox="1"/>
+          <p:nvPr/>
+        </p:nvSpPr>
+        <p:spPr>
+          <a:xfrm>
+            <a:off x="6181344" y="2130552"/>
+            <a:ext cx="2267712" cy="411480"/>
+          </a:xfrm>
+          <a:prstGeom prst="rect">
+            <a:avLst/>
+          </a:prstGeom>
+          <a:noFill/>
+        </p:spPr>
+        <p:txBody>
+          <a:bodyPr wrap="square">
+            <a:spAutoFit/>
+          </a:bodyPr>
+          <a:lstStyle/>
+          <a:p>
+            <a:pPr algn="ctr">
+              <a:defRPr sz="1050">
+                <a:solidFill>
+                  <a:srgbClr val="2D3238"/>
+                </a:solidFill>
+              </a:defRPr>
+            </a:pPr>
+            <a:r>
+              <a:t>Physical-product rows</a:t>
+            </a:r>
+          </a:p>
+        </p:txBody>
+      </p:sp>
+      <p:sp>
+        <p:nvSpPr>
+          <p:cNvPr id="14" name="Rounded Rectangle 13"/>
+          <p:cNvSpPr/>
+          <p:nvPr/>
+        </p:nvSpPr>
+        <p:spPr>
+          <a:xfrm>
+            <a:off x="8778240" y="1417320"/>
+            <a:ext cx="2560320" cy="1234440"/>
+          </a:xfrm>
+          <a:prstGeom prst="roundRect">
+            <a:avLst/>
+          </a:prstGeom>
+          <a:solidFill>
+            <a:srgbClr val="EAF6EF"/>
+          </a:solidFill>
+          <a:ln w="16510">
+            <a:solidFill>
+              <a:srgbClr val="2E8B57"/>
+            </a:solidFill>
+          </a:ln>
+        </p:spPr>
+        <p:style>
+          <a:lnRef idx="1">
+            <a:schemeClr val="accent1"/>
+          </a:lnRef>
+          <a:fillRef idx="3">
+            <a:schemeClr val="accent1"/>
+          </a:fillRef>
+          <a:effectRef idx="2">
+            <a:schemeClr val="accent1"/>
+          </a:effectRef>
+          <a:fontRef idx="minor">
+            <a:schemeClr val="lt1"/>
+          </a:fontRef>
+        </p:style>
+        <p:txBody>
+          <a:bodyPr rtlCol="0" anchor="ctr"/>
+          <a:lstStyle/>
+          <a:p>
+            <a:pPr algn="ctr"/>
+            <a:endParaRPr/>
+          </a:p>
+        </p:txBody>
+      </p:sp>
+      <p:sp>
+        <p:nvSpPr>
+          <p:cNvPr id="15" name="TextBox 14"/>
+          <p:cNvSpPr txBox="1"/>
+          <p:nvPr/>
+        </p:nvSpPr>
+        <p:spPr>
+          <a:xfrm>
+            <a:off x="8942832" y="1563624"/>
+            <a:ext cx="2231136" cy="502920"/>
+          </a:xfrm>
+          <a:prstGeom prst="rect">
+            <a:avLst/>
+          </a:prstGeom>
+          <a:noFill/>
+        </p:spPr>
+        <p:txBody>
+          <a:bodyPr wrap="none">
+            <a:spAutoFit/>
+          </a:bodyPr>
+          <a:lstStyle/>
+          <a:p>
+            <a:pPr algn="ctr">
+              <a:defRPr sz="2300" b="1">
+                <a:solidFill>
+                  <a:srgbClr val="2E8B57"/>
+                </a:solidFill>
+              </a:defRPr>
+            </a:pPr>
+            <a:r>
+              <a:t>£0.00</a:t>
+            </a:r>
+          </a:p>
+        </p:txBody>
+      </p:sp>
+      <p:sp>
+        <p:nvSpPr>
+          <p:cNvPr id="16" name="TextBox 15"/>
+          <p:cNvSpPr txBox="1"/>
+          <p:nvPr/>
+        </p:nvSpPr>
+        <p:spPr>
+          <a:xfrm>
+            <a:off x="8924544" y="2130552"/>
+            <a:ext cx="2267712" cy="411480"/>
+          </a:xfrm>
+          <a:prstGeom prst="rect">
+            <a:avLst/>
+          </a:prstGeom>
+          <a:noFill/>
+        </p:spPr>
+        <p:txBody>
+          <a:bodyPr wrap="square">
+            <a:spAutoFit/>
+          </a:bodyPr>
+          <a:lstStyle/>
+          <a:p>
+            <a:pPr algn="ctr">
+              <a:defRPr sz="1050">
+                <a:solidFill>
+                  <a:srgbClr val="2D3238"/>
+                </a:solidFill>
+              </a:defRPr>
+            </a:pPr>
+            <a:r>
+              <a:t>Revenue reconciliation difference</a:t>
+            </a:r>
+          </a:p>
+        </p:txBody>
+      </p:sp>
+      <p:sp>
+        <p:nvSpPr>
+          <p:cNvPr id="17" name="TextBox 16"/>
+          <p:cNvSpPr txBox="1"/>
+          <p:nvPr/>
+        </p:nvSpPr>
+        <p:spPr>
+          <a:xfrm>
+            <a:off x="685800" y="2971800"/>
+            <a:ext cx="3657600" cy="320040"/>
+          </a:xfrm>
+          <a:prstGeom prst="rect">
+            <a:avLst/>
+          </a:prstGeom>
+          <a:noFill/>
+        </p:spPr>
+        <p:txBody>
+          <a:bodyPr wrap="square" anchor="t">
+            <a:spAutoFit/>
+          </a:bodyPr>
+          <a:lstStyle/>
+          <a:p>
+            <a:pPr algn="l">
+              <a:defRPr sz="1100" b="1" i="0">
+                <a:solidFill>
+                  <a:srgbClr val="2E75B6"/>
+                </a:solidFill>
+              </a:defRPr>
+            </a:pPr>
+            <a:r>
+              <a:t>KEY QUALITY DECISIONS</a:t>
+            </a:r>
+          </a:p>
+        </p:txBody>
+      </p:sp>
+      <p:sp>
+        <p:nvSpPr>
+          <p:cNvPr id="18" name="TextBox 17"/>
+          <p:cNvSpPr txBox="1"/>
+          <p:nvPr/>
+        </p:nvSpPr>
+        <p:spPr>
+          <a:xfrm>
+            <a:off x="685800" y="3246120"/>
+            <a:ext cx="6629400" cy="2788920"/>
+          </a:xfrm>
+          <a:prstGeom prst="rect">
+            <a:avLst/>
+          </a:prstGeom>
+          <a:noFill/>
+        </p:spPr>
+        <p:txBody>
+          <a:bodyPr wrap="square" anchor="t">
             <a:spAutoFit/>
           </a:bodyPr>
           <a:lstStyle/>
           <a:p>
             <a:pPr>
               <a:spcAft>
-                <a:spcPts val="1200"/>
+                <a:spcPts val="1000"/>
               </a:spcAft>
-              <a:defRPr sz="1800">
-                <a:solidFill>
-                  <a:srgbClr val="333333"/>
-                </a:solidFill>
-              </a:defRPr>
-            </a:pPr>
-            <a:r>
-              <a:t>✅ Missing CustomerID (24.93%): Labeled 'Unknown' for sales tracking; strictly excluded from RFM/Pareto analysis (likely B2C guest checkouts).</a:t>
+              <a:defRPr sz="1350">
+                <a:solidFill>
+                  <a:srgbClr val="2D3238"/>
+                </a:solidFill>
+              </a:defRPr>
+            </a:pPr>
+            <a:r>
+              <a:t>Missing CustomerID: 24.93% of raw records are treated as Unknown for customer-level analysis.</a:t>
             </a:r>
           </a:p>
           <a:p>
             <a:pPr>
               <a:spcAft>
-                <a:spcPts val="1200"/>
+                <a:spcPts val="1000"/>
               </a:spcAft>
-              <a:defRPr sz="1800">
-                <a:solidFill>
-                  <a:srgbClr val="333333"/>
-                </a:solidFill>
-              </a:defRPr>
-            </a:pPr>
-            <a:r>
-              <a:t>✅ Exact Duplicates (5,268 rows): Removed to prevent artificial inflation of metrics.</a:t>
+              <a:defRPr sz="1350">
+                <a:solidFill>
+                  <a:srgbClr val="2D3238"/>
+                </a:solidFill>
+              </a:defRPr>
+            </a:pPr>
+            <a:r>
+              <a:t>Exact duplicates: 5,268 rows removed before analytical calculations.</a:t>
             </a:r>
           </a:p>
           <a:p>
             <a:pPr>
               <a:spcAft>
-                <a:spcPts val="1200"/>
+                <a:spcPts val="1000"/>
               </a:spcAft>
-              <a:defRPr sz="1800">
-                <a:solidFill>
-                  <a:srgbClr val="333333"/>
-                </a:solidFill>
-              </a:defRPr>
-            </a:pPr>
-            <a:r>
-              <a:t>✅ Extreme Outlier Isolated: Single invoice of 'PAPER CRAFT, LITTLE BIRDIE' (80,995 units, £168,469.60) — isolated, not deleted, preserving total revenue reconciliation.</a:t>
+              <a:defRPr sz="1350">
+                <a:solidFill>
+                  <a:srgbClr val="2D3238"/>
+                </a:solidFill>
+              </a:defRPr>
+            </a:pPr>
+            <a:r>
+              <a:t>Extreme outlier isolated: PAPER CRAFT , LITTLE BIRDIE — 80,995 units and £168,469.60.</a:t>
             </a:r>
           </a:p>
           <a:p>
             <a:pPr>
               <a:spcAft>
-                <a:spcPts val="1200"/>
+                <a:spcPts val="1000"/>
               </a:spcAft>
-              <a:defRPr sz="1800">
-                <a:solidFill>
-                  <a:srgbClr val="333333"/>
-                </a:solidFill>
-              </a:defRPr>
-            </a:pPr>
-            <a:r>
-              <a:t>✅ Operational Items Excluded: £362,268.47 in DOTCOM POSTAGE, POSTAGE, Manual, Bank Charges removed from product rankings (service fees, not merchandise).</a:t>
+              <a:defRPr sz="1350">
+                <a:solidFill>
+                  <a:srgbClr val="2D3238"/>
+                </a:solidFill>
+              </a:defRPr>
+            </a:pPr>
+            <a:r>
+              <a:t>Operational items separated from merchandise analysis: £362,103.47.</a:t>
             </a:r>
           </a:p>
           <a:p>
             <a:pPr>
               <a:spcAft>
-                <a:spcPts val="1200"/>
+                <a:spcPts val="1000"/>
               </a:spcAft>
-              <a:defRPr sz="1800">
-                <a:solidFill>
-                  <a:srgbClr val="333333"/>
-                </a:solidFill>
-              </a:defRPr>
-            </a:pPr>
-            <a:r>
-              <a:t>📈 Final Clean Dataset: 522,728 physical product transactions representing £10,279,842.33 in true merchandise revenue.</a:t>
-            </a:r>
-          </a:p>
-        </p:txBody>
-      </p:sp>
-      <p:sp>
-        <p:nvSpPr>
-          <p:cNvPr id="6" name="TextBox 5"/>
-          <p:cNvSpPr txBox="1"/>
-          <p:nvPr/>
-        </p:nvSpPr>
-        <p:spPr>
-          <a:xfrm>
-            <a:off x="548640" y="6400800"/>
-            <a:ext cx="10972800" cy="365760"/>
+              <a:defRPr sz="1350">
+                <a:solidFill>
+                  <a:srgbClr val="2D3238"/>
+                </a:solidFill>
+              </a:defRPr>
+            </a:pPr>
+            <a:r>
+              <a:t>Final physical-product dataset: 522,728 rows and £10,111,537.73.</a:t>
+            </a:r>
+          </a:p>
+        </p:txBody>
+      </p:sp>
+      <p:sp>
+        <p:nvSpPr>
+          <p:cNvPr id="19" name="Rounded Rectangle 18"/>
+          <p:cNvSpPr/>
+          <p:nvPr/>
+        </p:nvSpPr>
+        <p:spPr>
+          <a:xfrm>
+            <a:off x="7635240" y="3337560"/>
+            <a:ext cx="3794760" cy="960120"/>
+          </a:xfrm>
+          <a:prstGeom prst="roundRect">
+            <a:avLst/>
+          </a:prstGeom>
+          <a:solidFill>
+            <a:srgbClr val="FAEDEB"/>
+          </a:solidFill>
+          <a:ln w="12700">
+            <a:solidFill>
+              <a:srgbClr val="C0392B"/>
+            </a:solidFill>
+          </a:ln>
+        </p:spPr>
+        <p:style>
+          <a:lnRef idx="1">
+            <a:schemeClr val="accent1"/>
+          </a:lnRef>
+          <a:fillRef idx="3">
+            <a:schemeClr val="accent1"/>
+          </a:fillRef>
+          <a:effectRef idx="2">
+            <a:schemeClr val="accent1"/>
+          </a:effectRef>
+          <a:fontRef idx="minor">
+            <a:schemeClr val="lt1"/>
+          </a:fontRef>
+        </p:style>
+        <p:txBody>
+          <a:bodyPr rtlCol="0" anchor="ctr"/>
+          <a:lstStyle/>
+          <a:p>
+            <a:pPr algn="ctr"/>
+            <a:endParaRPr/>
+          </a:p>
+        </p:txBody>
+      </p:sp>
+      <p:sp>
+        <p:nvSpPr>
+          <p:cNvPr id="20" name="TextBox 19"/>
+          <p:cNvSpPr txBox="1"/>
+          <p:nvPr/>
+        </p:nvSpPr>
+        <p:spPr>
+          <a:xfrm>
+            <a:off x="7799831" y="3447288"/>
+            <a:ext cx="3465576" cy="740664"/>
+          </a:xfrm>
+          <a:prstGeom prst="rect">
+            <a:avLst/>
+          </a:prstGeom>
+          <a:noFill/>
+        </p:spPr>
+        <p:txBody>
+          <a:bodyPr wrap="square" anchor="ctr">
+            <a:spAutoFit/>
+          </a:bodyPr>
+          <a:lstStyle/>
+          <a:p>
+            <a:pPr algn="ctr">
+              <a:defRPr sz="1300" b="1">
+                <a:solidFill>
+                  <a:srgbClr val="2D3238"/>
+                </a:solidFill>
+              </a:defRPr>
+            </a:pPr>
+            <a:r>
+              <a:t>December 2011 is incomplete: the dataset ends on 9 December, so it is not treated as a full-month observation.</a:t>
+            </a:r>
+          </a:p>
+        </p:txBody>
+      </p:sp>
+      <p:sp>
+        <p:nvSpPr>
+          <p:cNvPr id="21" name="Rounded Rectangle 20"/>
+          <p:cNvSpPr/>
+          <p:nvPr/>
+        </p:nvSpPr>
+        <p:spPr>
+          <a:xfrm>
+            <a:off x="7635240" y="4572000"/>
+            <a:ext cx="3794760" cy="960120"/>
+          </a:xfrm>
+          <a:prstGeom prst="roundRect">
+            <a:avLst/>
+          </a:prstGeom>
+          <a:solidFill>
+            <a:srgbClr val="EAF6EF"/>
+          </a:solidFill>
+          <a:ln w="12700">
+            <a:solidFill>
+              <a:srgbClr val="2E8B57"/>
+            </a:solidFill>
+          </a:ln>
+        </p:spPr>
+        <p:style>
+          <a:lnRef idx="1">
+            <a:schemeClr val="accent1"/>
+          </a:lnRef>
+          <a:fillRef idx="3">
+            <a:schemeClr val="accent1"/>
+          </a:fillRef>
+          <a:effectRef idx="2">
+            <a:schemeClr val="accent1"/>
+          </a:effectRef>
+          <a:fontRef idx="minor">
+            <a:schemeClr val="lt1"/>
+          </a:fontRef>
+        </p:style>
+        <p:txBody>
+          <a:bodyPr rtlCol="0" anchor="ctr"/>
+          <a:lstStyle/>
+          <a:p>
+            <a:pPr algn="ctr"/>
+            <a:endParaRPr/>
+          </a:p>
+        </p:txBody>
+      </p:sp>
+      <p:sp>
+        <p:nvSpPr>
+          <p:cNvPr id="22" name="TextBox 21"/>
+          <p:cNvSpPr txBox="1"/>
+          <p:nvPr/>
+        </p:nvSpPr>
+        <p:spPr>
+          <a:xfrm>
+            <a:off x="7799831" y="4681728"/>
+            <a:ext cx="3465576" cy="740664"/>
+          </a:xfrm>
+          <a:prstGeom prst="rect">
+            <a:avLst/>
+          </a:prstGeom>
+          <a:noFill/>
+        </p:spPr>
+        <p:txBody>
+          <a:bodyPr wrap="square" anchor="ctr">
+            <a:spAutoFit/>
+          </a:bodyPr>
+          <a:lstStyle/>
+          <a:p>
+            <a:pPr algn="ctr">
+              <a:defRPr sz="1300" b="1">
+                <a:solidFill>
+                  <a:srgbClr val="2D3238"/>
+                </a:solidFill>
+              </a:defRPr>
+            </a:pPr>
+            <a:r>
+              <a:t>Validation result: row difference = 0 and revenue difference = £0.00.</a:t>
+            </a:r>
+          </a:p>
+        </p:txBody>
+      </p:sp>
+      <p:sp>
+        <p:nvSpPr>
+          <p:cNvPr id="23" name="TextBox 22"/>
+          <p:cNvSpPr txBox="1"/>
+          <p:nvPr/>
+        </p:nvSpPr>
+        <p:spPr>
+          <a:xfrm>
+            <a:off x="502920" y="6446520"/>
+            <a:ext cx="11155680" cy="228600"/>
           </a:xfrm>
           <a:prstGeom prst="rect">
             <a:avLst/>
@@ -4270,9 +6352,9 @@
           <a:lstStyle/>
           <a:p>
             <a:pPr algn="ctr">
-              <a:defRPr sz="1000">
-                <a:solidFill>
-                  <a:srgbClr val="666666"/>
+              <a:defRPr sz="850">
+                <a:solidFill>
+                  <a:srgbClr val="6E7681"/>
                 </a:solidFill>
               </a:defRPr>
             </a:pPr>
@@ -4293,6 +6375,14 @@
 <file path=ppt/slides/slide4.xml><?xml version="1.0" encoding="utf-8"?>
 <p:sld xmlns:a="http://schemas.openxmlformats.org/drawingml/2006/main" xmlns:r="http://schemas.openxmlformats.org/officeDocument/2006/relationships" xmlns:p="http://schemas.openxmlformats.org/presentationml/2006/main">
   <p:cSld>
+    <p:bg>
+      <p:bgPr>
+        <a:solidFill>
+          <a:srgbClr val="FFFFFF"/>
+        </a:solidFill>
+        <a:effectLst/>
+      </p:bgPr>
+    </p:bg>
     <p:spTree>
       <p:nvGrpSpPr>
         <p:cNvPr id="1" name=""/>
@@ -4316,7 +6406,7 @@
         <p:spPr>
           <a:xfrm>
             <a:off x="0" y="0"/>
-            <a:ext cx="12191695" cy="1097280"/>
+            <a:ext cx="12191695" cy="987552"/>
           </a:xfrm>
           <a:prstGeom prst="rect">
             <a:avLst/>
@@ -4359,8 +6449,8 @@
         </p:nvSpPr>
         <p:spPr>
           <a:xfrm>
-            <a:off x="548640" y="137160"/>
-            <a:ext cx="10972800" cy="822960"/>
+            <a:off x="502920" y="109728"/>
+            <a:ext cx="11064240" cy="594360"/>
           </a:xfrm>
           <a:prstGeom prst="rect">
             <a:avLst/>
@@ -4374,14 +6464,14 @@
           <a:lstStyle/>
           <a:p>
             <a:pPr>
-              <a:defRPr sz="3200" b="1">
+              <a:defRPr sz="2700" b="1">
                 <a:solidFill>
                   <a:srgbClr val="FFFFFF"/>
                 </a:solidFill>
               </a:defRPr>
             </a:pPr>
             <a:r>
-              <a:t>Key Finding 1: Seasonal Revenue Drivers</a:t>
+              <a:t>Key Finding 1 — November Revenue Peak</a:t>
             </a:r>
           </a:p>
         </p:txBody>
@@ -4394,8 +6484,8 @@
         </p:nvSpPr>
         <p:spPr>
           <a:xfrm>
-            <a:off x="548640" y="1143000"/>
-            <a:ext cx="10972800" cy="457200"/>
+            <a:off x="530352" y="1069848"/>
+            <a:ext cx="10972800" cy="411480"/>
           </a:xfrm>
           <a:prstGeom prst="rect">
             <a:avLst/>
@@ -4409,119 +6499,21 @@
           <a:lstStyle/>
           <a:p>
             <a:pPr>
-              <a:defRPr sz="1600" i="1">
+              <a:defRPr sz="1300">
                 <a:solidFill>
                   <a:srgbClr val="2E75B6"/>
                 </a:solidFill>
               </a:defRPr>
             </a:pPr>
             <a:r>
-              <a:t>November 2011 — A Dual-Driver Phenomenon</a:t>
-            </a:r>
-          </a:p>
-        </p:txBody>
-      </p:sp>
-      <p:sp>
-        <p:nvSpPr>
-          <p:cNvPr id="5" name="TextBox 4"/>
-          <p:cNvSpPr txBox="1"/>
-          <p:nvPr/>
-        </p:nvSpPr>
-        <p:spPr>
-          <a:xfrm>
-            <a:off x="548640" y="1737360"/>
-            <a:ext cx="5943600" cy="4572000"/>
-          </a:xfrm>
-          <a:prstGeom prst="rect">
-            <a:avLst/>
-          </a:prstGeom>
-          <a:noFill/>
-        </p:spPr>
-        <p:txBody>
-          <a:bodyPr wrap="square">
-            <a:spAutoFit/>
-          </a:bodyPr>
-          <a:lstStyle/>
-          <a:p>
-            <a:pPr>
-              <a:spcAft>
-                <a:spcPts val="1200"/>
-              </a:spcAft>
-              <a:defRPr sz="1600">
-                <a:solidFill>
-                  <a:srgbClr val="333333"/>
-                </a:solidFill>
-              </a:defRPr>
-            </a:pPr>
-            <a:r>
-              <a:t>📈 November 2011 Revenue: £1,503,866.78 — approximately 2x the average monthly revenue.</a:t>
-            </a:r>
-          </a:p>
-          <a:p>
-            <a:pPr>
-              <a:spcAft>
-                <a:spcPts val="1200"/>
-              </a:spcAft>
-              <a:defRPr sz="1600">
-                <a:solidFill>
-                  <a:srgbClr val="333333"/>
-                </a:solidFill>
-              </a:defRPr>
-            </a:pPr>
-            <a:r>
-              <a:t>🔥 Driver A (Core Amplification): RABBIT NIGHT LIGHT generated £34,478.40 in November alone — 11.7x its monthly average (48.5% of annual revenue in one month).</a:t>
-            </a:r>
-          </a:p>
-          <a:p>
-            <a:pPr>
-              <a:spcAft>
-                <a:spcPts val="1200"/>
-              </a:spcAft>
-              <a:defRPr sz="1600">
-                <a:solidFill>
-                  <a:srgbClr val="333333"/>
-                </a:solidFill>
-              </a:defRPr>
-            </a:pPr>
-            <a:r>
-              <a:t>🎄 Driver B (Seasonal Emergence): Christmas-themed products (PAPER CHAIN KIT, CHILLI LIGHTS, HOT WATER BOTTLE KEEP CALM) contributed £50K+ in incremental revenue.</a:t>
-            </a:r>
-          </a:p>
-          <a:p>
-            <a:pPr>
-              <a:spcAft>
-                <a:spcPts val="1200"/>
-              </a:spcAft>
-              <a:defRPr sz="1600">
-                <a:solidFill>
-                  <a:srgbClr val="333333"/>
-                </a:solidFill>
-              </a:defRPr>
-            </a:pPr>
-            <a:r>
-              <a:t>🔄 Hybrid Model Confirmed: Only 40% overlap between November's Top 10 and annual Top 10 — predictable B2B restocking + distinct seasonal surge.</a:t>
-            </a:r>
-          </a:p>
-          <a:p>
-            <a:pPr>
-              <a:spcAft>
-                <a:spcPts val="1200"/>
-              </a:spcAft>
-              <a:defRPr sz="1600">
-                <a:solidFill>
-                  <a:srgbClr val="333333"/>
-                </a:solidFill>
-              </a:defRPr>
-            </a:pPr>
-            <a:r>
-              <a:t>📋 Top November Product: RABBIT NIGHT LIGHT (£34,478.40, 487 invoices, Avg_Qty=29.65).</a:t>
+              <a:t>The November spike is accompanied by a clear change in product mix</a:t>
             </a:r>
           </a:p>
         </p:txBody>
       </p:sp>
       <p:pic>
         <p:nvPicPr>
-          <p:cNvPr id="6" name="Picture 5" descr="november_vs_other_months_top10.png"/>
+          <p:cNvPr id="5" name="Picture 4" descr="01_monthly_revenue_trend.png"/>
           <p:cNvPicPr>
             <a:picLocks noChangeAspect="1"/>
           </p:cNvPicPr>
@@ -4535,8 +6527,8 @@
         </p:blipFill>
         <p:spPr>
           <a:xfrm>
-            <a:off x="6675120" y="1737360"/>
-            <a:ext cx="5029200" cy="2286000"/>
+            <a:off x="502920" y="1508760"/>
+            <a:ext cx="5486400" cy="4069080"/>
           </a:xfrm>
           <a:prstGeom prst="rect">
             <a:avLst/>
@@ -4545,7 +6537,7 @@
       </p:pic>
       <p:pic>
         <p:nvPicPr>
-          <p:cNvPr id="7" name="Picture 6" descr="seasonal_comparison_scatter.png"/>
+          <p:cNvPr id="6" name="Picture 5" descr="06_november_seasonal_lift.png"/>
           <p:cNvPicPr>
             <a:picLocks noChangeAspect="1"/>
           </p:cNvPicPr>
@@ -4559,8 +6551,8 @@
         </p:blipFill>
         <p:spPr>
           <a:xfrm>
-            <a:off x="6675120" y="4114800"/>
-            <a:ext cx="5029200" cy="2286000"/>
+            <a:off x="6217920" y="1508760"/>
+            <a:ext cx="5440680" cy="4069080"/>
           </a:xfrm>
           <a:prstGeom prst="rect">
             <a:avLst/>
@@ -4569,14 +6561,99 @@
       </p:pic>
       <p:sp>
         <p:nvSpPr>
+          <p:cNvPr id="7" name="Rounded Rectangle 6"/>
+          <p:cNvSpPr/>
+          <p:nvPr/>
+        </p:nvSpPr>
+        <p:spPr>
+          <a:xfrm>
+            <a:off x="2743200" y="5715000"/>
+            <a:ext cx="6720840" cy="566928"/>
+          </a:xfrm>
+          <a:prstGeom prst="roundRect">
+            <a:avLst/>
+          </a:prstGeom>
+          <a:solidFill>
+            <a:srgbClr val="FCF2E6"/>
+          </a:solidFill>
+          <a:ln w="12700">
+            <a:solidFill>
+              <a:srgbClr val="E67E22"/>
+            </a:solidFill>
+          </a:ln>
+        </p:spPr>
+        <p:style>
+          <a:lnRef idx="1">
+            <a:schemeClr val="accent1"/>
+          </a:lnRef>
+          <a:fillRef idx="3">
+            <a:schemeClr val="accent1"/>
+          </a:fillRef>
+          <a:effectRef idx="2">
+            <a:schemeClr val="accent1"/>
+          </a:effectRef>
+          <a:fontRef idx="minor">
+            <a:schemeClr val="lt1"/>
+          </a:fontRef>
+        </p:style>
+        <p:txBody>
+          <a:bodyPr rtlCol="0" anchor="ctr"/>
+          <a:lstStyle/>
+          <a:p>
+            <a:pPr algn="ctr"/>
+            <a:endParaRPr/>
+          </a:p>
+        </p:txBody>
+      </p:sp>
+      <p:sp>
+        <p:nvSpPr>
           <p:cNvPr id="8" name="TextBox 7"/>
           <p:cNvSpPr txBox="1"/>
           <p:nvPr/>
         </p:nvSpPr>
         <p:spPr>
           <a:xfrm>
-            <a:off x="548640" y="6400800"/>
-            <a:ext cx="10972800" cy="365760"/>
+            <a:off x="2907792" y="5824728"/>
+            <a:ext cx="6391655" cy="347472"/>
+          </a:xfrm>
+          <a:prstGeom prst="rect">
+            <a:avLst/>
+          </a:prstGeom>
+          <a:noFill/>
+        </p:spPr>
+        <p:txBody>
+          <a:bodyPr wrap="square" anchor="ctr">
+            <a:spAutoFit/>
+          </a:bodyPr>
+          <a:lstStyle/>
+          <a:p>
+            <a:pPr algn="ctr">
+              <a:defRPr sz="1300" b="1">
+                <a:solidFill>
+                  <a:srgbClr val="2D3238"/>
+                </a:solidFill>
+              </a:defRPr>
+            </a:pPr>
+            <a:r>
+              <a:t>November 2011: £1,503,866.78</a:t>
+            </a:r>
+            <a:br/>
+            <a:r>
+              <a:t>RABBIT NIGHT LIGHT generated £34,478.40 with a seasonal lift of £32,409.02.</a:t>
+            </a:r>
+          </a:p>
+        </p:txBody>
+      </p:sp>
+      <p:sp>
+        <p:nvSpPr>
+          <p:cNvPr id="9" name="TextBox 8"/>
+          <p:cNvSpPr txBox="1"/>
+          <p:nvPr/>
+        </p:nvSpPr>
+        <p:spPr>
+          <a:xfrm>
+            <a:off x="502920" y="6446520"/>
+            <a:ext cx="11155680" cy="228600"/>
           </a:xfrm>
           <a:prstGeom prst="rect">
             <a:avLst/>
@@ -4590,9 +6667,9 @@
           <a:lstStyle/>
           <a:p>
             <a:pPr algn="ctr">
-              <a:defRPr sz="1000">
-                <a:solidFill>
-                  <a:srgbClr val="666666"/>
+              <a:defRPr sz="850">
+                <a:solidFill>
+                  <a:srgbClr val="6E7681"/>
                 </a:solidFill>
               </a:defRPr>
             </a:pPr>
@@ -4613,6 +6690,14 @@
 <file path=ppt/slides/slide5.xml><?xml version="1.0" encoding="utf-8"?>
 <p:sld xmlns:a="http://schemas.openxmlformats.org/drawingml/2006/main" xmlns:r="http://schemas.openxmlformats.org/officeDocument/2006/relationships" xmlns:p="http://schemas.openxmlformats.org/presentationml/2006/main">
   <p:cSld>
+    <p:bg>
+      <p:bgPr>
+        <a:solidFill>
+          <a:srgbClr val="FFFFFF"/>
+        </a:solidFill>
+        <a:effectLst/>
+      </p:bgPr>
+    </p:bg>
     <p:spTree>
       <p:nvGrpSpPr>
         <p:cNvPr id="1" name=""/>
@@ -4636,7 +6721,7 @@
         <p:spPr>
           <a:xfrm>
             <a:off x="0" y="0"/>
-            <a:ext cx="12191695" cy="1097280"/>
+            <a:ext cx="12191695" cy="987552"/>
           </a:xfrm>
           <a:prstGeom prst="rect">
             <a:avLst/>
@@ -4679,8 +6764,8 @@
         </p:nvSpPr>
         <p:spPr>
           <a:xfrm>
-            <a:off x="548640" y="137160"/>
-            <a:ext cx="10972800" cy="822960"/>
+            <a:off x="502920" y="109728"/>
+            <a:ext cx="11064240" cy="594360"/>
           </a:xfrm>
           <a:prstGeom prst="rect">
             <a:avLst/>
@@ -4694,14 +6779,14 @@
           <a:lstStyle/>
           <a:p>
             <a:pPr>
-              <a:defRPr sz="3200" b="1">
+              <a:defRPr sz="2700" b="1">
                 <a:solidFill>
                   <a:srgbClr val="FFFFFF"/>
                 </a:solidFill>
               </a:defRPr>
             </a:pPr>
             <a:r>
-              <a:t>Key Finding 2: Customer Segmentation (RFM)</a:t>
+              <a:t>Key Finding 2 — Customer Concentration &amp; RFM</a:t>
             </a:r>
           </a:p>
         </p:txBody>
@@ -4714,8 +6799,8 @@
         </p:nvSpPr>
         <p:spPr>
           <a:xfrm>
-            <a:off x="548640" y="1143000"/>
-            <a:ext cx="10972800" cy="457200"/>
+            <a:off x="530352" y="1069848"/>
+            <a:ext cx="10972800" cy="411480"/>
           </a:xfrm>
           <a:prstGeom prst="rect">
             <a:avLst/>
@@ -4729,134 +6814,21 @@
           <a:lstStyle/>
           <a:p>
             <a:pPr>
-              <a:defRPr sz="1600" i="1">
+              <a:defRPr sz="1300">
                 <a:solidFill>
                   <a:srgbClr val="2E75B6"/>
                 </a:solidFill>
               </a:defRPr>
             </a:pPr>
             <a:r>
-              <a:t>Pareto 26/80 | Gini 0.142 | 4 Behavioral Segments</a:t>
-            </a:r>
-          </a:p>
-        </p:txBody>
-      </p:sp>
-      <p:sp>
-        <p:nvSpPr>
-          <p:cNvPr id="5" name="TextBox 4"/>
-          <p:cNvSpPr txBox="1"/>
-          <p:nvPr/>
-        </p:nvSpPr>
-        <p:spPr>
-          <a:xfrm>
-            <a:off x="548640" y="1737360"/>
-            <a:ext cx="5943600" cy="4572000"/>
-          </a:xfrm>
-          <a:prstGeom prst="rect">
-            <a:avLst/>
-          </a:prstGeom>
-          <a:noFill/>
-        </p:spPr>
-        <p:txBody>
-          <a:bodyPr wrap="square">
-            <a:spAutoFit/>
-          </a:bodyPr>
-          <a:lstStyle/>
-          <a:p>
-            <a:pPr>
-              <a:spcAft>
-                <a:spcPts val="1200"/>
-              </a:spcAft>
-              <a:defRPr sz="1600">
-                <a:solidFill>
-                  <a:srgbClr val="333333"/>
-                </a:solidFill>
-              </a:defRPr>
-            </a:pPr>
-            <a:r>
-              <a:t>📊 Pareto Validation: Top 26% of customers generate 80% of revenue — close to classic 80/20 rule.</a:t>
-            </a:r>
-          </a:p>
-          <a:p>
-            <a:pPr>
-              <a:spcAft>
-                <a:spcPts val="1200"/>
-              </a:spcAft>
-              <a:defRPr sz="1600">
-                <a:solidFill>
-                  <a:srgbClr val="333333"/>
-                </a:solidFill>
-              </a:defRPr>
-            </a:pPr>
-            <a:r>
-              <a:t>⚖️ Gini Coefficient = 0.142 (surprisingly low for B2B) — broad base of ~1,128 high-value wholesale customers, not whale-dependent.</a:t>
-            </a:r>
-          </a:p>
-          <a:p>
-            <a:pPr>
-              <a:spcAft>
-                <a:spcPts val="1200"/>
-              </a:spcAft>
-              <a:defRPr sz="1600">
-                <a:solidFill>
-                  <a:srgbClr val="333333"/>
-                </a:solidFill>
-              </a:defRPr>
-            </a:pPr>
-            <a:r>
-              <a:t>🏆 Champions (28.6% | 1,243): Avg £5,465 revenue, 10 orders/year, 18-day recency — the core B2B engine.</a:t>
-            </a:r>
-          </a:p>
-          <a:p>
-            <a:pPr>
-              <a:spcAft>
-                <a:spcPts val="1200"/>
-              </a:spcAft>
-              <a:defRPr sz="1600">
-                <a:solidFill>
-                  <a:srgbClr val="333333"/>
-                </a:solidFill>
-              </a:defRPr>
-            </a:pPr>
-            <a:r>
-              <a:t>⚠️ At Risk (27.4% | 1,188): Avg £580 revenue, 102-day recency — massive retention opportunity.</a:t>
-            </a:r>
-          </a:p>
-          <a:p>
-            <a:pPr>
-              <a:spcAft>
-                <a:spcPts val="1200"/>
-              </a:spcAft>
-              <a:defRPr sz="1600">
-                <a:solidFill>
-                  <a:srgbClr val="333333"/>
-                </a:solidFill>
-              </a:defRPr>
-            </a:pPr>
-            <a:r>
-              <a:t>💤 Lost/Hibernating (20.4% | 885): Avg £228 revenue, 223-day recency — minimal ROI on marketing spend.</a:t>
-            </a:r>
-          </a:p>
-          <a:p>
-            <a:pPr>
-              <a:spcAft>
-                <a:spcPts val="1200"/>
-              </a:spcAft>
-              <a:defRPr sz="1600">
-                <a:solidFill>
-                  <a:srgbClr val="333333"/>
-                </a:solidFill>
-              </a:defRPr>
-            </a:pPr>
-            <a:r>
-              <a:t>🎯 Critical Insight: 47.8% of customer base is At Risk or Lost — targeted win-back could add ~£690K annually.</a:t>
+              <a:t>Revenue is concentrated, while customer behaviour reveals four distinct groups</a:t>
             </a:r>
           </a:p>
         </p:txBody>
       </p:sp>
       <p:pic>
         <p:nvPicPr>
-          <p:cNvPr id="6" name="Picture 5" descr="lorenz_curve_customer_concentration.png"/>
+          <p:cNvPr id="5" name="Picture 4" descr="08_customer_revenue_concentration.png"/>
           <p:cNvPicPr>
             <a:picLocks noChangeAspect="1"/>
           </p:cNvPicPr>
@@ -4870,38 +6842,95 @@
         </p:blipFill>
         <p:spPr>
           <a:xfrm>
-            <a:off x="6675120" y="1737360"/>
-            <a:ext cx="5029200" cy="2286000"/>
+            <a:off x="502920" y="1417320"/>
+            <a:ext cx="5440680" cy="3063240"/>
           </a:xfrm>
           <a:prstGeom prst="rect">
             <a:avLst/>
           </a:prstGeom>
         </p:spPr>
       </p:pic>
-      <p:pic>
-        <p:nvPicPr>
-          <p:cNvPr id="7" name="Picture 6" descr="rfm_segment_distribution.png"/>
-          <p:cNvPicPr>
-            <a:picLocks noChangeAspect="1"/>
-          </p:cNvPicPr>
-          <p:nvPr/>
-        </p:nvPicPr>
-        <p:blipFill>
-          <a:blip r:embed="rId3"/>
-          <a:stretch>
-            <a:fillRect/>
-          </a:stretch>
-        </p:blipFill>
-        <p:spPr>
-          <a:xfrm>
-            <a:off x="6675120" y="4114800"/>
-            <a:ext cx="5029200" cy="2286000"/>
-          </a:xfrm>
-          <a:prstGeom prst="rect">
-            <a:avLst/>
-          </a:prstGeom>
-        </p:spPr>
-      </p:pic>
+      <p:sp>
+        <p:nvSpPr>
+          <p:cNvPr id="6" name="Rounded Rectangle 5"/>
+          <p:cNvSpPr/>
+          <p:nvPr/>
+        </p:nvSpPr>
+        <p:spPr>
+          <a:xfrm>
+            <a:off x="6172200" y="1417320"/>
+            <a:ext cx="2514600" cy="1051560"/>
+          </a:xfrm>
+          <a:prstGeom prst="roundRect">
+            <a:avLst/>
+          </a:prstGeom>
+          <a:solidFill>
+            <a:srgbClr val="E8F1FA"/>
+          </a:solidFill>
+          <a:ln w="16510">
+            <a:solidFill>
+              <a:srgbClr val="2E75B6"/>
+            </a:solidFill>
+          </a:ln>
+        </p:spPr>
+        <p:style>
+          <a:lnRef idx="1">
+            <a:schemeClr val="accent1"/>
+          </a:lnRef>
+          <a:fillRef idx="3">
+            <a:schemeClr val="accent1"/>
+          </a:fillRef>
+          <a:effectRef idx="2">
+            <a:schemeClr val="accent1"/>
+          </a:effectRef>
+          <a:fontRef idx="minor">
+            <a:schemeClr val="lt1"/>
+          </a:fontRef>
+        </p:style>
+        <p:txBody>
+          <a:bodyPr rtlCol="0" anchor="ctr"/>
+          <a:lstStyle/>
+          <a:p>
+            <a:pPr algn="ctr"/>
+            <a:endParaRPr/>
+          </a:p>
+        </p:txBody>
+      </p:sp>
+      <p:sp>
+        <p:nvSpPr>
+          <p:cNvPr id="7" name="TextBox 6"/>
+          <p:cNvSpPr txBox="1"/>
+          <p:nvPr/>
+        </p:nvSpPr>
+        <p:spPr>
+          <a:xfrm>
+            <a:off x="6336792" y="1563624"/>
+            <a:ext cx="2185416" cy="502920"/>
+          </a:xfrm>
+          <a:prstGeom prst="rect">
+            <a:avLst/>
+          </a:prstGeom>
+          <a:noFill/>
+        </p:spPr>
+        <p:txBody>
+          <a:bodyPr wrap="none">
+            <a:spAutoFit/>
+          </a:bodyPr>
+          <a:lstStyle/>
+          <a:p>
+            <a:pPr algn="ctr">
+              <a:defRPr sz="2300" b="1">
+                <a:solidFill>
+                  <a:srgbClr val="2E75B6"/>
+                </a:solidFill>
+              </a:defRPr>
+            </a:pPr>
+            <a:r>
+              <a:t>26%</a:t>
+            </a:r>
+          </a:p>
+        </p:txBody>
+      </p:sp>
       <p:sp>
         <p:nvSpPr>
           <p:cNvPr id="8" name="TextBox 7"/>
@@ -4910,8 +6939,89 @@
         </p:nvSpPr>
         <p:spPr>
           <a:xfrm>
-            <a:off x="548640" y="6400800"/>
-            <a:ext cx="10972800" cy="365760"/>
+            <a:off x="6318504" y="2130552"/>
+            <a:ext cx="2221992" cy="228599"/>
+          </a:xfrm>
+          <a:prstGeom prst="rect">
+            <a:avLst/>
+          </a:prstGeom>
+          <a:noFill/>
+        </p:spPr>
+        <p:txBody>
+          <a:bodyPr wrap="square">
+            <a:spAutoFit/>
+          </a:bodyPr>
+          <a:lstStyle/>
+          <a:p>
+            <a:pPr algn="ctr">
+              <a:defRPr sz="1050">
+                <a:solidFill>
+                  <a:srgbClr val="2D3238"/>
+                </a:solidFill>
+              </a:defRPr>
+            </a:pPr>
+            <a:r>
+              <a:t>Top customer share</a:t>
+            </a:r>
+          </a:p>
+        </p:txBody>
+      </p:sp>
+      <p:sp>
+        <p:nvSpPr>
+          <p:cNvPr id="9" name="Rounded Rectangle 8"/>
+          <p:cNvSpPr/>
+          <p:nvPr/>
+        </p:nvSpPr>
+        <p:spPr>
+          <a:xfrm>
+            <a:off x="8915400" y="1417320"/>
+            <a:ext cx="2514600" cy="1051560"/>
+          </a:xfrm>
+          <a:prstGeom prst="roundRect">
+            <a:avLst/>
+          </a:prstGeom>
+          <a:solidFill>
+            <a:srgbClr val="E8F1FA"/>
+          </a:solidFill>
+          <a:ln w="16510">
+            <a:solidFill>
+              <a:srgbClr val="2E75B6"/>
+            </a:solidFill>
+          </a:ln>
+        </p:spPr>
+        <p:style>
+          <a:lnRef idx="1">
+            <a:schemeClr val="accent1"/>
+          </a:lnRef>
+          <a:fillRef idx="3">
+            <a:schemeClr val="accent1"/>
+          </a:fillRef>
+          <a:effectRef idx="2">
+            <a:schemeClr val="accent1"/>
+          </a:effectRef>
+          <a:fontRef idx="minor">
+            <a:schemeClr val="lt1"/>
+          </a:fontRef>
+        </p:style>
+        <p:txBody>
+          <a:bodyPr rtlCol="0" anchor="ctr"/>
+          <a:lstStyle/>
+          <a:p>
+            <a:pPr algn="ctr"/>
+            <a:endParaRPr/>
+          </a:p>
+        </p:txBody>
+      </p:sp>
+      <p:sp>
+        <p:nvSpPr>
+          <p:cNvPr id="10" name="TextBox 9"/>
+          <p:cNvSpPr txBox="1"/>
+          <p:nvPr/>
+        </p:nvSpPr>
+        <p:spPr>
+          <a:xfrm>
+            <a:off x="9079992" y="1563624"/>
+            <a:ext cx="2185416" cy="502920"/>
           </a:xfrm>
           <a:prstGeom prst="rect">
             <a:avLst/>
@@ -4925,9 +7035,947 @@
           <a:lstStyle/>
           <a:p>
             <a:pPr algn="ctr">
-              <a:defRPr sz="1000">
-                <a:solidFill>
-                  <a:srgbClr val="666666"/>
+              <a:defRPr sz="2300" b="1">
+                <a:solidFill>
+                  <a:srgbClr val="2E75B6"/>
+                </a:solidFill>
+              </a:defRPr>
+            </a:pPr>
+            <a:r>
+              <a:t>80%</a:t>
+            </a:r>
+          </a:p>
+        </p:txBody>
+      </p:sp>
+      <p:sp>
+        <p:nvSpPr>
+          <p:cNvPr id="11" name="TextBox 10"/>
+          <p:cNvSpPr txBox="1"/>
+          <p:nvPr/>
+        </p:nvSpPr>
+        <p:spPr>
+          <a:xfrm>
+            <a:off x="9061704" y="2130552"/>
+            <a:ext cx="2221992" cy="228599"/>
+          </a:xfrm>
+          <a:prstGeom prst="rect">
+            <a:avLst/>
+          </a:prstGeom>
+          <a:noFill/>
+        </p:spPr>
+        <p:txBody>
+          <a:bodyPr wrap="square">
+            <a:spAutoFit/>
+          </a:bodyPr>
+          <a:lstStyle/>
+          <a:p>
+            <a:pPr algn="ctr">
+              <a:defRPr sz="1050">
+                <a:solidFill>
+                  <a:srgbClr val="2D3238"/>
+                </a:solidFill>
+              </a:defRPr>
+            </a:pPr>
+            <a:r>
+              <a:t>Known-customer revenue generated</a:t>
+            </a:r>
+          </a:p>
+        </p:txBody>
+      </p:sp>
+      <p:sp>
+        <p:nvSpPr>
+          <p:cNvPr id="12" name="Rounded Rectangle 11"/>
+          <p:cNvSpPr/>
+          <p:nvPr/>
+        </p:nvSpPr>
+        <p:spPr>
+          <a:xfrm>
+            <a:off x="6172200" y="2606040"/>
+            <a:ext cx="2514600" cy="1051560"/>
+          </a:xfrm>
+          <a:prstGeom prst="roundRect">
+            <a:avLst/>
+          </a:prstGeom>
+          <a:solidFill>
+            <a:srgbClr val="FAEDEB"/>
+          </a:solidFill>
+          <a:ln w="16510">
+            <a:solidFill>
+              <a:srgbClr val="C0392B"/>
+            </a:solidFill>
+          </a:ln>
+        </p:spPr>
+        <p:style>
+          <a:lnRef idx="1">
+            <a:schemeClr val="accent1"/>
+          </a:lnRef>
+          <a:fillRef idx="3">
+            <a:schemeClr val="accent1"/>
+          </a:fillRef>
+          <a:effectRef idx="2">
+            <a:schemeClr val="accent1"/>
+          </a:effectRef>
+          <a:fontRef idx="minor">
+            <a:schemeClr val="lt1"/>
+          </a:fontRef>
+        </p:style>
+        <p:txBody>
+          <a:bodyPr rtlCol="0" anchor="ctr"/>
+          <a:lstStyle/>
+          <a:p>
+            <a:pPr algn="ctr"/>
+            <a:endParaRPr/>
+          </a:p>
+        </p:txBody>
+      </p:sp>
+      <p:sp>
+        <p:nvSpPr>
+          <p:cNvPr id="13" name="TextBox 12"/>
+          <p:cNvSpPr txBox="1"/>
+          <p:nvPr/>
+        </p:nvSpPr>
+        <p:spPr>
+          <a:xfrm>
+            <a:off x="6336792" y="2752344"/>
+            <a:ext cx="2185416" cy="502920"/>
+          </a:xfrm>
+          <a:prstGeom prst="rect">
+            <a:avLst/>
+          </a:prstGeom>
+          <a:noFill/>
+        </p:spPr>
+        <p:txBody>
+          <a:bodyPr wrap="none">
+            <a:spAutoFit/>
+          </a:bodyPr>
+          <a:lstStyle/>
+          <a:p>
+            <a:pPr algn="ctr">
+              <a:defRPr sz="2300" b="1">
+                <a:solidFill>
+                  <a:srgbClr val="C0392B"/>
+                </a:solidFill>
+              </a:defRPr>
+            </a:pPr>
+            <a:r>
+              <a:t>0.716</a:t>
+            </a:r>
+          </a:p>
+        </p:txBody>
+      </p:sp>
+      <p:sp>
+        <p:nvSpPr>
+          <p:cNvPr id="14" name="TextBox 13"/>
+          <p:cNvSpPr txBox="1"/>
+          <p:nvPr/>
+        </p:nvSpPr>
+        <p:spPr>
+          <a:xfrm>
+            <a:off x="6318504" y="3319272"/>
+            <a:ext cx="2221992" cy="228599"/>
+          </a:xfrm>
+          <a:prstGeom prst="rect">
+            <a:avLst/>
+          </a:prstGeom>
+          <a:noFill/>
+        </p:spPr>
+        <p:txBody>
+          <a:bodyPr wrap="square">
+            <a:spAutoFit/>
+          </a:bodyPr>
+          <a:lstStyle/>
+          <a:p>
+            <a:pPr algn="ctr">
+              <a:defRPr sz="1050">
+                <a:solidFill>
+                  <a:srgbClr val="2D3238"/>
+                </a:solidFill>
+              </a:defRPr>
+            </a:pPr>
+            <a:r>
+              <a:t>Gini coefficient</a:t>
+            </a:r>
+          </a:p>
+        </p:txBody>
+      </p:sp>
+      <p:sp>
+        <p:nvSpPr>
+          <p:cNvPr id="15" name="Rounded Rectangle 14"/>
+          <p:cNvSpPr/>
+          <p:nvPr/>
+        </p:nvSpPr>
+        <p:spPr>
+          <a:xfrm>
+            <a:off x="8915400" y="2606040"/>
+            <a:ext cx="2514600" cy="1051560"/>
+          </a:xfrm>
+          <a:prstGeom prst="roundRect">
+            <a:avLst/>
+          </a:prstGeom>
+          <a:solidFill>
+            <a:srgbClr val="FCF2E6"/>
+          </a:solidFill>
+          <a:ln w="16510">
+            <a:solidFill>
+              <a:srgbClr val="E67E22"/>
+            </a:solidFill>
+          </a:ln>
+        </p:spPr>
+        <p:style>
+          <a:lnRef idx="1">
+            <a:schemeClr val="accent1"/>
+          </a:lnRef>
+          <a:fillRef idx="3">
+            <a:schemeClr val="accent1"/>
+          </a:fillRef>
+          <a:effectRef idx="2">
+            <a:schemeClr val="accent1"/>
+          </a:effectRef>
+          <a:fontRef idx="minor">
+            <a:schemeClr val="lt1"/>
+          </a:fontRef>
+        </p:style>
+        <p:txBody>
+          <a:bodyPr rtlCol="0" anchor="ctr"/>
+          <a:lstStyle/>
+          <a:p>
+            <a:pPr algn="ctr"/>
+            <a:endParaRPr/>
+          </a:p>
+        </p:txBody>
+      </p:sp>
+      <p:sp>
+        <p:nvSpPr>
+          <p:cNvPr id="16" name="TextBox 15"/>
+          <p:cNvSpPr txBox="1"/>
+          <p:nvPr/>
+        </p:nvSpPr>
+        <p:spPr>
+          <a:xfrm>
+            <a:off x="9079992" y="2752344"/>
+            <a:ext cx="2185416" cy="502920"/>
+          </a:xfrm>
+          <a:prstGeom prst="rect">
+            <a:avLst/>
+          </a:prstGeom>
+          <a:noFill/>
+        </p:spPr>
+        <p:txBody>
+          <a:bodyPr wrap="none">
+            <a:spAutoFit/>
+          </a:bodyPr>
+          <a:lstStyle/>
+          <a:p>
+            <a:pPr algn="ctr">
+              <a:defRPr sz="2300" b="1">
+                <a:solidFill>
+                  <a:srgbClr val="E67E22"/>
+                </a:solidFill>
+              </a:defRPr>
+            </a:pPr>
+            <a:r>
+              <a:t>2,073</a:t>
+            </a:r>
+          </a:p>
+        </p:txBody>
+      </p:sp>
+      <p:sp>
+        <p:nvSpPr>
+          <p:cNvPr id="17" name="TextBox 16"/>
+          <p:cNvSpPr txBox="1"/>
+          <p:nvPr/>
+        </p:nvSpPr>
+        <p:spPr>
+          <a:xfrm>
+            <a:off x="9061704" y="3319272"/>
+            <a:ext cx="2221992" cy="228599"/>
+          </a:xfrm>
+          <a:prstGeom prst="rect">
+            <a:avLst/>
+          </a:prstGeom>
+          <a:noFill/>
+        </p:spPr>
+        <p:txBody>
+          <a:bodyPr wrap="square">
+            <a:spAutoFit/>
+          </a:bodyPr>
+          <a:lstStyle/>
+          <a:p>
+            <a:pPr algn="ctr">
+              <a:defRPr sz="1050">
+                <a:solidFill>
+                  <a:srgbClr val="2D3238"/>
+                </a:solidFill>
+              </a:defRPr>
+            </a:pPr>
+            <a:r>
+              <a:t>At Risk + Lost customers</a:t>
+            </a:r>
+          </a:p>
+        </p:txBody>
+      </p:sp>
+      <p:sp>
+        <p:nvSpPr>
+          <p:cNvPr id="18" name="Rounded Rectangle 17"/>
+          <p:cNvSpPr/>
+          <p:nvPr/>
+        </p:nvSpPr>
+        <p:spPr>
+          <a:xfrm>
+            <a:off x="594360" y="4709160"/>
+            <a:ext cx="2743200" cy="1453896"/>
+          </a:xfrm>
+          <a:prstGeom prst="roundRect">
+            <a:avLst/>
+          </a:prstGeom>
+          <a:solidFill>
+            <a:srgbClr val="EAF6EF"/>
+          </a:solidFill>
+          <a:ln w="13970">
+            <a:solidFill>
+              <a:srgbClr val="2E8B57"/>
+            </a:solidFill>
+          </a:ln>
+        </p:spPr>
+        <p:style>
+          <a:lnRef idx="1">
+            <a:schemeClr val="accent1"/>
+          </a:lnRef>
+          <a:fillRef idx="3">
+            <a:schemeClr val="accent1"/>
+          </a:fillRef>
+          <a:effectRef idx="2">
+            <a:schemeClr val="accent1"/>
+          </a:effectRef>
+          <a:fontRef idx="minor">
+            <a:schemeClr val="lt1"/>
+          </a:fontRef>
+        </p:style>
+        <p:txBody>
+          <a:bodyPr rtlCol="0" anchor="ctr"/>
+          <a:lstStyle/>
+          <a:p>
+            <a:pPr algn="ctr"/>
+            <a:endParaRPr/>
+          </a:p>
+        </p:txBody>
+      </p:sp>
+      <p:sp>
+        <p:nvSpPr>
+          <p:cNvPr id="19" name="TextBox 18"/>
+          <p:cNvSpPr txBox="1"/>
+          <p:nvPr/>
+        </p:nvSpPr>
+        <p:spPr>
+          <a:xfrm>
+            <a:off x="731520" y="4818888"/>
+            <a:ext cx="2468880" cy="320040"/>
+          </a:xfrm>
+          <a:prstGeom prst="rect">
+            <a:avLst/>
+          </a:prstGeom>
+          <a:noFill/>
+        </p:spPr>
+        <p:txBody>
+          <a:bodyPr wrap="square" anchor="t">
+            <a:spAutoFit/>
+          </a:bodyPr>
+          <a:lstStyle/>
+          <a:p>
+            <a:pPr algn="ctr">
+              <a:defRPr sz="1200" b="1" i="0">
+                <a:solidFill>
+                  <a:srgbClr val="2E8B57"/>
+                </a:solidFill>
+              </a:defRPr>
+            </a:pPr>
+            <a:r>
+              <a:t>Champions</a:t>
+            </a:r>
+          </a:p>
+        </p:txBody>
+      </p:sp>
+      <p:sp>
+        <p:nvSpPr>
+          <p:cNvPr id="20" name="TextBox 19"/>
+          <p:cNvSpPr txBox="1"/>
+          <p:nvPr/>
+        </p:nvSpPr>
+        <p:spPr>
+          <a:xfrm>
+            <a:off x="731520" y="5212080"/>
+            <a:ext cx="2468880" cy="292608"/>
+          </a:xfrm>
+          <a:prstGeom prst="rect">
+            <a:avLst/>
+          </a:prstGeom>
+          <a:noFill/>
+        </p:spPr>
+        <p:txBody>
+          <a:bodyPr wrap="square" anchor="t">
+            <a:spAutoFit/>
+          </a:bodyPr>
+          <a:lstStyle/>
+          <a:p>
+            <a:pPr algn="ctr">
+              <a:defRPr sz="1100" b="1" i="0">
+                <a:solidFill>
+                  <a:srgbClr val="2D3238"/>
+                </a:solidFill>
+              </a:defRPr>
+            </a:pPr>
+            <a:r>
+              <a:t>1,243 customers</a:t>
+            </a:r>
+          </a:p>
+        </p:txBody>
+      </p:sp>
+      <p:sp>
+        <p:nvSpPr>
+          <p:cNvPr id="21" name="TextBox 20"/>
+          <p:cNvSpPr txBox="1"/>
+          <p:nvPr/>
+        </p:nvSpPr>
+        <p:spPr>
+          <a:xfrm>
+            <a:off x="758952" y="5577840"/>
+            <a:ext cx="2414016" cy="365759"/>
+          </a:xfrm>
+          <a:prstGeom prst="rect">
+            <a:avLst/>
+          </a:prstGeom>
+          <a:noFill/>
+        </p:spPr>
+        <p:txBody>
+          <a:bodyPr wrap="square" anchor="t">
+            <a:spAutoFit/>
+          </a:bodyPr>
+          <a:lstStyle/>
+          <a:p>
+            <a:pPr algn="ctr">
+              <a:defRPr sz="1000" b="0" i="0">
+                <a:solidFill>
+                  <a:srgbClr val="6E7681"/>
+                </a:solidFill>
+              </a:defRPr>
+            </a:pPr>
+            <a:r>
+              <a:t>Recency: 18 days</a:t>
+            </a:r>
+            <a:br/>
+            <a:r>
+              <a:t>Frequency: 10.0</a:t>
+            </a:r>
+            <a:br/>
+            <a:r>
+              <a:t>Monetary: £5,465</a:t>
+            </a:r>
+          </a:p>
+        </p:txBody>
+      </p:sp>
+      <p:sp>
+        <p:nvSpPr>
+          <p:cNvPr id="22" name="Rounded Rectangle 21"/>
+          <p:cNvSpPr/>
+          <p:nvPr/>
+        </p:nvSpPr>
+        <p:spPr>
+          <a:xfrm>
+            <a:off x="3474720" y="4709160"/>
+            <a:ext cx="2743200" cy="1453896"/>
+          </a:xfrm>
+          <a:prstGeom prst="roundRect">
+            <a:avLst/>
+          </a:prstGeom>
+          <a:solidFill>
+            <a:srgbClr val="E8F1FA"/>
+          </a:solidFill>
+          <a:ln w="13970">
+            <a:solidFill>
+              <a:srgbClr val="2E75B6"/>
+            </a:solidFill>
+          </a:ln>
+        </p:spPr>
+        <p:style>
+          <a:lnRef idx="1">
+            <a:schemeClr val="accent1"/>
+          </a:lnRef>
+          <a:fillRef idx="3">
+            <a:schemeClr val="accent1"/>
+          </a:fillRef>
+          <a:effectRef idx="2">
+            <a:schemeClr val="accent1"/>
+          </a:effectRef>
+          <a:fontRef idx="minor">
+            <a:schemeClr val="lt1"/>
+          </a:fontRef>
+        </p:style>
+        <p:txBody>
+          <a:bodyPr rtlCol="0" anchor="ctr"/>
+          <a:lstStyle/>
+          <a:p>
+            <a:pPr algn="ctr"/>
+            <a:endParaRPr/>
+          </a:p>
+        </p:txBody>
+      </p:sp>
+      <p:sp>
+        <p:nvSpPr>
+          <p:cNvPr id="23" name="TextBox 22"/>
+          <p:cNvSpPr txBox="1"/>
+          <p:nvPr/>
+        </p:nvSpPr>
+        <p:spPr>
+          <a:xfrm>
+            <a:off x="3611879" y="4818888"/>
+            <a:ext cx="2468880" cy="320040"/>
+          </a:xfrm>
+          <a:prstGeom prst="rect">
+            <a:avLst/>
+          </a:prstGeom>
+          <a:noFill/>
+        </p:spPr>
+        <p:txBody>
+          <a:bodyPr wrap="square" anchor="t">
+            <a:spAutoFit/>
+          </a:bodyPr>
+          <a:lstStyle/>
+          <a:p>
+            <a:pPr algn="ctr">
+              <a:defRPr sz="1200" b="1" i="0">
+                <a:solidFill>
+                  <a:srgbClr val="2E75B6"/>
+                </a:solidFill>
+              </a:defRPr>
+            </a:pPr>
+            <a:r>
+              <a:t>Loyal Customers</a:t>
+            </a:r>
+          </a:p>
+        </p:txBody>
+      </p:sp>
+      <p:sp>
+        <p:nvSpPr>
+          <p:cNvPr id="24" name="TextBox 23"/>
+          <p:cNvSpPr txBox="1"/>
+          <p:nvPr/>
+        </p:nvSpPr>
+        <p:spPr>
+          <a:xfrm>
+            <a:off x="3611879" y="5212080"/>
+            <a:ext cx="2468880" cy="292608"/>
+          </a:xfrm>
+          <a:prstGeom prst="rect">
+            <a:avLst/>
+          </a:prstGeom>
+          <a:noFill/>
+        </p:spPr>
+        <p:txBody>
+          <a:bodyPr wrap="square" anchor="t">
+            <a:spAutoFit/>
+          </a:bodyPr>
+          <a:lstStyle/>
+          <a:p>
+            <a:pPr algn="ctr">
+              <a:defRPr sz="1100" b="1" i="0">
+                <a:solidFill>
+                  <a:srgbClr val="2D3238"/>
+                </a:solidFill>
+              </a:defRPr>
+            </a:pPr>
+            <a:r>
+              <a:t>1,022 customers</a:t>
+            </a:r>
+          </a:p>
+        </p:txBody>
+      </p:sp>
+      <p:sp>
+        <p:nvSpPr>
+          <p:cNvPr id="25" name="TextBox 24"/>
+          <p:cNvSpPr txBox="1"/>
+          <p:nvPr/>
+        </p:nvSpPr>
+        <p:spPr>
+          <a:xfrm>
+            <a:off x="3639312" y="5577840"/>
+            <a:ext cx="2414016" cy="365759"/>
+          </a:xfrm>
+          <a:prstGeom prst="rect">
+            <a:avLst/>
+          </a:prstGeom>
+          <a:noFill/>
+        </p:spPr>
+        <p:txBody>
+          <a:bodyPr wrap="square" anchor="t">
+            <a:spAutoFit/>
+          </a:bodyPr>
+          <a:lstStyle/>
+          <a:p>
+            <a:pPr algn="ctr">
+              <a:defRPr sz="1000" b="0" i="0">
+                <a:solidFill>
+                  <a:srgbClr val="6E7681"/>
+                </a:solidFill>
+              </a:defRPr>
+            </a:pPr>
+            <a:r>
+              <a:t>Recency: 55 days</a:t>
+            </a:r>
+            <a:br/>
+            <a:r>
+              <a:t>Frequency: 3.2</a:t>
+            </a:r>
+            <a:br/>
+            <a:r>
+              <a:t>Monetary: £1,176</a:t>
+            </a:r>
+          </a:p>
+        </p:txBody>
+      </p:sp>
+      <p:sp>
+        <p:nvSpPr>
+          <p:cNvPr id="26" name="Rounded Rectangle 25"/>
+          <p:cNvSpPr/>
+          <p:nvPr/>
+        </p:nvSpPr>
+        <p:spPr>
+          <a:xfrm>
+            <a:off x="6355080" y="4709160"/>
+            <a:ext cx="2743200" cy="1453896"/>
+          </a:xfrm>
+          <a:prstGeom prst="roundRect">
+            <a:avLst/>
+          </a:prstGeom>
+          <a:solidFill>
+            <a:srgbClr val="FCF2E6"/>
+          </a:solidFill>
+          <a:ln w="13970">
+            <a:solidFill>
+              <a:srgbClr val="E67E22"/>
+            </a:solidFill>
+          </a:ln>
+        </p:spPr>
+        <p:style>
+          <a:lnRef idx="1">
+            <a:schemeClr val="accent1"/>
+          </a:lnRef>
+          <a:fillRef idx="3">
+            <a:schemeClr val="accent1"/>
+          </a:fillRef>
+          <a:effectRef idx="2">
+            <a:schemeClr val="accent1"/>
+          </a:effectRef>
+          <a:fontRef idx="minor">
+            <a:schemeClr val="lt1"/>
+          </a:fontRef>
+        </p:style>
+        <p:txBody>
+          <a:bodyPr rtlCol="0" anchor="ctr"/>
+          <a:lstStyle/>
+          <a:p>
+            <a:pPr algn="ctr"/>
+            <a:endParaRPr/>
+          </a:p>
+        </p:txBody>
+      </p:sp>
+      <p:sp>
+        <p:nvSpPr>
+          <p:cNvPr id="27" name="TextBox 26"/>
+          <p:cNvSpPr txBox="1"/>
+          <p:nvPr/>
+        </p:nvSpPr>
+        <p:spPr>
+          <a:xfrm>
+            <a:off x="6492240" y="4818888"/>
+            <a:ext cx="2468880" cy="320040"/>
+          </a:xfrm>
+          <a:prstGeom prst="rect">
+            <a:avLst/>
+          </a:prstGeom>
+          <a:noFill/>
+        </p:spPr>
+        <p:txBody>
+          <a:bodyPr wrap="square" anchor="t">
+            <a:spAutoFit/>
+          </a:bodyPr>
+          <a:lstStyle/>
+          <a:p>
+            <a:pPr algn="ctr">
+              <a:defRPr sz="1200" b="1" i="0">
+                <a:solidFill>
+                  <a:srgbClr val="E67E22"/>
+                </a:solidFill>
+              </a:defRPr>
+            </a:pPr>
+            <a:r>
+              <a:t>Potential Loyalists / At Risk</a:t>
+            </a:r>
+          </a:p>
+        </p:txBody>
+      </p:sp>
+      <p:sp>
+        <p:nvSpPr>
+          <p:cNvPr id="28" name="TextBox 27"/>
+          <p:cNvSpPr txBox="1"/>
+          <p:nvPr/>
+        </p:nvSpPr>
+        <p:spPr>
+          <a:xfrm>
+            <a:off x="6492240" y="5212080"/>
+            <a:ext cx="2468880" cy="292608"/>
+          </a:xfrm>
+          <a:prstGeom prst="rect">
+            <a:avLst/>
+          </a:prstGeom>
+          <a:noFill/>
+        </p:spPr>
+        <p:txBody>
+          <a:bodyPr wrap="square" anchor="t">
+            <a:spAutoFit/>
+          </a:bodyPr>
+          <a:lstStyle/>
+          <a:p>
+            <a:pPr algn="ctr">
+              <a:defRPr sz="1100" b="1" i="0">
+                <a:solidFill>
+                  <a:srgbClr val="2D3238"/>
+                </a:solidFill>
+              </a:defRPr>
+            </a:pPr>
+            <a:r>
+              <a:t>1,188 customers</a:t>
+            </a:r>
+          </a:p>
+        </p:txBody>
+      </p:sp>
+      <p:sp>
+        <p:nvSpPr>
+          <p:cNvPr id="29" name="TextBox 28"/>
+          <p:cNvSpPr txBox="1"/>
+          <p:nvPr/>
+        </p:nvSpPr>
+        <p:spPr>
+          <a:xfrm>
+            <a:off x="6519672" y="5577840"/>
+            <a:ext cx="2414016" cy="365759"/>
+          </a:xfrm>
+          <a:prstGeom prst="rect">
+            <a:avLst/>
+          </a:prstGeom>
+          <a:noFill/>
+        </p:spPr>
+        <p:txBody>
+          <a:bodyPr wrap="square" anchor="t">
+            <a:spAutoFit/>
+          </a:bodyPr>
+          <a:lstStyle/>
+          <a:p>
+            <a:pPr algn="ctr">
+              <a:defRPr sz="1000" b="0" i="0">
+                <a:solidFill>
+                  <a:srgbClr val="6E7681"/>
+                </a:solidFill>
+              </a:defRPr>
+            </a:pPr>
+            <a:r>
+              <a:t>Recency: 102 days</a:t>
+            </a:r>
+            <a:br/>
+            <a:r>
+              <a:t>Frequency: 1.6</a:t>
+            </a:r>
+            <a:br/>
+            <a:r>
+              <a:t>Monetary: £580</a:t>
+            </a:r>
+          </a:p>
+        </p:txBody>
+      </p:sp>
+      <p:sp>
+        <p:nvSpPr>
+          <p:cNvPr id="30" name="Rounded Rectangle 29"/>
+          <p:cNvSpPr/>
+          <p:nvPr/>
+        </p:nvSpPr>
+        <p:spPr>
+          <a:xfrm>
+            <a:off x="9235440" y="4709160"/>
+            <a:ext cx="2331720" cy="1453896"/>
+          </a:xfrm>
+          <a:prstGeom prst="roundRect">
+            <a:avLst/>
+          </a:prstGeom>
+          <a:solidFill>
+            <a:srgbClr val="FAEDEB"/>
+          </a:solidFill>
+          <a:ln w="13970">
+            <a:solidFill>
+              <a:srgbClr val="C0392B"/>
+            </a:solidFill>
+          </a:ln>
+        </p:spPr>
+        <p:style>
+          <a:lnRef idx="1">
+            <a:schemeClr val="accent1"/>
+          </a:lnRef>
+          <a:fillRef idx="3">
+            <a:schemeClr val="accent1"/>
+          </a:fillRef>
+          <a:effectRef idx="2">
+            <a:schemeClr val="accent1"/>
+          </a:effectRef>
+          <a:fontRef idx="minor">
+            <a:schemeClr val="lt1"/>
+          </a:fontRef>
+        </p:style>
+        <p:txBody>
+          <a:bodyPr rtlCol="0" anchor="ctr"/>
+          <a:lstStyle/>
+          <a:p>
+            <a:pPr algn="ctr"/>
+            <a:endParaRPr/>
+          </a:p>
+        </p:txBody>
+      </p:sp>
+      <p:sp>
+        <p:nvSpPr>
+          <p:cNvPr id="31" name="TextBox 30"/>
+          <p:cNvSpPr txBox="1"/>
+          <p:nvPr/>
+        </p:nvSpPr>
+        <p:spPr>
+          <a:xfrm>
+            <a:off x="9372600" y="4818888"/>
+            <a:ext cx="2057400" cy="320040"/>
+          </a:xfrm>
+          <a:prstGeom prst="rect">
+            <a:avLst/>
+          </a:prstGeom>
+          <a:noFill/>
+        </p:spPr>
+        <p:txBody>
+          <a:bodyPr wrap="square" anchor="t">
+            <a:spAutoFit/>
+          </a:bodyPr>
+          <a:lstStyle/>
+          <a:p>
+            <a:pPr algn="ctr">
+              <a:defRPr sz="1200" b="1" i="0">
+                <a:solidFill>
+                  <a:srgbClr val="C0392B"/>
+                </a:solidFill>
+              </a:defRPr>
+            </a:pPr>
+            <a:r>
+              <a:t>Lost / Hibernating</a:t>
+            </a:r>
+          </a:p>
+        </p:txBody>
+      </p:sp>
+      <p:sp>
+        <p:nvSpPr>
+          <p:cNvPr id="32" name="TextBox 31"/>
+          <p:cNvSpPr txBox="1"/>
+          <p:nvPr/>
+        </p:nvSpPr>
+        <p:spPr>
+          <a:xfrm>
+            <a:off x="9372600" y="5212080"/>
+            <a:ext cx="2057400" cy="292608"/>
+          </a:xfrm>
+          <a:prstGeom prst="rect">
+            <a:avLst/>
+          </a:prstGeom>
+          <a:noFill/>
+        </p:spPr>
+        <p:txBody>
+          <a:bodyPr wrap="square" anchor="t">
+            <a:spAutoFit/>
+          </a:bodyPr>
+          <a:lstStyle/>
+          <a:p>
+            <a:pPr algn="ctr">
+              <a:defRPr sz="1100" b="1" i="0">
+                <a:solidFill>
+                  <a:srgbClr val="2D3238"/>
+                </a:solidFill>
+              </a:defRPr>
+            </a:pPr>
+            <a:r>
+              <a:t>885 customers</a:t>
+            </a:r>
+          </a:p>
+        </p:txBody>
+      </p:sp>
+      <p:sp>
+        <p:nvSpPr>
+          <p:cNvPr id="33" name="TextBox 32"/>
+          <p:cNvSpPr txBox="1"/>
+          <p:nvPr/>
+        </p:nvSpPr>
+        <p:spPr>
+          <a:xfrm>
+            <a:off x="9400032" y="5577840"/>
+            <a:ext cx="2002536" cy="365759"/>
+          </a:xfrm>
+          <a:prstGeom prst="rect">
+            <a:avLst/>
+          </a:prstGeom>
+          <a:noFill/>
+        </p:spPr>
+        <p:txBody>
+          <a:bodyPr wrap="square" anchor="t">
+            <a:spAutoFit/>
+          </a:bodyPr>
+          <a:lstStyle/>
+          <a:p>
+            <a:pPr algn="ctr">
+              <a:defRPr sz="1000" b="0" i="0">
+                <a:solidFill>
+                  <a:srgbClr val="6E7681"/>
+                </a:solidFill>
+              </a:defRPr>
+            </a:pPr>
+            <a:r>
+              <a:t>Recency: 223 days</a:t>
+            </a:r>
+            <a:br/>
+            <a:r>
+              <a:t>Frequency: 1.1</a:t>
+            </a:r>
+            <a:br/>
+            <a:r>
+              <a:t>Monetary: £228</a:t>
+            </a:r>
+          </a:p>
+        </p:txBody>
+      </p:sp>
+      <p:sp>
+        <p:nvSpPr>
+          <p:cNvPr id="34" name="TextBox 33"/>
+          <p:cNvSpPr txBox="1"/>
+          <p:nvPr/>
+        </p:nvSpPr>
+        <p:spPr>
+          <a:xfrm>
+            <a:off x="502920" y="6446520"/>
+            <a:ext cx="11155680" cy="228600"/>
+          </a:xfrm>
+          <a:prstGeom prst="rect">
+            <a:avLst/>
+          </a:prstGeom>
+          <a:noFill/>
+        </p:spPr>
+        <p:txBody>
+          <a:bodyPr wrap="none">
+            <a:spAutoFit/>
+          </a:bodyPr>
+          <a:lstStyle/>
+          <a:p>
+            <a:pPr algn="ctr">
+              <a:defRPr sz="850">
+                <a:solidFill>
+                  <a:srgbClr val="6E7681"/>
                 </a:solidFill>
               </a:defRPr>
             </a:pPr>
@@ -4948,6 +7996,14 @@
 <file path=ppt/slides/slide6.xml><?xml version="1.0" encoding="utf-8"?>
 <p:sld xmlns:a="http://schemas.openxmlformats.org/drawingml/2006/main" xmlns:r="http://schemas.openxmlformats.org/officeDocument/2006/relationships" xmlns:p="http://schemas.openxmlformats.org/presentationml/2006/main">
   <p:cSld>
+    <p:bg>
+      <p:bgPr>
+        <a:solidFill>
+          <a:srgbClr val="FFFFFF"/>
+        </a:solidFill>
+        <a:effectLst/>
+      </p:bgPr>
+    </p:bg>
     <p:spTree>
       <p:nvGrpSpPr>
         <p:cNvPr id="1" name=""/>
@@ -4971,7 +8027,7 @@
         <p:spPr>
           <a:xfrm>
             <a:off x="0" y="0"/>
-            <a:ext cx="12191695" cy="1097280"/>
+            <a:ext cx="12191695" cy="987552"/>
           </a:xfrm>
           <a:prstGeom prst="rect">
             <a:avLst/>
@@ -5014,8 +8070,8 @@
         </p:nvSpPr>
         <p:spPr>
           <a:xfrm>
-            <a:off x="548640" y="137160"/>
-            <a:ext cx="10972800" cy="822960"/>
+            <a:off x="502920" y="109728"/>
+            <a:ext cx="11064240" cy="594360"/>
           </a:xfrm>
           <a:prstGeom prst="rect">
             <a:avLst/>
@@ -5029,14 +8085,14 @@
           <a:lstStyle/>
           <a:p>
             <a:pPr>
-              <a:defRPr sz="3200" b="1">
+              <a:defRPr sz="2700" b="1">
                 <a:solidFill>
                   <a:srgbClr val="FFFFFF"/>
                 </a:solidFill>
               </a:defRPr>
             </a:pPr>
             <a:r>
-              <a:t>Key Finding 3: Geographic Concentration Risk</a:t>
+              <a:t>Key Finding 3 — Geographic Concentration</a:t>
             </a:r>
           </a:p>
         </p:txBody>
@@ -5049,8 +8105,8 @@
         </p:nvSpPr>
         <p:spPr>
           <a:xfrm>
-            <a:off x="548640" y="1143000"/>
-            <a:ext cx="10972800" cy="457200"/>
+            <a:off x="530352" y="1069848"/>
+            <a:ext cx="10972800" cy="411480"/>
           </a:xfrm>
           <a:prstGeom prst="rect">
             <a:avLst/>
@@ -5064,134 +8120,21 @@
           <a:lstStyle/>
           <a:p>
             <a:pPr>
-              <a:defRPr sz="1600" i="1">
+              <a:defRPr sz="1300">
                 <a:solidFill>
                   <a:srgbClr val="2E75B6"/>
                 </a:solidFill>
               </a:defRPr>
             </a:pPr>
             <a:r>
-              <a:t>Dual Concentration Crisis — UK Dependency</a:t>
-            </a:r>
-          </a:p>
-        </p:txBody>
-      </p:sp>
-      <p:sp>
-        <p:nvSpPr>
-          <p:cNvPr id="5" name="TextBox 4"/>
-          <p:cNvSpPr txBox="1"/>
-          <p:nvPr/>
-        </p:nvSpPr>
-        <p:spPr>
-          <a:xfrm>
-            <a:off x="548640" y="1737360"/>
-            <a:ext cx="5943600" cy="4572000"/>
-          </a:xfrm>
-          <a:prstGeom prst="rect">
-            <a:avLst/>
-          </a:prstGeom>
-          <a:noFill/>
-        </p:spPr>
-        <p:txBody>
-          <a:bodyPr wrap="square">
-            <a:spAutoFit/>
-          </a:bodyPr>
-          <a:lstStyle/>
-          <a:p>
-            <a:pPr>
-              <a:spcAft>
-                <a:spcPts val="1200"/>
-              </a:spcAft>
-              <a:defRPr sz="1600">
-                <a:solidFill>
-                  <a:srgbClr val="333333"/>
-                </a:solidFill>
-              </a:defRPr>
-            </a:pPr>
-            <a:r>
-              <a:t>🇬🇧 United Kingdom: 84.6% of total revenue (£9M) AND 90% of Champions (1,119 out of 1,243) — a dual concentration crisis.</a:t>
-            </a:r>
-          </a:p>
-          <a:p>
-            <a:pPr>
-              <a:spcAft>
-                <a:spcPts val="1200"/>
-              </a:spcAft>
-              <a:defRPr sz="1600">
-                <a:solidFill>
-                  <a:srgbClr val="333333"/>
-                </a:solidFill>
-              </a:defRPr>
-            </a:pPr>
-            <a:r>
-              <a:t>🇮🇪 EIRE (Ireland): Only 4 customers generate £283K — average £70,785 per customer (highest per-customer value).</a:t>
-            </a:r>
-          </a:p>
-          <a:p>
-            <a:pPr>
-              <a:spcAft>
-                <a:spcPts val="1200"/>
-              </a:spcAft>
-              <a:defRPr sz="1600">
-                <a:solidFill>
-                  <a:srgbClr val="333333"/>
-                </a:solidFill>
-              </a:defRPr>
-            </a:pPr>
-            <a:r>
-              <a:t>🇱 Netherlands: 9 customers generate £285K — average £31,716 per customer.</a:t>
-            </a:r>
-          </a:p>
-          <a:p>
-            <a:pPr>
-              <a:spcAft>
-                <a:spcPts val="1200"/>
-              </a:spcAft>
-              <a:defRPr sz="1600">
-                <a:solidFill>
-                  <a:srgbClr val="333333"/>
-                </a:solidFill>
-              </a:defRPr>
-            </a:pPr>
-            <a:r>
-              <a:t>🇦 Australia: Highest AOV (£2,429) with only 9 customers — premium niche market.</a:t>
-            </a:r>
-          </a:p>
-          <a:p>
-            <a:pPr>
-              <a:spcAft>
-                <a:spcPts val="1200"/>
-              </a:spcAft>
-              <a:defRPr sz="1600">
-                <a:solidFill>
-                  <a:srgbClr val="333333"/>
-                </a:solidFill>
-              </a:defRPr>
-            </a:pPr>
-            <a:r>
-              <a:t>🇫🇷 France &amp; 🇪 Germany: 35 and 33 Champions respectively — early traction for international expansion.</a:t>
-            </a:r>
-          </a:p>
-          <a:p>
-            <a:pPr>
-              <a:spcAft>
-                <a:spcPts val="1200"/>
-              </a:spcAft>
-              <a:defRPr sz="1600">
-                <a:solidFill>
-                  <a:srgbClr val="333333"/>
-                </a:solidFill>
-              </a:defRPr>
-            </a:pPr>
-            <a:r>
-              <a:t>⚠️ Risk: Any UK disruption (Brexit, recession) would simultaneously impact revenue volume AND customer quality.</a:t>
+              <a:t>The United Kingdom dominates both revenue and the Champion customer base</a:t>
             </a:r>
           </a:p>
         </p:txBody>
       </p:sp>
       <p:pic>
         <p:nvPicPr>
-          <p:cNvPr id="6" name="Picture 5" descr="top_10_countries_revenue.png"/>
+          <p:cNvPr id="5" name="Picture 4" descr="09_top_10_countries_revenue.png"/>
           <p:cNvPicPr>
             <a:picLocks noChangeAspect="1"/>
           </p:cNvPicPr>
@@ -5205,17 +8148,522 @@
         </p:blipFill>
         <p:spPr>
           <a:xfrm>
-            <a:off x="6675120" y="1737360"/>
-            <a:ext cx="5029200" cy="2286000"/>
+            <a:off x="502920" y="1417320"/>
+            <a:ext cx="5486400" cy="3429000"/>
           </a:xfrm>
           <a:prstGeom prst="rect">
             <a:avLst/>
           </a:prstGeom>
         </p:spPr>
       </p:pic>
+      <p:sp>
+        <p:nvSpPr>
+          <p:cNvPr id="7" name="Rounded Rectangle 6"/>
+          <p:cNvSpPr/>
+          <p:nvPr/>
+        </p:nvSpPr>
+        <p:spPr>
+          <a:xfrm>
+            <a:off x="731520" y="5074920"/>
+            <a:ext cx="3154680" cy="960120"/>
+          </a:xfrm>
+          <a:prstGeom prst="roundRect">
+            <a:avLst/>
+          </a:prstGeom>
+          <a:solidFill>
+            <a:srgbClr val="FAEDEB"/>
+          </a:solidFill>
+          <a:ln w="16510">
+            <a:solidFill>
+              <a:srgbClr val="C0392B"/>
+            </a:solidFill>
+          </a:ln>
+        </p:spPr>
+        <p:style>
+          <a:lnRef idx="1">
+            <a:schemeClr val="accent1"/>
+          </a:lnRef>
+          <a:fillRef idx="3">
+            <a:schemeClr val="accent1"/>
+          </a:fillRef>
+          <a:effectRef idx="2">
+            <a:schemeClr val="accent1"/>
+          </a:effectRef>
+          <a:fontRef idx="minor">
+            <a:schemeClr val="lt1"/>
+          </a:fontRef>
+        </p:style>
+        <p:txBody>
+          <a:bodyPr rtlCol="0" anchor="ctr"/>
+          <a:lstStyle/>
+          <a:p>
+            <a:pPr algn="ctr"/>
+            <a:endParaRPr/>
+          </a:p>
+        </p:txBody>
+      </p:sp>
+      <p:sp>
+        <p:nvSpPr>
+          <p:cNvPr id="8" name="TextBox 7"/>
+          <p:cNvSpPr txBox="1"/>
+          <p:nvPr/>
+        </p:nvSpPr>
+        <p:spPr>
+          <a:xfrm>
+            <a:off x="896112" y="5221224"/>
+            <a:ext cx="2825496" cy="502920"/>
+          </a:xfrm>
+          <a:prstGeom prst="rect">
+            <a:avLst/>
+          </a:prstGeom>
+          <a:noFill/>
+        </p:spPr>
+        <p:txBody>
+          <a:bodyPr wrap="none">
+            <a:spAutoFit/>
+          </a:bodyPr>
+          <a:lstStyle/>
+          <a:p>
+            <a:pPr algn="ctr">
+              <a:defRPr sz="2300" b="1">
+                <a:solidFill>
+                  <a:srgbClr val="C0392B"/>
+                </a:solidFill>
+              </a:defRPr>
+            </a:pPr>
+            <a:r>
+              <a:t>84.59%</a:t>
+            </a:r>
+          </a:p>
+        </p:txBody>
+      </p:sp>
+      <p:sp>
+        <p:nvSpPr>
+          <p:cNvPr id="9" name="TextBox 8"/>
+          <p:cNvSpPr txBox="1"/>
+          <p:nvPr/>
+        </p:nvSpPr>
+        <p:spPr>
+          <a:xfrm>
+            <a:off x="877824" y="5788152"/>
+            <a:ext cx="2862072" cy="137160"/>
+          </a:xfrm>
+          <a:prstGeom prst="rect">
+            <a:avLst/>
+          </a:prstGeom>
+          <a:noFill/>
+        </p:spPr>
+        <p:txBody>
+          <a:bodyPr wrap="square">
+            <a:spAutoFit/>
+          </a:bodyPr>
+          <a:lstStyle/>
+          <a:p>
+            <a:pPr algn="ctr">
+              <a:defRPr sz="1050">
+                <a:solidFill>
+                  <a:srgbClr val="2D3238"/>
+                </a:solidFill>
+              </a:defRPr>
+            </a:pPr>
+            <a:r>
+              <a:t>United Kingdom revenue share</a:t>
+            </a:r>
+          </a:p>
+        </p:txBody>
+      </p:sp>
+      <p:sp>
+        <p:nvSpPr>
+          <p:cNvPr id="10" name="Rounded Rectangle 9"/>
+          <p:cNvSpPr/>
+          <p:nvPr/>
+        </p:nvSpPr>
+        <p:spPr>
+          <a:xfrm>
+            <a:off x="4069080" y="5074920"/>
+            <a:ext cx="3154680" cy="960120"/>
+          </a:xfrm>
+          <a:prstGeom prst="roundRect">
+            <a:avLst/>
+          </a:prstGeom>
+          <a:solidFill>
+            <a:srgbClr val="FAEDEB"/>
+          </a:solidFill>
+          <a:ln w="16510">
+            <a:solidFill>
+              <a:srgbClr val="C0392B"/>
+            </a:solidFill>
+          </a:ln>
+        </p:spPr>
+        <p:style>
+          <a:lnRef idx="1">
+            <a:schemeClr val="accent1"/>
+          </a:lnRef>
+          <a:fillRef idx="3">
+            <a:schemeClr val="accent1"/>
+          </a:fillRef>
+          <a:effectRef idx="2">
+            <a:schemeClr val="accent1"/>
+          </a:effectRef>
+          <a:fontRef idx="minor">
+            <a:schemeClr val="lt1"/>
+          </a:fontRef>
+        </p:style>
+        <p:txBody>
+          <a:bodyPr rtlCol="0" anchor="ctr"/>
+          <a:lstStyle/>
+          <a:p>
+            <a:pPr algn="ctr"/>
+            <a:endParaRPr/>
+          </a:p>
+        </p:txBody>
+      </p:sp>
+      <p:sp>
+        <p:nvSpPr>
+          <p:cNvPr id="11" name="TextBox 10"/>
+          <p:cNvSpPr txBox="1"/>
+          <p:nvPr/>
+        </p:nvSpPr>
+        <p:spPr>
+          <a:xfrm>
+            <a:off x="4233672" y="5221224"/>
+            <a:ext cx="2825496" cy="502920"/>
+          </a:xfrm>
+          <a:prstGeom prst="rect">
+            <a:avLst/>
+          </a:prstGeom>
+          <a:noFill/>
+        </p:spPr>
+        <p:txBody>
+          <a:bodyPr wrap="none">
+            <a:spAutoFit/>
+          </a:bodyPr>
+          <a:lstStyle/>
+          <a:p>
+            <a:pPr algn="ctr">
+              <a:defRPr sz="2300" b="1">
+                <a:solidFill>
+                  <a:srgbClr val="C0392B"/>
+                </a:solidFill>
+              </a:defRPr>
+            </a:pPr>
+            <a:r>
+              <a:t>1,119</a:t>
+            </a:r>
+          </a:p>
+        </p:txBody>
+      </p:sp>
+      <p:sp>
+        <p:nvSpPr>
+          <p:cNvPr id="12" name="TextBox 11"/>
+          <p:cNvSpPr txBox="1"/>
+          <p:nvPr/>
+        </p:nvSpPr>
+        <p:spPr>
+          <a:xfrm>
+            <a:off x="4215384" y="5788152"/>
+            <a:ext cx="2862072" cy="137160"/>
+          </a:xfrm>
+          <a:prstGeom prst="rect">
+            <a:avLst/>
+          </a:prstGeom>
+          <a:noFill/>
+        </p:spPr>
+        <p:txBody>
+          <a:bodyPr wrap="square">
+            <a:spAutoFit/>
+          </a:bodyPr>
+          <a:lstStyle/>
+          <a:p>
+            <a:pPr algn="ctr">
+              <a:defRPr sz="1050">
+                <a:solidFill>
+                  <a:srgbClr val="2D3238"/>
+                </a:solidFill>
+              </a:defRPr>
+            </a:pPr>
+            <a:r>
+              <a:t>UK Champions</a:t>
+            </a:r>
+          </a:p>
+        </p:txBody>
+      </p:sp>
+      <p:sp>
+        <p:nvSpPr>
+          <p:cNvPr id="13" name="Rounded Rectangle 12"/>
+          <p:cNvSpPr/>
+          <p:nvPr/>
+        </p:nvSpPr>
+        <p:spPr>
+          <a:xfrm>
+            <a:off x="7406640" y="5074920"/>
+            <a:ext cx="1965960" cy="960120"/>
+          </a:xfrm>
+          <a:prstGeom prst="roundRect">
+            <a:avLst/>
+          </a:prstGeom>
+          <a:solidFill>
+            <a:srgbClr val="E8F1FA"/>
+          </a:solidFill>
+          <a:ln w="16510">
+            <a:solidFill>
+              <a:srgbClr val="2E75B6"/>
+            </a:solidFill>
+          </a:ln>
+        </p:spPr>
+        <p:style>
+          <a:lnRef idx="1">
+            <a:schemeClr val="accent1"/>
+          </a:lnRef>
+          <a:fillRef idx="3">
+            <a:schemeClr val="accent1"/>
+          </a:fillRef>
+          <a:effectRef idx="2">
+            <a:schemeClr val="accent1"/>
+          </a:effectRef>
+          <a:fontRef idx="minor">
+            <a:schemeClr val="lt1"/>
+          </a:fontRef>
+        </p:style>
+        <p:txBody>
+          <a:bodyPr rtlCol="0" anchor="ctr"/>
+          <a:lstStyle/>
+          <a:p>
+            <a:pPr algn="ctr"/>
+            <a:endParaRPr/>
+          </a:p>
+        </p:txBody>
+      </p:sp>
+      <p:sp>
+        <p:nvSpPr>
+          <p:cNvPr id="14" name="TextBox 13"/>
+          <p:cNvSpPr txBox="1"/>
+          <p:nvPr/>
+        </p:nvSpPr>
+        <p:spPr>
+          <a:xfrm>
+            <a:off x="7571231" y="5221224"/>
+            <a:ext cx="1636776" cy="502920"/>
+          </a:xfrm>
+          <a:prstGeom prst="rect">
+            <a:avLst/>
+          </a:prstGeom>
+          <a:noFill/>
+        </p:spPr>
+        <p:txBody>
+          <a:bodyPr wrap="none">
+            <a:spAutoFit/>
+          </a:bodyPr>
+          <a:lstStyle/>
+          <a:p>
+            <a:pPr algn="ctr">
+              <a:defRPr sz="2300" b="1">
+                <a:solidFill>
+                  <a:srgbClr val="2E75B6"/>
+                </a:solidFill>
+              </a:defRPr>
+            </a:pPr>
+            <a:r>
+              <a:t>35</a:t>
+            </a:r>
+          </a:p>
+        </p:txBody>
+      </p:sp>
+      <p:sp>
+        <p:nvSpPr>
+          <p:cNvPr id="15" name="TextBox 14"/>
+          <p:cNvSpPr txBox="1"/>
+          <p:nvPr/>
+        </p:nvSpPr>
+        <p:spPr>
+          <a:xfrm>
+            <a:off x="7552944" y="5788152"/>
+            <a:ext cx="1673351" cy="137160"/>
+          </a:xfrm>
+          <a:prstGeom prst="rect">
+            <a:avLst/>
+          </a:prstGeom>
+          <a:noFill/>
+        </p:spPr>
+        <p:txBody>
+          <a:bodyPr wrap="square">
+            <a:spAutoFit/>
+          </a:bodyPr>
+          <a:lstStyle/>
+          <a:p>
+            <a:pPr algn="ctr">
+              <a:defRPr sz="1050">
+                <a:solidFill>
+                  <a:srgbClr val="2D3238"/>
+                </a:solidFill>
+              </a:defRPr>
+            </a:pPr>
+            <a:r>
+              <a:t>France Champions</a:t>
+            </a:r>
+          </a:p>
+        </p:txBody>
+      </p:sp>
+      <p:sp>
+        <p:nvSpPr>
+          <p:cNvPr id="16" name="Rounded Rectangle 15"/>
+          <p:cNvSpPr/>
+          <p:nvPr/>
+        </p:nvSpPr>
+        <p:spPr>
+          <a:xfrm>
+            <a:off x="9555480" y="5074920"/>
+            <a:ext cx="1965960" cy="960120"/>
+          </a:xfrm>
+          <a:prstGeom prst="roundRect">
+            <a:avLst/>
+          </a:prstGeom>
+          <a:solidFill>
+            <a:srgbClr val="E8F1FA"/>
+          </a:solidFill>
+          <a:ln w="16510">
+            <a:solidFill>
+              <a:srgbClr val="2E75B6"/>
+            </a:solidFill>
+          </a:ln>
+        </p:spPr>
+        <p:style>
+          <a:lnRef idx="1">
+            <a:schemeClr val="accent1"/>
+          </a:lnRef>
+          <a:fillRef idx="3">
+            <a:schemeClr val="accent1"/>
+          </a:fillRef>
+          <a:effectRef idx="2">
+            <a:schemeClr val="accent1"/>
+          </a:effectRef>
+          <a:fontRef idx="minor">
+            <a:schemeClr val="lt1"/>
+          </a:fontRef>
+        </p:style>
+        <p:txBody>
+          <a:bodyPr rtlCol="0" anchor="ctr"/>
+          <a:lstStyle/>
+          <a:p>
+            <a:pPr algn="ctr"/>
+            <a:endParaRPr/>
+          </a:p>
+        </p:txBody>
+      </p:sp>
+      <p:sp>
+        <p:nvSpPr>
+          <p:cNvPr id="17" name="TextBox 16"/>
+          <p:cNvSpPr txBox="1"/>
+          <p:nvPr/>
+        </p:nvSpPr>
+        <p:spPr>
+          <a:xfrm>
+            <a:off x="9720072" y="5221224"/>
+            <a:ext cx="1636776" cy="502920"/>
+          </a:xfrm>
+          <a:prstGeom prst="rect">
+            <a:avLst/>
+          </a:prstGeom>
+          <a:noFill/>
+        </p:spPr>
+        <p:txBody>
+          <a:bodyPr wrap="none">
+            <a:spAutoFit/>
+          </a:bodyPr>
+          <a:lstStyle/>
+          <a:p>
+            <a:pPr algn="ctr">
+              <a:defRPr sz="2300" b="1">
+                <a:solidFill>
+                  <a:srgbClr val="2E75B6"/>
+                </a:solidFill>
+              </a:defRPr>
+            </a:pPr>
+            <a:r>
+              <a:t>33</a:t>
+            </a:r>
+          </a:p>
+        </p:txBody>
+      </p:sp>
+      <p:sp>
+        <p:nvSpPr>
+          <p:cNvPr id="18" name="TextBox 17"/>
+          <p:cNvSpPr txBox="1"/>
+          <p:nvPr/>
+        </p:nvSpPr>
+        <p:spPr>
+          <a:xfrm>
+            <a:off x="9701784" y="5788152"/>
+            <a:ext cx="1673351" cy="137160"/>
+          </a:xfrm>
+          <a:prstGeom prst="rect">
+            <a:avLst/>
+          </a:prstGeom>
+          <a:noFill/>
+        </p:spPr>
+        <p:txBody>
+          <a:bodyPr wrap="square">
+            <a:spAutoFit/>
+          </a:bodyPr>
+          <a:lstStyle/>
+          <a:p>
+            <a:pPr algn="ctr">
+              <a:defRPr sz="1050">
+                <a:solidFill>
+                  <a:srgbClr val="2D3238"/>
+                </a:solidFill>
+              </a:defRPr>
+            </a:pPr>
+            <a:r>
+              <a:t>Germany Champions</a:t>
+            </a:r>
+          </a:p>
+        </p:txBody>
+      </p:sp>
+      <p:sp>
+        <p:nvSpPr>
+          <p:cNvPr id="19" name="TextBox 18"/>
+          <p:cNvSpPr txBox="1"/>
+          <p:nvPr/>
+        </p:nvSpPr>
+        <p:spPr>
+          <a:xfrm>
+            <a:off x="502920" y="6446520"/>
+            <a:ext cx="11155680" cy="228600"/>
+          </a:xfrm>
+          <a:prstGeom prst="rect">
+            <a:avLst/>
+          </a:prstGeom>
+          <a:noFill/>
+        </p:spPr>
+        <p:txBody>
+          <a:bodyPr wrap="none">
+            <a:spAutoFit/>
+          </a:bodyPr>
+          <a:lstStyle/>
+          <a:p>
+            <a:pPr algn="ctr">
+              <a:defRPr sz="850">
+                <a:solidFill>
+                  <a:srgbClr val="6E7681"/>
+                </a:solidFill>
+              </a:defRPr>
+            </a:pPr>
+            <a:r>
+              <a:t>UCI Online Retail Analysis | Abdeljalil El Khyati | September 2026</a:t>
+            </a:r>
+          </a:p>
+        </p:txBody>
+      </p:sp>
       <p:pic>
         <p:nvPicPr>
-          <p:cNvPr id="7" name="Picture 6" descr="top_10_countries_champions.png"/>
+          <p:cNvPr id="22" name="Picture 21">
+            <a:extLst>
+              <a:ext uri="{FF2B5EF4-FFF2-40B4-BE49-F238E27FC236}">
+                <a16:creationId xmlns:a16="http://schemas.microsoft.com/office/drawing/2014/main" id="{95DCBA1C-802E-CC58-0F74-78ECB4E3D659}"/>
+              </a:ext>
+            </a:extLst>
+          </p:cNvPr>
           <p:cNvPicPr>
             <a:picLocks noChangeAspect="1"/>
           </p:cNvPicPr>
@@ -5229,49 +8677,14 @@
         </p:blipFill>
         <p:spPr>
           <a:xfrm>
-            <a:off x="6675120" y="4114800"/>
-            <a:ext cx="5029200" cy="2286000"/>
+            <a:off x="6227064" y="1435608"/>
+            <a:ext cx="5431536" cy="3429000"/>
           </a:xfrm>
           <a:prstGeom prst="rect">
             <a:avLst/>
           </a:prstGeom>
         </p:spPr>
       </p:pic>
-      <p:sp>
-        <p:nvSpPr>
-          <p:cNvPr id="8" name="TextBox 7"/>
-          <p:cNvSpPr txBox="1"/>
-          <p:nvPr/>
-        </p:nvSpPr>
-        <p:spPr>
-          <a:xfrm>
-            <a:off x="548640" y="6400800"/>
-            <a:ext cx="10972800" cy="365760"/>
-          </a:xfrm>
-          <a:prstGeom prst="rect">
-            <a:avLst/>
-          </a:prstGeom>
-          <a:noFill/>
-        </p:spPr>
-        <p:txBody>
-          <a:bodyPr wrap="none">
-            <a:spAutoFit/>
-          </a:bodyPr>
-          <a:lstStyle/>
-          <a:p>
-            <a:pPr algn="ctr">
-              <a:defRPr sz="1000">
-                <a:solidFill>
-                  <a:srgbClr val="666666"/>
-                </a:solidFill>
-              </a:defRPr>
-            </a:pPr>
-            <a:r>
-              <a:t>UCI Online Retail Analysis | Abdeljalil El Khyati | September 2026</a:t>
-            </a:r>
-          </a:p>
-        </p:txBody>
-      </p:sp>
     </p:spTree>
   </p:cSld>
   <p:clrMapOvr>
@@ -5283,6 +8696,14 @@
 <file path=ppt/slides/slide7.xml><?xml version="1.0" encoding="utf-8"?>
 <p:sld xmlns:a="http://schemas.openxmlformats.org/drawingml/2006/main" xmlns:r="http://schemas.openxmlformats.org/officeDocument/2006/relationships" xmlns:p="http://schemas.openxmlformats.org/presentationml/2006/main">
   <p:cSld>
+    <p:bg>
+      <p:bgPr>
+        <a:solidFill>
+          <a:srgbClr val="FFFFFF"/>
+        </a:solidFill>
+        <a:effectLst/>
+      </p:bgPr>
+    </p:bg>
     <p:spTree>
       <p:nvGrpSpPr>
         <p:cNvPr id="1" name=""/>
@@ -5306,7 +8727,7 @@
         <p:spPr>
           <a:xfrm>
             <a:off x="0" y="0"/>
-            <a:ext cx="12191695" cy="1097280"/>
+            <a:ext cx="12191695" cy="987552"/>
           </a:xfrm>
           <a:prstGeom prst="rect">
             <a:avLst/>
@@ -5349,8 +8770,8 @@
         </p:nvSpPr>
         <p:spPr>
           <a:xfrm>
-            <a:off x="548640" y="137160"/>
-            <a:ext cx="10972800" cy="822960"/>
+            <a:off x="502920" y="109728"/>
+            <a:ext cx="11064240" cy="594360"/>
           </a:xfrm>
           <a:prstGeom prst="rect">
             <a:avLst/>
@@ -5364,14 +8785,14 @@
           <a:lstStyle/>
           <a:p>
             <a:pPr>
-              <a:defRPr sz="3200" b="1">
+              <a:defRPr sz="2700" b="1">
                 <a:solidFill>
                   <a:srgbClr val="FFFFFF"/>
                 </a:solidFill>
               </a:defRPr>
             </a:pPr>
             <a:r>
-              <a:t>Product Portfolio Analysis</a:t>
+              <a:t>Product Portfolio — Winners &amp; Low-Revenue Tail</a:t>
             </a:r>
           </a:p>
         </p:txBody>
@@ -5384,8 +8805,8 @@
         </p:nvSpPr>
         <p:spPr>
           <a:xfrm>
-            <a:off x="548640" y="1143000"/>
-            <a:ext cx="10972800" cy="457200"/>
+            <a:off x="530352" y="1069848"/>
+            <a:ext cx="10972800" cy="411480"/>
           </a:xfrm>
           <a:prstGeom prst="rect">
             <a:avLst/>
@@ -5399,149 +8820,21 @@
           <a:lstStyle/>
           <a:p>
             <a:pPr>
-              <a:defRPr sz="1600" i="1">
+              <a:defRPr sz="1300">
                 <a:solidFill>
                   <a:srgbClr val="2E75B6"/>
                 </a:solidFill>
               </a:defRPr>
             </a:pPr>
             <a:r>
-              <a:t>B2B Wholesale Patterns &amp; Dead Stock Alert</a:t>
-            </a:r>
-          </a:p>
-        </p:txBody>
-      </p:sp>
-      <p:sp>
-        <p:nvSpPr>
-          <p:cNvPr id="5" name="TextBox 4"/>
-          <p:cNvSpPr txBox="1"/>
-          <p:nvPr/>
-        </p:nvSpPr>
-        <p:spPr>
-          <a:xfrm>
-            <a:off x="548640" y="1737360"/>
-            <a:ext cx="5943600" cy="4572000"/>
-          </a:xfrm>
-          <a:prstGeom prst="rect">
-            <a:avLst/>
-          </a:prstGeom>
-          <a:noFill/>
-        </p:spPr>
-        <p:txBody>
-          <a:bodyPr wrap="square">
-            <a:spAutoFit/>
-          </a:bodyPr>
-          <a:lstStyle/>
-          <a:p>
-            <a:pPr>
-              <a:spcAft>
-                <a:spcPts val="1200"/>
-              </a:spcAft>
-              <a:defRPr sz="1600">
-                <a:solidFill>
-                  <a:srgbClr val="333333"/>
-                </a:solidFill>
-              </a:defRPr>
-            </a:pPr>
-            <a:r>
-              <a:t>🏆 Top Revenue Product: REGENCY CAKESTAND 3 TIER (£174K across 1,988 invoices).</a:t>
-            </a:r>
-          </a:p>
-          <a:p>
-            <a:pPr>
-              <a:spcAft>
-                <a:spcPts val="1200"/>
-              </a:spcAft>
-              <a:defRPr sz="1600">
-                <a:solidFill>
-                  <a:srgbClr val="333333"/>
-                </a:solidFill>
-              </a:defRPr>
-            </a:pPr>
-            <a:r>
-              <a:t>📦 Strong B2B Indicators (Avg_Qty &gt; 20/invoice):</a:t>
-            </a:r>
-          </a:p>
-          <a:p>
-            <a:pPr>
-              <a:spcAft>
-                <a:spcPts val="1200"/>
-              </a:spcAft>
-              <a:defRPr sz="1600">
-                <a:solidFill>
-                  <a:srgbClr val="333333"/>
-                </a:solidFill>
-              </a:defRPr>
-            </a:pPr>
-            <a:r>
-              <a:t>   • MEDIUM CERAMIC TOP STORAGE JAR: 312 units/invoice</a:t>
-            </a:r>
-          </a:p>
-          <a:p>
-            <a:pPr>
-              <a:spcAft>
-                <a:spcPts val="1200"/>
-              </a:spcAft>
-              <a:defRPr sz="1600">
-                <a:solidFill>
-                  <a:srgbClr val="333333"/>
-                </a:solidFill>
-              </a:defRPr>
-            </a:pPr>
-            <a:r>
-              <a:t>   • RABBIT NIGHT LIGHT: 30 units/invoice</a:t>
-            </a:r>
-          </a:p>
-          <a:p>
-            <a:pPr>
-              <a:spcAft>
-                <a:spcPts val="1200"/>
-              </a:spcAft>
-              <a:defRPr sz="1600">
-                <a:solidFill>
-                  <a:srgbClr val="333333"/>
-                </a:solidFill>
-              </a:defRPr>
-            </a:pPr>
-            <a:r>
-              <a:t>   • JUMBO BAG RED RETROSPOT: 23 units/invoice</a:t>
-            </a:r>
-          </a:p>
-          <a:p>
-            <a:pPr>
-              <a:spcAft>
-                <a:spcPts val="1200"/>
-              </a:spcAft>
-              <a:defRPr sz="1600">
-                <a:solidFill>
-                  <a:srgbClr val="333333"/>
-                </a:solidFill>
-              </a:defRPr>
-            </a:pPr>
-            <a:r>
-              <a:t>⚠️ Dead Stock Alert: Bottom 10 products generate only £4–£11 total — storage costs likely exceed revenue.</a:t>
-            </a:r>
-          </a:p>
-          <a:p>
-            <a:pPr>
-              <a:spcAft>
-                <a:spcPts val="1200"/>
-              </a:spcAft>
-              <a:defRPr sz="1600">
-                <a:solidFill>
-                  <a:srgbClr val="333333"/>
-                </a:solidFill>
-              </a:defRPr>
-            </a:pPr>
-            <a:r>
-              <a:t>💡 Recommendation: Bundle or discontinue low-performers to free warehouse space.</a:t>
+              <a:t>Strong sellers coexist with a small group of very low-revenue products</a:t>
             </a:r>
           </a:p>
         </p:txBody>
       </p:sp>
       <p:pic>
         <p:nvPicPr>
-          <p:cNvPr id="6" name="Picture 5" descr="top_10_physical_products_all_time.png"/>
+          <p:cNvPr id="5" name="Picture 4" descr="03_top_10_physical_products.png"/>
           <p:cNvPicPr>
             <a:picLocks noChangeAspect="1"/>
           </p:cNvPicPr>
@@ -5555,17 +8848,309 @@
         </p:blipFill>
         <p:spPr>
           <a:xfrm>
-            <a:off x="6675120" y="1737360"/>
-            <a:ext cx="5029200" cy="2286000"/>
+            <a:off x="502920" y="1417320"/>
+            <a:ext cx="5486400" cy="3520440"/>
           </a:xfrm>
           <a:prstGeom prst="rect">
             <a:avLst/>
           </a:prstGeom>
         </p:spPr>
       </p:pic>
+      <p:sp>
+        <p:nvSpPr>
+          <p:cNvPr id="7" name="Rounded Rectangle 6"/>
+          <p:cNvSpPr/>
+          <p:nvPr/>
+        </p:nvSpPr>
+        <p:spPr>
+          <a:xfrm>
+            <a:off x="822960" y="5166360"/>
+            <a:ext cx="3749039" cy="777240"/>
+          </a:xfrm>
+          <a:prstGeom prst="roundRect">
+            <a:avLst/>
+          </a:prstGeom>
+          <a:solidFill>
+            <a:srgbClr val="EAF6EF"/>
+          </a:solidFill>
+          <a:ln w="12700">
+            <a:solidFill>
+              <a:srgbClr val="2E8B57"/>
+            </a:solidFill>
+          </a:ln>
+        </p:spPr>
+        <p:style>
+          <a:lnRef idx="1">
+            <a:schemeClr val="accent1"/>
+          </a:lnRef>
+          <a:fillRef idx="3">
+            <a:schemeClr val="accent1"/>
+          </a:fillRef>
+          <a:effectRef idx="2">
+            <a:schemeClr val="accent1"/>
+          </a:effectRef>
+          <a:fontRef idx="minor">
+            <a:schemeClr val="lt1"/>
+          </a:fontRef>
+        </p:style>
+        <p:txBody>
+          <a:bodyPr rtlCol="0" anchor="ctr"/>
+          <a:lstStyle/>
+          <a:p>
+            <a:pPr algn="ctr"/>
+            <a:endParaRPr/>
+          </a:p>
+        </p:txBody>
+      </p:sp>
+      <p:sp>
+        <p:nvSpPr>
+          <p:cNvPr id="8" name="TextBox 7"/>
+          <p:cNvSpPr txBox="1"/>
+          <p:nvPr/>
+        </p:nvSpPr>
+        <p:spPr>
+          <a:xfrm>
+            <a:off x="987552" y="5276088"/>
+            <a:ext cx="3419856" cy="557784"/>
+          </a:xfrm>
+          <a:prstGeom prst="rect">
+            <a:avLst/>
+          </a:prstGeom>
+          <a:noFill/>
+        </p:spPr>
+        <p:txBody>
+          <a:bodyPr wrap="square" anchor="ctr">
+            <a:spAutoFit/>
+          </a:bodyPr>
+          <a:lstStyle/>
+          <a:p>
+            <a:pPr algn="ctr">
+              <a:defRPr sz="1300" b="1">
+                <a:solidFill>
+                  <a:srgbClr val="2D3238"/>
+                </a:solidFill>
+              </a:defRPr>
+            </a:pPr>
+            <a:r>
+              <a:t>Top product: REGENCY CAKESTAND 3 TIER</a:t>
+            </a:r>
+            <a:br/>
+            <a:r>
+              <a:t>£174,156.54 across 1,988 invoices.</a:t>
+            </a:r>
+          </a:p>
+        </p:txBody>
+      </p:sp>
+      <p:sp>
+        <p:nvSpPr>
+          <p:cNvPr id="9" name="Rounded Rectangle 8"/>
+          <p:cNvSpPr/>
+          <p:nvPr/>
+        </p:nvSpPr>
+        <p:spPr>
+          <a:xfrm>
+            <a:off x="4617720" y="5166360"/>
+            <a:ext cx="3063240" cy="777240"/>
+          </a:xfrm>
+          <a:prstGeom prst="roundRect">
+            <a:avLst/>
+          </a:prstGeom>
+          <a:solidFill>
+            <a:srgbClr val="E8F1FA"/>
+          </a:solidFill>
+          <a:ln w="12700">
+            <a:solidFill>
+              <a:srgbClr val="2E75B6"/>
+            </a:solidFill>
+          </a:ln>
+        </p:spPr>
+        <p:style>
+          <a:lnRef idx="1">
+            <a:schemeClr val="accent1"/>
+          </a:lnRef>
+          <a:fillRef idx="3">
+            <a:schemeClr val="accent1"/>
+          </a:fillRef>
+          <a:effectRef idx="2">
+            <a:schemeClr val="accent1"/>
+          </a:effectRef>
+          <a:fontRef idx="minor">
+            <a:schemeClr val="lt1"/>
+          </a:fontRef>
+        </p:style>
+        <p:txBody>
+          <a:bodyPr rtlCol="0" anchor="ctr"/>
+          <a:lstStyle/>
+          <a:p>
+            <a:pPr algn="ctr"/>
+            <a:endParaRPr/>
+          </a:p>
+        </p:txBody>
+      </p:sp>
+      <p:sp>
+        <p:nvSpPr>
+          <p:cNvPr id="10" name="TextBox 9"/>
+          <p:cNvSpPr txBox="1"/>
+          <p:nvPr/>
+        </p:nvSpPr>
+        <p:spPr>
+          <a:xfrm>
+            <a:off x="4782312" y="5276088"/>
+            <a:ext cx="2734056" cy="557784"/>
+          </a:xfrm>
+          <a:prstGeom prst="rect">
+            <a:avLst/>
+          </a:prstGeom>
+          <a:noFill/>
+        </p:spPr>
+        <p:txBody>
+          <a:bodyPr wrap="square" anchor="ctr">
+            <a:spAutoFit/>
+          </a:bodyPr>
+          <a:lstStyle/>
+          <a:p>
+            <a:pPr algn="ctr">
+              <a:defRPr sz="1300" b="1">
+                <a:solidFill>
+                  <a:srgbClr val="2D3238"/>
+                </a:solidFill>
+              </a:defRPr>
+            </a:pPr>
+            <a:r>
+              <a:t>Top 3 physical products account for approximately 3.8% of clean physical-product revenue.</a:t>
+            </a:r>
+          </a:p>
+        </p:txBody>
+      </p:sp>
+      <p:sp>
+        <p:nvSpPr>
+          <p:cNvPr id="11" name="Rounded Rectangle 10"/>
+          <p:cNvSpPr/>
+          <p:nvPr/>
+        </p:nvSpPr>
+        <p:spPr>
+          <a:xfrm>
+            <a:off x="7818120" y="5166360"/>
+            <a:ext cx="3337560" cy="777240"/>
+          </a:xfrm>
+          <a:prstGeom prst="roundRect">
+            <a:avLst/>
+          </a:prstGeom>
+          <a:solidFill>
+            <a:srgbClr val="FCF2E6"/>
+          </a:solidFill>
+          <a:ln w="12700">
+            <a:solidFill>
+              <a:srgbClr val="E67E22"/>
+            </a:solidFill>
+          </a:ln>
+        </p:spPr>
+        <p:style>
+          <a:lnRef idx="1">
+            <a:schemeClr val="accent1"/>
+          </a:lnRef>
+          <a:fillRef idx="3">
+            <a:schemeClr val="accent1"/>
+          </a:fillRef>
+          <a:effectRef idx="2">
+            <a:schemeClr val="accent1"/>
+          </a:effectRef>
+          <a:fontRef idx="minor">
+            <a:schemeClr val="lt1"/>
+          </a:fontRef>
+        </p:style>
+        <p:txBody>
+          <a:bodyPr rtlCol="0" anchor="ctr"/>
+          <a:lstStyle/>
+          <a:p>
+            <a:pPr algn="ctr"/>
+            <a:endParaRPr/>
+          </a:p>
+        </p:txBody>
+      </p:sp>
+      <p:sp>
+        <p:nvSpPr>
+          <p:cNvPr id="12" name="TextBox 11"/>
+          <p:cNvSpPr txBox="1"/>
+          <p:nvPr/>
+        </p:nvSpPr>
+        <p:spPr>
+          <a:xfrm>
+            <a:off x="7982712" y="5276088"/>
+            <a:ext cx="3008376" cy="557784"/>
+          </a:xfrm>
+          <a:prstGeom prst="rect">
+            <a:avLst/>
+          </a:prstGeom>
+          <a:noFill/>
+        </p:spPr>
+        <p:txBody>
+          <a:bodyPr wrap="square" anchor="ctr">
+            <a:spAutoFit/>
+          </a:bodyPr>
+          <a:lstStyle/>
+          <a:p>
+            <a:pPr algn="ctr">
+              <a:defRPr sz="1300" b="1">
+                <a:solidFill>
+                  <a:srgbClr val="2D3238"/>
+                </a:solidFill>
+              </a:defRPr>
+            </a:pPr>
+            <a:r>
+              <a:t>Low-revenue tail: candidates for product/catalog review.</a:t>
+            </a:r>
+            <a:br/>
+            <a:r>
+              <a:t>The dataset does not contain inventory cost or storage-cost data.</a:t>
+            </a:r>
+          </a:p>
+        </p:txBody>
+      </p:sp>
+      <p:sp>
+        <p:nvSpPr>
+          <p:cNvPr id="13" name="TextBox 12"/>
+          <p:cNvSpPr txBox="1"/>
+          <p:nvPr/>
+        </p:nvSpPr>
+        <p:spPr>
+          <a:xfrm>
+            <a:off x="502920" y="6446520"/>
+            <a:ext cx="11155680" cy="228600"/>
+          </a:xfrm>
+          <a:prstGeom prst="rect">
+            <a:avLst/>
+          </a:prstGeom>
+          <a:noFill/>
+        </p:spPr>
+        <p:txBody>
+          <a:bodyPr wrap="none">
+            <a:spAutoFit/>
+          </a:bodyPr>
+          <a:lstStyle/>
+          <a:p>
+            <a:pPr algn="ctr">
+              <a:defRPr sz="850">
+                <a:solidFill>
+                  <a:srgbClr val="6E7681"/>
+                </a:solidFill>
+              </a:defRPr>
+            </a:pPr>
+            <a:r>
+              <a:t>UCI Online Retail Analysis | Abdeljalil El Khyati | September 2026</a:t>
+            </a:r>
+          </a:p>
+        </p:txBody>
+      </p:sp>
       <p:pic>
         <p:nvPicPr>
-          <p:cNvPr id="7" name="Picture 6" descr="bottom_10_products_revenue.png"/>
+          <p:cNvPr id="14" name="Picture 13">
+            <a:extLst>
+              <a:ext uri="{FF2B5EF4-FFF2-40B4-BE49-F238E27FC236}">
+                <a16:creationId xmlns:a16="http://schemas.microsoft.com/office/drawing/2014/main" id="{28C0E8CD-8D5F-6852-41F9-5C4936937E64}"/>
+              </a:ext>
+            </a:extLst>
+          </p:cNvPr>
           <p:cNvPicPr>
             <a:picLocks noChangeAspect="1"/>
           </p:cNvPicPr>
@@ -5579,49 +9164,14 @@
         </p:blipFill>
         <p:spPr>
           <a:xfrm>
-            <a:off x="6675120" y="4114800"/>
-            <a:ext cx="5029200" cy="2286000"/>
+            <a:off x="6202682" y="1490472"/>
+            <a:ext cx="5465062" cy="3520440"/>
           </a:xfrm>
           <a:prstGeom prst="rect">
             <a:avLst/>
           </a:prstGeom>
         </p:spPr>
       </p:pic>
-      <p:sp>
-        <p:nvSpPr>
-          <p:cNvPr id="8" name="TextBox 7"/>
-          <p:cNvSpPr txBox="1"/>
-          <p:nvPr/>
-        </p:nvSpPr>
-        <p:spPr>
-          <a:xfrm>
-            <a:off x="548640" y="6400800"/>
-            <a:ext cx="10972800" cy="365760"/>
-          </a:xfrm>
-          <a:prstGeom prst="rect">
-            <a:avLst/>
-          </a:prstGeom>
-          <a:noFill/>
-        </p:spPr>
-        <p:txBody>
-          <a:bodyPr wrap="none">
-            <a:spAutoFit/>
-          </a:bodyPr>
-          <a:lstStyle/>
-          <a:p>
-            <a:pPr algn="ctr">
-              <a:defRPr sz="1000">
-                <a:solidFill>
-                  <a:srgbClr val="666666"/>
-                </a:solidFill>
-              </a:defRPr>
-            </a:pPr>
-            <a:r>
-              <a:t>UCI Online Retail Analysis | Abdeljalil El Khyati | September 2026</a:t>
-            </a:r>
-          </a:p>
-        </p:txBody>
-      </p:sp>
     </p:spTree>
   </p:cSld>
   <p:clrMapOvr>
@@ -5633,6 +9183,14 @@
 <file path=ppt/slides/slide8.xml><?xml version="1.0" encoding="utf-8"?>
 <p:sld xmlns:a="http://schemas.openxmlformats.org/drawingml/2006/main" xmlns:r="http://schemas.openxmlformats.org/officeDocument/2006/relationships" xmlns:p="http://schemas.openxmlformats.org/presentationml/2006/main">
   <p:cSld>
+    <p:bg>
+      <p:bgPr>
+        <a:solidFill>
+          <a:srgbClr val="FFFFFF"/>
+        </a:solidFill>
+        <a:effectLst/>
+      </p:bgPr>
+    </p:bg>
     <p:spTree>
       <p:nvGrpSpPr>
         <p:cNvPr id="1" name=""/>
@@ -5656,7 +9214,7 @@
         <p:spPr>
           <a:xfrm>
             <a:off x="0" y="0"/>
-            <a:ext cx="12191695" cy="1097280"/>
+            <a:ext cx="12191695" cy="987552"/>
           </a:xfrm>
           <a:prstGeom prst="rect">
             <a:avLst/>
@@ -5699,8 +9257,8 @@
         </p:nvSpPr>
         <p:spPr>
           <a:xfrm>
-            <a:off x="548640" y="137160"/>
-            <a:ext cx="10972800" cy="822960"/>
+            <a:off x="502920" y="109728"/>
+            <a:ext cx="11064240" cy="594360"/>
           </a:xfrm>
           <a:prstGeom prst="rect">
             <a:avLst/>
@@ -5714,14 +9272,14 @@
           <a:lstStyle/>
           <a:p>
             <a:pPr>
-              <a:defRPr sz="3200" b="1">
+              <a:defRPr sz="2700" b="1">
                 <a:solidFill>
                   <a:srgbClr val="FFFFFF"/>
                 </a:solidFill>
               </a:defRPr>
             </a:pPr>
             <a:r>
-              <a:t>Operational Revenue &amp; Customer Behavior</a:t>
+              <a:t>Operational Revenue &amp; Unknown Customer Activity</a:t>
             </a:r>
           </a:p>
         </p:txBody>
@@ -5734,8 +9292,8 @@
         </p:nvSpPr>
         <p:spPr>
           <a:xfrm>
-            <a:off x="548640" y="1143000"/>
-            <a:ext cx="10972800" cy="457200"/>
+            <a:off x="530352" y="1069848"/>
+            <a:ext cx="10972800" cy="411480"/>
           </a:xfrm>
           <a:prstGeom prst="rect">
             <a:avLst/>
@@ -5749,134 +9307,21 @@
           <a:lstStyle/>
           <a:p>
             <a:pPr>
-              <a:defRPr sz="1600" i="1">
+              <a:defRPr sz="1300">
                 <a:solidFill>
                   <a:srgbClr val="2E75B6"/>
                 </a:solidFill>
               </a:defRPr>
             </a:pPr>
             <a:r>
-              <a:t>Separating Service Fees from Product Performance</a:t>
-            </a:r>
-          </a:p>
-        </p:txBody>
-      </p:sp>
-      <p:sp>
-        <p:nvSpPr>
-          <p:cNvPr id="5" name="TextBox 4"/>
-          <p:cNvSpPr txBox="1"/>
-          <p:nvPr/>
-        </p:nvSpPr>
-        <p:spPr>
-          <a:xfrm>
-            <a:off x="548640" y="1737360"/>
-            <a:ext cx="5943600" cy="4572000"/>
-          </a:xfrm>
-          <a:prstGeom prst="rect">
-            <a:avLst/>
-          </a:prstGeom>
-          <a:noFill/>
-        </p:spPr>
-        <p:txBody>
-          <a:bodyPr wrap="square">
-            <a:spAutoFit/>
-          </a:bodyPr>
-          <a:lstStyle/>
-          <a:p>
-            <a:pPr>
-              <a:spcAft>
-                <a:spcPts val="1200"/>
-              </a:spcAft>
-              <a:defRPr sz="1600">
-                <a:solidFill>
-                  <a:srgbClr val="333333"/>
-                </a:solidFill>
-              </a:defRPr>
-            </a:pPr>
-            <a:r>
-              <a:t>📊 Operational Items Total: £362,268.47 (3.4% of revenue) — excluded from product rankings.</a:t>
-            </a:r>
-          </a:p>
-          <a:p>
-            <a:pPr>
-              <a:spcAft>
-                <a:spcPts val="1200"/>
-              </a:spcAft>
-              <a:defRPr sz="1600">
-                <a:solidFill>
-                  <a:srgbClr val="333333"/>
-                </a:solidFill>
-              </a:defRPr>
-            </a:pPr>
-            <a:r>
-              <a:t>   • DOTCOM POSTAGE: £206K (706 transactions, £292 avg) — per-order shipping fee.</a:t>
-            </a:r>
-          </a:p>
-          <a:p>
-            <a:pPr>
-              <a:spcAft>
-                <a:spcPts val="1200"/>
-              </a:spcAft>
-              <a:defRPr sz="1600">
-                <a:solidFill>
-                  <a:srgbClr val="333333"/>
-                </a:solidFill>
-              </a:defRPr>
-            </a:pPr>
-            <a:r>
-              <a:t>   • POSTAGE: £78K (3,150 units) — bulk shipping labels.</a:t>
-            </a:r>
-          </a:p>
-          <a:p>
-            <a:pPr>
-              <a:spcAft>
-                <a:spcPts val="1200"/>
-              </a:spcAft>
-              <a:defRPr sz="1600">
-                <a:solidFill>
-                  <a:srgbClr val="333333"/>
-                </a:solidFill>
-              </a:defRPr>
-            </a:pPr>
-            <a:r>
-              <a:t>   • Manual: £77K (6,985 units) — accounting adjustments, NOT products.</a:t>
-            </a:r>
-          </a:p>
-          <a:p>
-            <a:pPr>
-              <a:spcAft>
-                <a:spcPts val="1200"/>
-              </a:spcAft>
-              <a:defRPr sz="1600">
-                <a:solidFill>
-                  <a:srgbClr val="333333"/>
-                </a:solidFill>
-              </a:defRPr>
-            </a:pPr>
-            <a:r>
-              <a:t>👥 Unknown Customer Behavior: 16.5% of revenue from guest checkouts, spiking to 23.1% in November.</a:t>
-            </a:r>
-          </a:p>
-          <a:p>
-            <a:pPr>
-              <a:spcAft>
-                <a:spcPts val="1200"/>
-              </a:spcAft>
-              <a:defRPr sz="1600">
-                <a:solidFill>
-                  <a:srgbClr val="333333"/>
-                </a:solidFill>
-              </a:defRPr>
-            </a:pPr>
-            <a:r>
-              <a:t> Insight: Seasonal spikes attract more guest buyers — opportunity for post-purchase conversion.</a:t>
+              <a:t>Separating merchandise performance from non-product revenue and unidentified customer activity</a:t>
             </a:r>
           </a:p>
         </p:txBody>
       </p:sp>
       <p:pic>
         <p:nvPicPr>
-          <p:cNvPr id="6" name="Picture 5" descr="operational_items_revenue.png"/>
+          <p:cNvPr id="6" name="Picture 5" descr="02_monthly_revenue_known_vs_unknown.png"/>
           <p:cNvPicPr>
             <a:picLocks noChangeAspect="1"/>
           </p:cNvPicPr>
@@ -5890,17 +9335,406 @@
         </p:blipFill>
         <p:spPr>
           <a:xfrm>
-            <a:off x="6675120" y="1737360"/>
-            <a:ext cx="5029200" cy="2286000"/>
+            <a:off x="6217920" y="1417320"/>
+            <a:ext cx="5440680" cy="3429000"/>
           </a:xfrm>
           <a:prstGeom prst="rect">
             <a:avLst/>
           </a:prstGeom>
         </p:spPr>
       </p:pic>
+      <p:sp>
+        <p:nvSpPr>
+          <p:cNvPr id="7" name="Rounded Rectangle 6"/>
+          <p:cNvSpPr/>
+          <p:nvPr/>
+        </p:nvSpPr>
+        <p:spPr>
+          <a:xfrm>
+            <a:off x="685800" y="5074920"/>
+            <a:ext cx="3154680" cy="960120"/>
+          </a:xfrm>
+          <a:prstGeom prst="roundRect">
+            <a:avLst/>
+          </a:prstGeom>
+          <a:solidFill>
+            <a:srgbClr val="FCF2E6"/>
+          </a:solidFill>
+          <a:ln w="16510">
+            <a:solidFill>
+              <a:srgbClr val="E67E22"/>
+            </a:solidFill>
+          </a:ln>
+        </p:spPr>
+        <p:style>
+          <a:lnRef idx="1">
+            <a:schemeClr val="accent1"/>
+          </a:lnRef>
+          <a:fillRef idx="3">
+            <a:schemeClr val="accent1"/>
+          </a:fillRef>
+          <a:effectRef idx="2">
+            <a:schemeClr val="accent1"/>
+          </a:effectRef>
+          <a:fontRef idx="minor">
+            <a:schemeClr val="lt1"/>
+          </a:fontRef>
+        </p:style>
+        <p:txBody>
+          <a:bodyPr rtlCol="0" anchor="ctr"/>
+          <a:lstStyle/>
+          <a:p>
+            <a:pPr algn="ctr"/>
+            <a:endParaRPr/>
+          </a:p>
+        </p:txBody>
+      </p:sp>
+      <p:sp>
+        <p:nvSpPr>
+          <p:cNvPr id="8" name="TextBox 7"/>
+          <p:cNvSpPr txBox="1"/>
+          <p:nvPr/>
+        </p:nvSpPr>
+        <p:spPr>
+          <a:xfrm>
+            <a:off x="850392" y="5221224"/>
+            <a:ext cx="2825496" cy="502920"/>
+          </a:xfrm>
+          <a:prstGeom prst="rect">
+            <a:avLst/>
+          </a:prstGeom>
+          <a:noFill/>
+        </p:spPr>
+        <p:txBody>
+          <a:bodyPr wrap="none">
+            <a:spAutoFit/>
+          </a:bodyPr>
+          <a:lstStyle/>
+          <a:p>
+            <a:pPr algn="ctr">
+              <a:defRPr sz="2300" b="1">
+                <a:solidFill>
+                  <a:srgbClr val="E67E22"/>
+                </a:solidFill>
+              </a:defRPr>
+            </a:pPr>
+            <a:r>
+              <a:t>£362K</a:t>
+            </a:r>
+          </a:p>
+        </p:txBody>
+      </p:sp>
+      <p:sp>
+        <p:nvSpPr>
+          <p:cNvPr id="9" name="TextBox 8"/>
+          <p:cNvSpPr txBox="1"/>
+          <p:nvPr/>
+        </p:nvSpPr>
+        <p:spPr>
+          <a:xfrm>
+            <a:off x="832104" y="5788152"/>
+            <a:ext cx="2862072" cy="137160"/>
+          </a:xfrm>
+          <a:prstGeom prst="rect">
+            <a:avLst/>
+          </a:prstGeom>
+          <a:noFill/>
+        </p:spPr>
+        <p:txBody>
+          <a:bodyPr wrap="square">
+            <a:spAutoFit/>
+          </a:bodyPr>
+          <a:lstStyle/>
+          <a:p>
+            <a:pPr algn="ctr">
+              <a:defRPr sz="1050">
+                <a:solidFill>
+                  <a:srgbClr val="2D3238"/>
+                </a:solidFill>
+              </a:defRPr>
+            </a:pPr>
+            <a:r>
+              <a:t>Operational revenue</a:t>
+            </a:r>
+          </a:p>
+        </p:txBody>
+      </p:sp>
+      <p:sp>
+        <p:nvSpPr>
+          <p:cNvPr id="10" name="Rounded Rectangle 9"/>
+          <p:cNvSpPr/>
+          <p:nvPr/>
+        </p:nvSpPr>
+        <p:spPr>
+          <a:xfrm>
+            <a:off x="4023360" y="5074920"/>
+            <a:ext cx="3154680" cy="960120"/>
+          </a:xfrm>
+          <a:prstGeom prst="roundRect">
+            <a:avLst/>
+          </a:prstGeom>
+          <a:solidFill>
+            <a:srgbClr val="E8F1FA"/>
+          </a:solidFill>
+          <a:ln w="16510">
+            <a:solidFill>
+              <a:srgbClr val="2E75B6"/>
+            </a:solidFill>
+          </a:ln>
+        </p:spPr>
+        <p:style>
+          <a:lnRef idx="1">
+            <a:schemeClr val="accent1"/>
+          </a:lnRef>
+          <a:fillRef idx="3">
+            <a:schemeClr val="accent1"/>
+          </a:fillRef>
+          <a:effectRef idx="2">
+            <a:schemeClr val="accent1"/>
+          </a:effectRef>
+          <a:fontRef idx="minor">
+            <a:schemeClr val="lt1"/>
+          </a:fontRef>
+        </p:style>
+        <p:txBody>
+          <a:bodyPr rtlCol="0" anchor="ctr"/>
+          <a:lstStyle/>
+          <a:p>
+            <a:pPr algn="ctr"/>
+            <a:endParaRPr/>
+          </a:p>
+        </p:txBody>
+      </p:sp>
+      <p:sp>
+        <p:nvSpPr>
+          <p:cNvPr id="11" name="TextBox 10"/>
+          <p:cNvSpPr txBox="1"/>
+          <p:nvPr/>
+        </p:nvSpPr>
+        <p:spPr>
+          <a:xfrm>
+            <a:off x="4187952" y="5221224"/>
+            <a:ext cx="2825496" cy="502920"/>
+          </a:xfrm>
+          <a:prstGeom prst="rect">
+            <a:avLst/>
+          </a:prstGeom>
+          <a:noFill/>
+        </p:spPr>
+        <p:txBody>
+          <a:bodyPr wrap="none">
+            <a:spAutoFit/>
+          </a:bodyPr>
+          <a:lstStyle/>
+          <a:p>
+            <a:pPr algn="ctr">
+              <a:defRPr sz="2300" b="1">
+                <a:solidFill>
+                  <a:srgbClr val="2E75B6"/>
+                </a:solidFill>
+              </a:defRPr>
+            </a:pPr>
+            <a:r>
+              <a:t>16.5%</a:t>
+            </a:r>
+          </a:p>
+        </p:txBody>
+      </p:sp>
+      <p:sp>
+        <p:nvSpPr>
+          <p:cNvPr id="12" name="TextBox 11"/>
+          <p:cNvSpPr txBox="1"/>
+          <p:nvPr/>
+        </p:nvSpPr>
+        <p:spPr>
+          <a:xfrm>
+            <a:off x="4169664" y="5788152"/>
+            <a:ext cx="2862072" cy="137160"/>
+          </a:xfrm>
+          <a:prstGeom prst="rect">
+            <a:avLst/>
+          </a:prstGeom>
+          <a:noFill/>
+        </p:spPr>
+        <p:txBody>
+          <a:bodyPr wrap="square">
+            <a:spAutoFit/>
+          </a:bodyPr>
+          <a:lstStyle/>
+          <a:p>
+            <a:pPr algn="ctr">
+              <a:defRPr sz="1050">
+                <a:solidFill>
+                  <a:srgbClr val="2D3238"/>
+                </a:solidFill>
+              </a:defRPr>
+            </a:pPr>
+            <a:r>
+              <a:t>Revenue linked to Unknown CustomerID</a:t>
+            </a:r>
+          </a:p>
+        </p:txBody>
+      </p:sp>
+      <p:sp>
+        <p:nvSpPr>
+          <p:cNvPr id="13" name="Rounded Rectangle 12"/>
+          <p:cNvSpPr/>
+          <p:nvPr/>
+        </p:nvSpPr>
+        <p:spPr>
+          <a:xfrm>
+            <a:off x="7360920" y="5074920"/>
+            <a:ext cx="3794760" cy="960120"/>
+          </a:xfrm>
+          <a:prstGeom prst="roundRect">
+            <a:avLst/>
+          </a:prstGeom>
+          <a:solidFill>
+            <a:srgbClr val="E8F1FA"/>
+          </a:solidFill>
+          <a:ln w="16510">
+            <a:solidFill>
+              <a:srgbClr val="2E75B6"/>
+            </a:solidFill>
+          </a:ln>
+        </p:spPr>
+        <p:style>
+          <a:lnRef idx="1">
+            <a:schemeClr val="accent1"/>
+          </a:lnRef>
+          <a:fillRef idx="3">
+            <a:schemeClr val="accent1"/>
+          </a:fillRef>
+          <a:effectRef idx="2">
+            <a:schemeClr val="accent1"/>
+          </a:effectRef>
+          <a:fontRef idx="minor">
+            <a:schemeClr val="lt1"/>
+          </a:fontRef>
+        </p:style>
+        <p:txBody>
+          <a:bodyPr rtlCol="0" anchor="ctr"/>
+          <a:lstStyle/>
+          <a:p>
+            <a:pPr algn="ctr"/>
+            <a:endParaRPr/>
+          </a:p>
+        </p:txBody>
+      </p:sp>
+      <p:sp>
+        <p:nvSpPr>
+          <p:cNvPr id="14" name="TextBox 13"/>
+          <p:cNvSpPr txBox="1"/>
+          <p:nvPr/>
+        </p:nvSpPr>
+        <p:spPr>
+          <a:xfrm>
+            <a:off x="7525512" y="5221224"/>
+            <a:ext cx="3465576" cy="502920"/>
+          </a:xfrm>
+          <a:prstGeom prst="rect">
+            <a:avLst/>
+          </a:prstGeom>
+          <a:noFill/>
+        </p:spPr>
+        <p:txBody>
+          <a:bodyPr wrap="none">
+            <a:spAutoFit/>
+          </a:bodyPr>
+          <a:lstStyle/>
+          <a:p>
+            <a:pPr algn="ctr">
+              <a:defRPr sz="2300" b="1">
+                <a:solidFill>
+                  <a:srgbClr val="2E75B6"/>
+                </a:solidFill>
+              </a:defRPr>
+            </a:pPr>
+            <a:r>
+              <a:t>£1.75M</a:t>
+            </a:r>
+          </a:p>
+        </p:txBody>
+      </p:sp>
+      <p:sp>
+        <p:nvSpPr>
+          <p:cNvPr id="15" name="TextBox 14"/>
+          <p:cNvSpPr txBox="1"/>
+          <p:nvPr/>
+        </p:nvSpPr>
+        <p:spPr>
+          <a:xfrm>
+            <a:off x="7507224" y="5788152"/>
+            <a:ext cx="3502152" cy="137160"/>
+          </a:xfrm>
+          <a:prstGeom prst="rect">
+            <a:avLst/>
+          </a:prstGeom>
+          <a:noFill/>
+        </p:spPr>
+        <p:txBody>
+          <a:bodyPr wrap="square">
+            <a:spAutoFit/>
+          </a:bodyPr>
+          <a:lstStyle/>
+          <a:p>
+            <a:pPr algn="ctr">
+              <a:defRPr sz="1050">
+                <a:solidFill>
+                  <a:srgbClr val="2D3238"/>
+                </a:solidFill>
+              </a:defRPr>
+            </a:pPr>
+            <a:r>
+              <a:t>Revenue from unidentified customer transactions</a:t>
+            </a:r>
+          </a:p>
+        </p:txBody>
+      </p:sp>
+      <p:sp>
+        <p:nvSpPr>
+          <p:cNvPr id="16" name="TextBox 15"/>
+          <p:cNvSpPr txBox="1"/>
+          <p:nvPr/>
+        </p:nvSpPr>
+        <p:spPr>
+          <a:xfrm>
+            <a:off x="502920" y="6446520"/>
+            <a:ext cx="11155680" cy="228600"/>
+          </a:xfrm>
+          <a:prstGeom prst="rect">
+            <a:avLst/>
+          </a:prstGeom>
+          <a:noFill/>
+        </p:spPr>
+        <p:txBody>
+          <a:bodyPr wrap="none">
+            <a:spAutoFit/>
+          </a:bodyPr>
+          <a:lstStyle/>
+          <a:p>
+            <a:pPr algn="ctr">
+              <a:defRPr sz="850">
+                <a:solidFill>
+                  <a:srgbClr val="6E7681"/>
+                </a:solidFill>
+              </a:defRPr>
+            </a:pPr>
+            <a:r>
+              <a:t>UCI Online Retail Analysis | Abdeljalil El Khyati | September 2026</a:t>
+            </a:r>
+          </a:p>
+        </p:txBody>
+      </p:sp>
       <p:pic>
         <p:nvPicPr>
-          <p:cNvPr id="7" name="Picture 6" descr="monthly_revenue_by_customer_type.png"/>
+          <p:cNvPr id="17" name="Picture 16">
+            <a:extLst>
+              <a:ext uri="{FF2B5EF4-FFF2-40B4-BE49-F238E27FC236}">
+                <a16:creationId xmlns:a16="http://schemas.microsoft.com/office/drawing/2014/main" id="{CF055111-E472-1733-0738-4F4DC43F0968}"/>
+              </a:ext>
+            </a:extLst>
+          </p:cNvPr>
           <p:cNvPicPr>
             <a:picLocks noChangeAspect="1"/>
           </p:cNvPicPr>
@@ -5914,49 +9748,14 @@
         </p:blipFill>
         <p:spPr>
           <a:xfrm>
-            <a:off x="6675120" y="4114800"/>
-            <a:ext cx="5029200" cy="2286000"/>
+            <a:off x="555085" y="1417320"/>
+            <a:ext cx="5440681" cy="3429000"/>
           </a:xfrm>
           <a:prstGeom prst="rect">
             <a:avLst/>
           </a:prstGeom>
         </p:spPr>
       </p:pic>
-      <p:sp>
-        <p:nvSpPr>
-          <p:cNvPr id="8" name="TextBox 7"/>
-          <p:cNvSpPr txBox="1"/>
-          <p:nvPr/>
-        </p:nvSpPr>
-        <p:spPr>
-          <a:xfrm>
-            <a:off x="548640" y="6400800"/>
-            <a:ext cx="10972800" cy="365760"/>
-          </a:xfrm>
-          <a:prstGeom prst="rect">
-            <a:avLst/>
-          </a:prstGeom>
-          <a:noFill/>
-        </p:spPr>
-        <p:txBody>
-          <a:bodyPr wrap="none">
-            <a:spAutoFit/>
-          </a:bodyPr>
-          <a:lstStyle/>
-          <a:p>
-            <a:pPr algn="ctr">
-              <a:defRPr sz="1000">
-                <a:solidFill>
-                  <a:srgbClr val="666666"/>
-                </a:solidFill>
-              </a:defRPr>
-            </a:pPr>
-            <a:r>
-              <a:t>UCI Online Retail Analysis | Abdeljalil El Khyati | September 2026</a:t>
-            </a:r>
-          </a:p>
-        </p:txBody>
-      </p:sp>
     </p:spTree>
   </p:cSld>
   <p:clrMapOvr>
@@ -5968,6 +9767,14 @@
 <file path=ppt/slides/slide9.xml><?xml version="1.0" encoding="utf-8"?>
 <p:sld xmlns:a="http://schemas.openxmlformats.org/drawingml/2006/main" xmlns:r="http://schemas.openxmlformats.org/officeDocument/2006/relationships" xmlns:p="http://schemas.openxmlformats.org/presentationml/2006/main">
   <p:cSld>
+    <p:bg>
+      <p:bgPr>
+        <a:solidFill>
+          <a:srgbClr val="FFFFFF"/>
+        </a:solidFill>
+        <a:effectLst/>
+      </p:bgPr>
+    </p:bg>
     <p:spTree>
       <p:nvGrpSpPr>
         <p:cNvPr id="1" name=""/>
@@ -5991,7 +9798,7 @@
         <p:spPr>
           <a:xfrm>
             <a:off x="0" y="0"/>
-            <a:ext cx="12191695" cy="1097280"/>
+            <a:ext cx="12191695" cy="987552"/>
           </a:xfrm>
           <a:prstGeom prst="rect">
             <a:avLst/>
@@ -6034,8 +9841,8 @@
         </p:nvSpPr>
         <p:spPr>
           <a:xfrm>
-            <a:off x="548640" y="137160"/>
-            <a:ext cx="10972800" cy="822960"/>
+            <a:off x="502920" y="109728"/>
+            <a:ext cx="11064240" cy="594360"/>
           </a:xfrm>
           <a:prstGeom prst="rect">
             <a:avLst/>
@@ -6049,14 +9856,14 @@
           <a:lstStyle/>
           <a:p>
             <a:pPr>
-              <a:defRPr sz="3200" b="1">
+              <a:defRPr sz="2700" b="1">
                 <a:solidFill>
                   <a:srgbClr val="FFFFFF"/>
                 </a:solidFill>
               </a:defRPr>
             </a:pPr>
             <a:r>
-              <a:t>Strategic Recommendations</a:t>
+              <a:t>Recommended Action Areas</a:t>
             </a:r>
           </a:p>
         </p:txBody>
@@ -6069,8 +9876,8 @@
         </p:nvSpPr>
         <p:spPr>
           <a:xfrm>
-            <a:off x="548640" y="1143000"/>
-            <a:ext cx="10972800" cy="457200"/>
+            <a:off x="530352" y="1069848"/>
+            <a:ext cx="10972800" cy="411480"/>
           </a:xfrm>
           <a:prstGeom prst="rect">
             <a:avLst/>
@@ -6084,14 +9891,14 @@
           <a:lstStyle/>
           <a:p>
             <a:pPr>
-              <a:defRPr sz="1600" i="1">
+              <a:defRPr sz="1300">
                 <a:solidFill>
                   <a:srgbClr val="2E75B6"/>
                 </a:solidFill>
               </a:defRPr>
             </a:pPr>
             <a:r>
-              <a:t>Prioritized Action Plan</a:t>
+              <a:t>Actions are framed as testable business responses to observed evidence</a:t>
             </a:r>
           </a:p>
         </p:txBody>
@@ -6104,16 +9911,16 @@
         </p:nvSpPr>
         <p:spPr>
           <a:xfrm>
-            <a:off x="293807" y="1645920"/>
-            <a:ext cx="3657600" cy="4389120"/>
+            <a:off x="411480" y="1417320"/>
+            <a:ext cx="3657600" cy="3424503"/>
           </a:xfrm>
           <a:prstGeom prst="roundRect">
             <a:avLst/>
           </a:prstGeom>
           <a:solidFill>
-            <a:srgbClr val="FDEDEC"/>
+            <a:srgbClr val="FAEDEB"/>
           </a:solidFill>
-          <a:ln>
+          <a:ln w="16510">
             <a:solidFill>
               <a:srgbClr val="C0392B"/>
             </a:solidFill>
@@ -6150,57 +9957,67 @@
         </p:nvSpPr>
         <p:spPr>
           <a:xfrm>
-            <a:off x="548640" y="1716374"/>
-            <a:ext cx="3291840" cy="3057247"/>
-          </a:xfrm>
-          <a:prstGeom prst="rect">
-            <a:avLst/>
-          </a:prstGeom>
-          <a:noFill/>
-        </p:spPr>
-        <p:txBody>
-          <a:bodyPr wrap="square">
-            <a:spAutoFit/>
-          </a:bodyPr>
-          <a:lstStyle/>
-          <a:p>
-            <a:pPr>
-              <a:defRPr sz="1600" b="1">
+            <a:off x="640080" y="1627632"/>
+            <a:ext cx="3200400" cy="320040"/>
+          </a:xfrm>
+          <a:prstGeom prst="rect">
+            <a:avLst/>
+          </a:prstGeom>
+          <a:noFill/>
+        </p:spPr>
+        <p:txBody>
+          <a:bodyPr wrap="square" anchor="t">
+            <a:spAutoFit/>
+          </a:bodyPr>
+          <a:lstStyle/>
+          <a:p>
+            <a:pPr algn="l">
+              <a:defRPr sz="1600" b="1" i="0">
                 <a:solidFill>
                   <a:srgbClr val="C0392B"/>
                 </a:solidFill>
               </a:defRPr>
             </a:pPr>
             <a:r>
-              <a:rPr dirty="0"/>
-              <a:t>🔴 HIGH PRIORITY (30 Days)</a:t>
-            </a:r>
-            <a:endParaRPr lang="fr-FR" dirty="0"/>
-          </a:p>
-          <a:p>
-            <a:pPr>
-              <a:defRPr sz="1600" b="1">
-                <a:solidFill>
-                  <a:srgbClr val="C0392B"/>
-                </a:solidFill>
-              </a:defRPr>
-            </a:pPr>
-            <a:endParaRPr dirty="0"/>
-          </a:p>
+              <a:t>1. CUSTOMER RETENTION</a:t>
+            </a:r>
+          </a:p>
+        </p:txBody>
+      </p:sp>
+      <p:sp>
+        <p:nvSpPr>
+          <p:cNvPr id="7" name="TextBox 6"/>
+          <p:cNvSpPr txBox="1"/>
+          <p:nvPr/>
+        </p:nvSpPr>
+        <p:spPr>
+          <a:xfrm>
+            <a:off x="658368" y="2057400"/>
+            <a:ext cx="3154680" cy="3749039"/>
+          </a:xfrm>
+          <a:prstGeom prst="rect">
+            <a:avLst/>
+          </a:prstGeom>
+          <a:noFill/>
+        </p:spPr>
+        <p:txBody>
+          <a:bodyPr wrap="square" anchor="t">
+            <a:spAutoFit/>
+          </a:bodyPr>
+          <a:lstStyle/>
           <a:p>
             <a:pPr>
               <a:spcAft>
                 <a:spcPts val="1000"/>
               </a:spcAft>
-              <a:defRPr sz="1300">
-                <a:solidFill>
-                  <a:srgbClr val="333333"/>
-                </a:solidFill>
-              </a:defRPr>
-            </a:pPr>
-            <a:r>
-              <a:rPr sz="1600" dirty="0"/>
-              <a:t>R1: VIP loyalty program for 1,119 UK Champions + dedicated account managers.</a:t>
+              <a:defRPr sz="1320">
+                <a:solidFill>
+                  <a:srgbClr val="2D3238"/>
+                </a:solidFill>
+              </a:defRPr>
+            </a:pPr>
+            <a:r>
+              <a:t>Segment the 1,188 Potential Loyalists / At Risk customers for targeted retention tests.</a:t>
             </a:r>
           </a:p>
           <a:p>
@@ -6208,15 +10025,14 @@
               <a:spcAft>
                 <a:spcPts val="1000"/>
               </a:spcAft>
-              <a:defRPr sz="1300">
-                <a:solidFill>
-                  <a:srgbClr val="333333"/>
-                </a:solidFill>
-              </a:defRPr>
-            </a:pPr>
-            <a:r>
-              <a:rPr sz="1600" dirty="0"/>
-              <a:t>R2: Win-back email campaign for 1,188 At Risk customers (15% discount). Expected impact: ~£690K.</a:t>
+              <a:defRPr sz="1320">
+                <a:solidFill>
+                  <a:srgbClr val="2D3238"/>
+                </a:solidFill>
+              </a:defRPr>
+            </a:pPr>
+            <a:r>
+              <a:t>Use the historical £689K revenue baseline as context, not as a guaranteed recovery forecast.</a:t>
             </a:r>
           </a:p>
           <a:p>
@@ -6224,37 +10040,36 @@
               <a:spcAft>
                 <a:spcPts val="1000"/>
               </a:spcAft>
-              <a:defRPr sz="1300">
-                <a:solidFill>
-                  <a:srgbClr val="333333"/>
-                </a:solidFill>
-              </a:defRPr>
-            </a:pPr>
-            <a:r>
-              <a:rPr sz="1600" dirty="0"/>
-              <a:t>R3: Discontinue or bundle Bottom 10 products (&lt;£12/year each) to free warehouse space.</a:t>
-            </a:r>
-          </a:p>
-        </p:txBody>
-      </p:sp>
-      <p:sp>
-        <p:nvSpPr>
-          <p:cNvPr id="7" name="Rounded Rectangle 6"/>
+              <a:defRPr sz="1320">
+                <a:solidFill>
+                  <a:srgbClr val="2D3238"/>
+                </a:solidFill>
+              </a:defRPr>
+            </a:pPr>
+            <a:r>
+              <a:t>Compare campaign performance against a control group before scaling.</a:t>
+            </a:r>
+          </a:p>
+        </p:txBody>
+      </p:sp>
+      <p:sp>
+        <p:nvSpPr>
+          <p:cNvPr id="8" name="Rounded Rectangle 7"/>
           <p:cNvSpPr/>
           <p:nvPr/>
         </p:nvSpPr>
         <p:spPr>
           <a:xfrm>
-            <a:off x="4206240" y="1645920"/>
-            <a:ext cx="3657600" cy="4389120"/>
+            <a:off x="4270248" y="1417320"/>
+            <a:ext cx="3657600" cy="3424503"/>
           </a:xfrm>
           <a:prstGeom prst="roundRect">
             <a:avLst/>
           </a:prstGeom>
           <a:solidFill>
-            <a:srgbClr val="FEF5E7"/>
+            <a:srgbClr val="FCF2E6"/>
           </a:solidFill>
-          <a:ln>
+          <a:ln w="16510">
             <a:solidFill>
               <a:srgbClr val="E67E22"/>
             </a:solidFill>
@@ -6285,63 +10100,73 @@
       </p:sp>
       <p:sp>
         <p:nvSpPr>
-          <p:cNvPr id="8" name="TextBox 7"/>
-          <p:cNvSpPr txBox="1"/>
-          <p:nvPr/>
-        </p:nvSpPr>
-        <p:spPr>
-          <a:xfrm>
-            <a:off x="4389120" y="1716374"/>
-            <a:ext cx="3291840" cy="3303468"/>
-          </a:xfrm>
-          <a:prstGeom prst="rect">
-            <a:avLst/>
-          </a:prstGeom>
-          <a:noFill/>
-        </p:spPr>
-        <p:txBody>
-          <a:bodyPr wrap="square">
-            <a:spAutoFit/>
-          </a:bodyPr>
-          <a:lstStyle/>
-          <a:p>
-            <a:pPr>
-              <a:defRPr sz="1600" b="1">
+          <p:cNvPr id="9" name="TextBox 8"/>
+          <p:cNvSpPr txBox="1"/>
+          <p:nvPr/>
+        </p:nvSpPr>
+        <p:spPr>
+          <a:xfrm>
+            <a:off x="4498848" y="1627632"/>
+            <a:ext cx="3200400" cy="320040"/>
+          </a:xfrm>
+          <a:prstGeom prst="rect">
+            <a:avLst/>
+          </a:prstGeom>
+          <a:noFill/>
+        </p:spPr>
+        <p:txBody>
+          <a:bodyPr wrap="square" anchor="t">
+            <a:spAutoFit/>
+          </a:bodyPr>
+          <a:lstStyle/>
+          <a:p>
+            <a:pPr algn="l">
+              <a:defRPr sz="1600" b="1" i="0">
                 <a:solidFill>
                   <a:srgbClr val="E67E22"/>
                 </a:solidFill>
               </a:defRPr>
             </a:pPr>
             <a:r>
-              <a:rPr dirty="0"/>
-              <a:t>🟡 MEDIUM PRIORITY (90 Days)</a:t>
-            </a:r>
-            <a:endParaRPr lang="fr-FR" dirty="0"/>
-          </a:p>
-          <a:p>
-            <a:pPr>
-              <a:defRPr sz="1600" b="1">
-                <a:solidFill>
-                  <a:srgbClr val="E67E22"/>
-                </a:solidFill>
-              </a:defRPr>
-            </a:pPr>
-            <a:endParaRPr dirty="0"/>
-          </a:p>
+              <a:t>2. SEASONAL PLANNING</a:t>
+            </a:r>
+          </a:p>
+        </p:txBody>
+      </p:sp>
+      <p:sp>
+        <p:nvSpPr>
+          <p:cNvPr id="10" name="TextBox 9"/>
+          <p:cNvSpPr txBox="1"/>
+          <p:nvPr/>
+        </p:nvSpPr>
+        <p:spPr>
+          <a:xfrm>
+            <a:off x="4526280" y="2057400"/>
+            <a:ext cx="3154680" cy="3749039"/>
+          </a:xfrm>
+          <a:prstGeom prst="rect">
+            <a:avLst/>
+          </a:prstGeom>
+          <a:noFill/>
+        </p:spPr>
+        <p:txBody>
+          <a:bodyPr wrap="square" anchor="t">
+            <a:spAutoFit/>
+          </a:bodyPr>
+          <a:lstStyle/>
           <a:p>
             <a:pPr>
               <a:spcAft>
                 <a:spcPts val="1000"/>
               </a:spcAft>
-              <a:defRPr sz="1300">
-                <a:solidFill>
-                  <a:srgbClr val="333333"/>
-                </a:solidFill>
-              </a:defRPr>
-            </a:pPr>
-            <a:r>
-              <a:rPr sz="1600" dirty="0"/>
-              <a:t>R4: Dual-track seasonal inventory — pre-build RABBIT NIGHT LIGHT by early Oct; Christmas SKUs by mid-Sept.</a:t>
+              <a:defRPr sz="1320">
+                <a:solidFill>
+                  <a:srgbClr val="2D3238"/>
+                </a:solidFill>
+              </a:defRPr>
+            </a:pPr>
+            <a:r>
+              <a:t>Use the November product-mix shift to support seasonal planning.</a:t>
             </a:r>
           </a:p>
           <a:p>
@@ -6349,15 +10174,14 @@
               <a:spcAft>
                 <a:spcPts val="1000"/>
               </a:spcAft>
-              <a:defRPr sz="1300">
-                <a:solidFill>
-                  <a:srgbClr val="333333"/>
-                </a:solidFill>
-              </a:defRPr>
-            </a:pPr>
-            <a:r>
-              <a:rPr sz="1600" dirty="0"/>
-              <a:t>R5: International diversification — target France/Germany; assign managers to EIRE/NL whale clients.</a:t>
+              <a:defRPr sz="1320">
+                <a:solidFill>
+                  <a:srgbClr val="2D3238"/>
+                </a:solidFill>
+              </a:defRPr>
+            </a:pPr>
+            <a:r>
+              <a:t>Monitor RABBIT NIGHT LIGHT and the top seasonal-lift products before the next peak period.</a:t>
             </a:r>
           </a:p>
           <a:p>
@@ -6365,37 +10189,36 @@
               <a:spcAft>
                 <a:spcPts val="1000"/>
               </a:spcAft>
-              <a:defRPr sz="1300">
-                <a:solidFill>
-                  <a:srgbClr val="333333"/>
-                </a:solidFill>
-              </a:defRPr>
-            </a:pPr>
-            <a:r>
-              <a:rPr sz="1600" dirty="0"/>
-              <a:t>R6: Separate Product Revenue (£10.28M) from Operational Revenue (£362K) in all dashboards.</a:t>
-            </a:r>
-          </a:p>
-        </p:txBody>
-      </p:sp>
-      <p:sp>
-        <p:nvSpPr>
-          <p:cNvPr id="9" name="Rounded Rectangle 8"/>
+              <a:defRPr sz="1320">
+                <a:solidFill>
+                  <a:srgbClr val="2D3238"/>
+                </a:solidFill>
+              </a:defRPr>
+            </a:pPr>
+            <a:r>
+              <a:t>Separate recurring high-volume demand from products whose performance is concentrated in November.</a:t>
+            </a:r>
+          </a:p>
+        </p:txBody>
+      </p:sp>
+      <p:sp>
+        <p:nvSpPr>
+          <p:cNvPr id="11" name="Rounded Rectangle 10"/>
           <p:cNvSpPr/>
           <p:nvPr/>
         </p:nvSpPr>
         <p:spPr>
           <a:xfrm>
-            <a:off x="8046720" y="1645920"/>
-            <a:ext cx="3657600" cy="4389120"/>
+            <a:off x="8129016" y="1417320"/>
+            <a:ext cx="3657600" cy="3424503"/>
           </a:xfrm>
           <a:prstGeom prst="roundRect">
             <a:avLst/>
           </a:prstGeom>
           <a:solidFill>
-            <a:srgbClr val="E8F5E9"/>
+            <a:srgbClr val="EAF6EF"/>
           </a:solidFill>
-          <a:ln>
+          <a:ln w="16510">
             <a:solidFill>
               <a:srgbClr val="2E8B57"/>
             </a:solidFill>
@@ -6426,63 +10249,73 @@
       </p:sp>
       <p:sp>
         <p:nvSpPr>
-          <p:cNvPr id="10" name="TextBox 9"/>
-          <p:cNvSpPr txBox="1"/>
-          <p:nvPr/>
-        </p:nvSpPr>
-        <p:spPr>
-          <a:xfrm>
-            <a:off x="8301553" y="1772587"/>
-            <a:ext cx="3291840" cy="2811026"/>
-          </a:xfrm>
-          <a:prstGeom prst="rect">
-            <a:avLst/>
-          </a:prstGeom>
-          <a:noFill/>
-        </p:spPr>
-        <p:txBody>
-          <a:bodyPr wrap="square">
-            <a:spAutoFit/>
-          </a:bodyPr>
-          <a:lstStyle/>
-          <a:p>
-            <a:pPr>
-              <a:defRPr sz="1600" b="1">
+          <p:cNvPr id="12" name="TextBox 11"/>
+          <p:cNvSpPr txBox="1"/>
+          <p:nvPr/>
+        </p:nvSpPr>
+        <p:spPr>
+          <a:xfrm>
+            <a:off x="8357616" y="1627632"/>
+            <a:ext cx="3200400" cy="502920"/>
+          </a:xfrm>
+          <a:prstGeom prst="rect">
+            <a:avLst/>
+          </a:prstGeom>
+          <a:noFill/>
+        </p:spPr>
+        <p:txBody>
+          <a:bodyPr wrap="square" anchor="t">
+            <a:spAutoFit/>
+          </a:bodyPr>
+          <a:lstStyle/>
+          <a:p>
+            <a:pPr algn="l">
+              <a:defRPr sz="1500" b="1" i="0">
                 <a:solidFill>
                   <a:srgbClr val="2E8B57"/>
                 </a:solidFill>
               </a:defRPr>
             </a:pPr>
             <a:r>
-              <a:rPr dirty="0"/>
-              <a:t> LONG-TERM (6-12 Months)</a:t>
-            </a:r>
-            <a:endParaRPr lang="fr-FR" dirty="0"/>
-          </a:p>
-          <a:p>
-            <a:pPr>
-              <a:defRPr sz="1600" b="1">
-                <a:solidFill>
-                  <a:srgbClr val="2E8B57"/>
-                </a:solidFill>
-              </a:defRPr>
-            </a:pPr>
-            <a:endParaRPr dirty="0"/>
-          </a:p>
+              <a:t>3. CONCENTRATION &amp; PORTFOLIO REVIEW</a:t>
+            </a:r>
+          </a:p>
+        </p:txBody>
+      </p:sp>
+      <p:sp>
+        <p:nvSpPr>
+          <p:cNvPr id="13" name="TextBox 12"/>
+          <p:cNvSpPr txBox="1"/>
+          <p:nvPr/>
+        </p:nvSpPr>
+        <p:spPr>
+          <a:xfrm>
+            <a:off x="8385048" y="2240280"/>
+            <a:ext cx="3154680" cy="3566160"/>
+          </a:xfrm>
+          <a:prstGeom prst="rect">
+            <a:avLst/>
+          </a:prstGeom>
+          <a:noFill/>
+        </p:spPr>
+        <p:txBody>
+          <a:bodyPr wrap="square" anchor="t">
+            <a:spAutoFit/>
+          </a:bodyPr>
+          <a:lstStyle/>
           <a:p>
             <a:pPr>
               <a:spcAft>
                 <a:spcPts val="1000"/>
               </a:spcAft>
-              <a:defRPr sz="1300">
-                <a:solidFill>
-                  <a:srgbClr val="333333"/>
-                </a:solidFill>
-              </a:defRPr>
-            </a:pPr>
-            <a:r>
-              <a:rPr sz="1600" dirty="0"/>
-              <a:t>R7: Guest-to-registered conversion — post-purchase email flows for 15-23% Unknown customer revenue.</a:t>
+              <a:defRPr sz="1320">
+                <a:solidFill>
+                  <a:srgbClr val="2D3238"/>
+                </a:solidFill>
+              </a:defRPr>
+            </a:pPr>
+            <a:r>
+              <a:t>Monitor UK concentration: 84.6% of revenue and 1,119 Champions.</a:t>
             </a:r>
           </a:p>
           <a:p>
@@ -6490,15 +10323,14 @@
               <a:spcAft>
                 <a:spcPts val="1000"/>
               </a:spcAft>
-              <a:defRPr sz="1300">
-                <a:solidFill>
-                  <a:srgbClr val="333333"/>
-                </a:solidFill>
-              </a:defRPr>
-            </a:pPr>
-            <a:r>
-              <a:rPr sz="1600" dirty="0"/>
-              <a:t>R8: Upsell 1,022 Loyal Customers to Champions via volume-based bundle discounts.</a:t>
+              <a:defRPr sz="1320">
+                <a:solidFill>
+                  <a:srgbClr val="2D3238"/>
+                </a:solidFill>
+              </a:defRPr>
+            </a:pPr>
+            <a:r>
+              <a:t>Evaluate international markets using both revenue and customer counts, especially where sample sizes are small.</a:t>
             </a:r>
           </a:p>
           <a:p>
@@ -6506,29 +10338,28 @@
               <a:spcAft>
                 <a:spcPts val="1000"/>
               </a:spcAft>
-              <a:defRPr sz="1300">
-                <a:solidFill>
-                  <a:srgbClr val="333333"/>
-                </a:solidFill>
-              </a:defRPr>
-            </a:pPr>
-            <a:r>
-              <a:rPr sz="1600" dirty="0"/>
-              <a:t>Target: Reduce UK revenue share from 84.6% to &lt;70% within 2 years.</a:t>
-            </a:r>
-          </a:p>
-        </p:txBody>
-      </p:sp>
-      <p:sp>
-        <p:nvSpPr>
-          <p:cNvPr id="11" name="TextBox 10"/>
-          <p:cNvSpPr txBox="1"/>
-          <p:nvPr/>
-        </p:nvSpPr>
-        <p:spPr>
-          <a:xfrm>
-            <a:off x="548640" y="6400800"/>
-            <a:ext cx="10972800" cy="365760"/>
+              <a:defRPr sz="1320">
+                <a:solidFill>
+                  <a:srgbClr val="2D3238"/>
+                </a:solidFill>
+              </a:defRPr>
+            </a:pPr>
+            <a:r>
+              <a:t>Review the low-revenue product tail before making catalog or inventory decisions.</a:t>
+            </a:r>
+          </a:p>
+        </p:txBody>
+      </p:sp>
+      <p:sp>
+        <p:nvSpPr>
+          <p:cNvPr id="14" name="TextBox 13"/>
+          <p:cNvSpPr txBox="1"/>
+          <p:nvPr/>
+        </p:nvSpPr>
+        <p:spPr>
+          <a:xfrm>
+            <a:off x="502920" y="6446520"/>
+            <a:ext cx="11155680" cy="228600"/>
           </a:xfrm>
           <a:prstGeom prst="rect">
             <a:avLst/>
@@ -6542,9 +10373,9 @@
           <a:lstStyle/>
           <a:p>
             <a:pPr algn="ctr">
-              <a:defRPr sz="1000">
-                <a:solidFill>
-                  <a:srgbClr val="666666"/>
+              <a:defRPr sz="850">
+                <a:solidFill>
+                  <a:srgbClr val="6E7681"/>
                 </a:solidFill>
               </a:defRPr>
             </a:pPr>
